--- a/video_slides.pptx
+++ b/video_slides.pptx
@@ -4347,7 +4347,7 @@
                 </a:solidFill>
                 <a:latin typeface="Calibri"/>
               </a:rPr>
-              <a:t>A transceiver is built as separate blocks: coding, modulation, channel estimation, detection.</a:t>
+              <a:t>A conventional transceiver design treats coding, modulation, channel estimation and detection as separate blocks.</a:t>
             </a:r>
           </a:p>
           <a:p>
@@ -4366,7 +4366,7 @@
                 </a:solidFill>
                 <a:latin typeface="Calibri"/>
               </a:rPr>
-              <a:t>Each block is optimal on its own. The complete receiver is limited by the assumptions that link them.</a:t>
+              <a:t>Each block is optimal for its own task, but not for the system as a whole. Consequently, the end-to-end performance is limited.</a:t>
             </a:r>
           </a:p>
           <a:p>
@@ -4385,7 +4385,7 @@
                 </a:solidFill>
                 <a:latin typeface="Calibri"/>
               </a:rPr>
-              <a:t>Deep learning proposes training them together. Two objections are usually raised.</a:t>
+              <a:t>Instead, the transmitter and receiver blocks can be replaced by deep neural networks, jointly optimised as an autoencoder.</a:t>
             </a:r>
           </a:p>
         </p:txBody>
@@ -4398,8 +4398,8 @@
         </p:nvSpPr>
         <p:spPr>
           <a:xfrm>
-            <a:off x="685800" y="3794760"/>
-            <a:ext cx="5486400" cy="914400"/>
+            <a:off x="685800" y="3977639"/>
+            <a:ext cx="5486400" cy="960120"/>
           </a:xfrm>
           <a:prstGeom prst="roundRect">
             <a:avLst>
@@ -4444,7 +4444,7 @@
         </p:nvSpPr>
         <p:spPr>
           <a:xfrm>
-            <a:off x="960120" y="3977639"/>
+            <a:off x="960120" y="4178808"/>
             <a:ext cx="4937760" cy="640080"/>
           </a:xfrm>
           <a:prstGeom prst="rect">
@@ -4473,7 +4473,7 @@
                 </a:solidFill>
                 <a:latin typeface="Calibri"/>
               </a:rPr>
-              <a:t>Training needs a differentiable channel model. A real channel is a black box.</a:t>
+              <a:t>Training needs a differentiable channel model. In practice the channel is a black box: only its inputs and outputs can be observed.</a:t>
             </a:r>
           </a:p>
         </p:txBody>
@@ -4486,8 +4486,8 @@
         </p:nvSpPr>
         <p:spPr>
           <a:xfrm>
-            <a:off x="685800" y="4892040"/>
-            <a:ext cx="5486400" cy="914400"/>
+            <a:off x="685800" y="5120640"/>
+            <a:ext cx="5486400" cy="960120"/>
           </a:xfrm>
           <a:prstGeom prst="roundRect">
             <a:avLst>
@@ -4532,7 +4532,7 @@
         </p:nvSpPr>
         <p:spPr>
           <a:xfrm>
-            <a:off x="960120" y="5074920"/>
+            <a:off x="960120" y="5321808"/>
             <a:ext cx="4937760" cy="640080"/>
           </a:xfrm>
           <a:prstGeom prst="rect">
@@ -4653,7 +4653,7 @@
         <p:spPr>
           <a:xfrm>
             <a:off x="7452360" y="2148840"/>
-            <a:ext cx="4069080" cy="365760"/>
+            <a:ext cx="4069080" cy="731520"/>
           </a:xfrm>
           <a:prstGeom prst="rect">
             <a:avLst/>
@@ -4773,7 +4773,7 @@
         <p:spPr>
           <a:xfrm>
             <a:off x="7452360" y="3794759"/>
-            <a:ext cx="4069080" cy="365760"/>
+            <a:ext cx="4069080" cy="731520"/>
           </a:xfrm>
           <a:prstGeom prst="rect">
             <a:avLst/>
@@ -4798,7 +4798,7 @@
                 </a:solidFill>
                 <a:latin typeface="Calibri"/>
               </a:rPr>
-              <a:t>Can it train with no channel model?</a:t>
+              <a:t>Can the end-to-end system train with no channel model?</a:t>
             </a:r>
           </a:p>
         </p:txBody>
@@ -4811,7 +4811,7 @@
         </p:nvSpPr>
         <p:spPr>
           <a:xfrm>
-            <a:off x="7452360" y="4224527"/>
+            <a:off x="7452360" y="4590287"/>
             <a:ext cx="4069080" cy="1097280"/>
           </a:xfrm>
           <a:prstGeom prst="rect">
@@ -4840,7 +4840,7 @@
                 </a:solidFill>
                 <a:latin typeface="Calibri"/>
               </a:rPr>
-              <a:t>The transmitter never differentiates the channel, only samples it.</a:t>
+              <a:t>The channel is sampled, never differentiated.</a:t>
             </a:r>
           </a:p>
         </p:txBody>
@@ -5407,7 +5407,7 @@
                 </a:solidFill>
                 <a:latin typeface="Calibri"/>
               </a:rPr>
-              <a:t>Only the two shaded blocks differ. Same LDPC code, same channel, same random seeds.</a:t>
+              <a:t>Only the two shaded blocks differ. Same LDPC code, same channel, same random seeds, and both systems evaluated on the same terms.</a:t>
             </a:r>
           </a:p>
         </p:txBody>
@@ -5800,7 +5800,7 @@
                 </a:solidFill>
                 <a:latin typeface="Calibri"/>
               </a:rPr>
-              <a:t>APP demapping is already optimal here, so the receiver cannot be the source of the gain.</a:t>
+              <a:t>A posteriori probability (APP) demapping is already optimal here, so the receiver cannot be the source of the gain.</a:t>
             </a:r>
           </a:p>
           <a:p>
@@ -6800,7 +6800,7 @@
                 </a:solidFill>
                 <a:latin typeface="Calibri"/>
               </a:rPr>
-              <a:t>Under Rayleigh with estimated CSI we measured no gain. The value at 1e-4 changed sign between two runs, so we treat it as noise.</a:t>
+              <a:t>Under Rayleigh with estimated CSI there is a small gain at 1e-2 and 1e-3, of 0.01 and 0.11 dB, and a loss of 0.15 dB at 1e-4.</a:t>
             </a:r>
           </a:p>
         </p:txBody>
@@ -6931,7 +6931,7 @@
                 </a:solidFill>
                 <a:latin typeface="Calibri"/>
               </a:rPr>
-              <a:t>The receiver trains as usual, but its gradient never reaches the channel.</a:t>
+              <a:t>There is no channel layer connecting the two neural networks, because the channel is not differentiable.</a:t>
             </a:r>
           </a:p>
           <a:p>
@@ -6950,7 +6950,7 @@
                 </a:solidFill>
                 <a:latin typeface="Calibri"/>
               </a:rPr>
-              <a:t>The transmitter perturbs its own symbols, receives one scalar loss value per codeword, and updates from that. The channel is only sampled.</a:t>
+              <a:t>We feed the training loss from the receiver back to the transmitter, which is then trained by reinforcement learning. The two networks are still jointly optimised, without a channel model.</a:t>
             </a:r>
           </a:p>
         </p:txBody>
@@ -7269,7 +7269,7 @@
         <p:spPr>
           <a:xfrm>
             <a:off x="1371600" y="2194560"/>
-            <a:ext cx="4983480" cy="365760"/>
+            <a:ext cx="4983480" cy="731520"/>
           </a:xfrm>
           <a:prstGeom prst="rect">
             <a:avLst/>
@@ -7389,7 +7389,7 @@
         <p:spPr>
           <a:xfrm>
             <a:off x="1371600" y="4206240"/>
-            <a:ext cx="4983480" cy="365760"/>
+            <a:ext cx="4983480" cy="731520"/>
           </a:xfrm>
           <a:prstGeom prst="rect">
             <a:avLst/>
@@ -7778,7 +7778,7 @@
         <p:spPr>
           <a:xfrm>
             <a:off x="1371600" y="2194560"/>
-            <a:ext cx="4983480" cy="365760"/>
+            <a:ext cx="4983480" cy="731520"/>
           </a:xfrm>
           <a:prstGeom prst="rect">
             <a:avLst/>
@@ -7898,7 +7898,7 @@
         <p:spPr>
           <a:xfrm>
             <a:off x="1371600" y="4206240"/>
-            <a:ext cx="4983480" cy="365760"/>
+            <a:ext cx="4983480" cy="731520"/>
           </a:xfrm>
           <a:prstGeom prst="rect">
             <a:avLst/>
@@ -8237,7 +8237,7 @@
                 </a:solidFill>
                 <a:latin typeface="Calibri"/>
               </a:rPr>
-              <a:t>The honest answer under fading was "no gain".</a:t>
+              <a:t>Under fading the measured gain is small, and at 1e-4 it goes the other way.</a:t>
             </a:r>
           </a:p>
           <a:p>
@@ -8256,7 +8256,7 @@
                 </a:solidFill>
                 <a:latin typeface="Calibri"/>
               </a:rPr>
-              <a:t>That looks like a failed result, until you notice the interesting finding was somewhere else entirely.</a:t>
+              <a:t>That looks like a disappointing result, until you notice the interesting finding was somewhere else entirely.</a:t>
             </a:r>
           </a:p>
         </p:txBody>
@@ -8344,7 +8344,7 @@
                 </a:solidFill>
                 <a:latin typeface="Calibri"/>
               </a:rPr>
-              <a:t>A measurement that shows no gain is worth as much as one that shows a gain, provided it is clean enough to trust.</a:t>
+              <a:t>A measurement that shows little is worth as much as one that shows a lot, provided it is clean enough to trust.</a:t>
             </a:r>
           </a:p>
           <a:p>
@@ -8363,7 +8363,7 @@
                 </a:solidFill>
                 <a:latin typeface="Calibri"/>
               </a:rPr>
-              <a:t>The case for an AI-native transceiver is not accuracy. It is that it needs no channel model, and we can now say what that costs.</a:t>
+              <a:t>The end-to-end system can be trained with no channel model, and we can now say what that costs.</a:t>
             </a:r>
           </a:p>
         </p:txBody>

--- a/video_slides.pptx
+++ b/video_slides.pptx
@@ -4,18 +4,21 @@
   <p:sldMasterIdLst>
     <p:sldMasterId id="2147483648" r:id="rId1"/>
   </p:sldMasterIdLst>
+  <p:notesMasterIdLst>
+    <p:notesMasterId r:id="rId11"/>
+  </p:notesMasterIdLst>
   <p:sldIdLst>
-    <p:sldId id="256" r:id="rId7"/>
-    <p:sldId id="257" r:id="rId9"/>
-    <p:sldId id="258" r:id="rId10"/>
-    <p:sldId id="259" r:id="rId11"/>
-    <p:sldId id="260" r:id="rId12"/>
-    <p:sldId id="261" r:id="rId13"/>
-    <p:sldId id="262" r:id="rId14"/>
-    <p:sldId id="263" r:id="rId15"/>
-    <p:sldId id="264" r:id="rId16"/>
+    <p:sldId id="256" r:id="rId2"/>
+    <p:sldId id="257" r:id="rId3"/>
+    <p:sldId id="258" r:id="rId4"/>
+    <p:sldId id="259" r:id="rId5"/>
+    <p:sldId id="260" r:id="rId6"/>
+    <p:sldId id="261" r:id="rId7"/>
+    <p:sldId id="262" r:id="rId8"/>
+    <p:sldId id="263" r:id="rId9"/>
+    <p:sldId id="264" r:id="rId10"/>
   </p:sldIdLst>
-  <p:sldSz cx="12191695" cy="6858000" type="screen4x3"/>
+  <p:sldSz cx="12192000" cy="6858000"/>
   <p:notesSz cx="6858000" cy="9144000"/>
   <p:defaultTextStyle>
     <a:defPPr>
@@ -112,11 +115,27 @@
       </a:defRPr>
     </a:lvl9pPr>
   </p:defaultTextStyle>
+  <p:extLst>
+    <p:ext uri="{EFAFB233-063F-42B5-8137-9DF3F51BA10A}">
+      <p15:sldGuideLst xmlns:p15="http://schemas.microsoft.com/office/powerpoint/2012/main">
+        <p15:guide id="1" orient="horz" pos="2160">
+          <p15:clr>
+            <a:srgbClr val="A4A3A4"/>
+          </p15:clr>
+        </p15:guide>
+        <p15:guide id="2" pos="2880">
+          <p15:clr>
+            <a:srgbClr val="A4A3A4"/>
+          </p15:clr>
+        </p15:guide>
+      </p15:sldGuideLst>
+    </p:ext>
+  </p:extLst>
 </p:presentation>
 </file>
 
 <file path=ppt/notesMasters/notesMaster1.xml><?xml version="1.0" encoding="utf-8"?>
-<p:notesMaster xmlns:a="http://schemas.openxmlformats.org/drawingml/2006/main" xmlns:p="http://schemas.openxmlformats.org/presentationml/2006/main" xmlns:r="http://schemas.openxmlformats.org/officeDocument/2006/relationships">
+<p:notesMaster xmlns:a="http://schemas.openxmlformats.org/drawingml/2006/main" xmlns:r="http://schemas.openxmlformats.org/officeDocument/2006/relationships" xmlns:p="http://schemas.openxmlformats.org/presentationml/2006/main">
   <p:cSld>
     <p:bg>
       <p:bgRef idx="1001">
@@ -137,241 +156,16 @@
           <a:chExt cx="0" cy="0"/>
         </a:xfrm>
       </p:grpSpPr>
-      <p:sp>
-        <p:nvSpPr>
-          <p:cNvPr id="2" name="Header Placeholder 1"/>
-          <p:cNvSpPr>
-            <a:spLocks noGrp="1"/>
-          </p:cNvSpPr>
-          <p:nvPr>
-            <p:ph type="hdr" sz="quarter"/>
-          </p:nvPr>
-        </p:nvSpPr>
-        <p:spPr>
-          <a:xfrm>
-            <a:off x="0" y="0"/>
-            <a:ext cx="2971800" cy="457200"/>
-          </a:xfrm>
-          <a:prstGeom prst="rect">
-            <a:avLst/>
-          </a:prstGeom>
-        </p:spPr>
-        <p:txBody>
-          <a:bodyPr vert="horz" lIns="91440" tIns="45720" rIns="91440" bIns="45720" rtlCol="0"/>
-          <a:lstStyle>
-            <a:lvl1pPr algn="l">
-              <a:defRPr sz="1200"/>
-            </a:lvl1pPr>
-          </a:lstStyle>
-          <a:p>
-            <a:endParaRPr lang="en-US"/>
-          </a:p>
-        </p:txBody>
-      </p:sp>
-      <p:sp>
-        <p:nvSpPr>
-          <p:cNvPr id="3" name="Date Placeholder 2"/>
-          <p:cNvSpPr>
-            <a:spLocks noGrp="1"/>
-          </p:cNvSpPr>
-          <p:nvPr>
-            <p:ph type="dt" idx="1"/>
-          </p:nvPr>
-        </p:nvSpPr>
-        <p:spPr>
-          <a:xfrm>
-            <a:off x="3884613" y="0"/>
-            <a:ext cx="2971800" cy="457200"/>
-          </a:xfrm>
-          <a:prstGeom prst="rect">
-            <a:avLst/>
-          </a:prstGeom>
-        </p:spPr>
-        <p:txBody>
-          <a:bodyPr vert="horz" lIns="91440" tIns="45720" rIns="91440" bIns="45720" rtlCol="0"/>
-          <a:lstStyle>
-            <a:lvl1pPr algn="r">
-              <a:defRPr sz="1200"/>
-            </a:lvl1pPr>
-          </a:lstStyle>
-          <a:p>
-            <a:fld id="{0F89C1C7-3DCD-1040-A9CF-14679D8B5DDD}" type="datetimeFigureOut">
-              <a:rPr lang="en-US" smtClean="0"/>
-              <a:t>10/17/16</a:t>
-            </a:fld>
-            <a:endParaRPr lang="en-US"/>
-          </a:p>
-        </p:txBody>
-      </p:sp>
-      <p:sp>
-        <p:nvSpPr>
-          <p:cNvPr id="4" name="Slide Image Placeholder 3"/>
-          <p:cNvSpPr>
-            <a:spLocks noGrp="1" noRot="1" noChangeAspect="1"/>
-          </p:cNvSpPr>
-          <p:nvPr>
-            <p:ph type="sldImg" idx="2"/>
-          </p:nvPr>
-        </p:nvSpPr>
-        <p:spPr>
-          <a:xfrm>
-            <a:off x="1143000" y="685800"/>
-            <a:ext cx="4572000" cy="3429000"/>
-          </a:xfrm>
-          <a:prstGeom prst="rect">
-            <a:avLst/>
-          </a:prstGeom>
-          <a:noFill/>
-          <a:ln w="12700">
-            <a:solidFill>
-              <a:prstClr val="black"/>
-            </a:solidFill>
-          </a:ln>
-        </p:spPr>
-        <p:txBody>
-          <a:bodyPr vert="horz" lIns="91440" tIns="45720" rIns="91440" bIns="45720" rtlCol="0" anchor="ctr"/>
-          <a:lstStyle/>
-          <a:p>
-            <a:endParaRPr lang="en-US"/>
-          </a:p>
-        </p:txBody>
-      </p:sp>
-      <p:sp>
-        <p:nvSpPr>
-          <p:cNvPr id="5" name="Notes Placeholder 4"/>
-          <p:cNvSpPr>
-            <a:spLocks noGrp="1"/>
-          </p:cNvSpPr>
-          <p:nvPr>
-            <p:ph type="body" sz="quarter" idx="3"/>
-          </p:nvPr>
-        </p:nvSpPr>
-        <p:spPr>
-          <a:xfrm>
-            <a:off x="685800" y="4343400"/>
-            <a:ext cx="5486400" cy="4114800"/>
-          </a:xfrm>
-          <a:prstGeom prst="rect">
-            <a:avLst/>
-          </a:prstGeom>
-        </p:spPr>
-        <p:txBody>
-          <a:bodyPr vert="horz" lIns="91440" tIns="45720" rIns="91440" bIns="45720" rtlCol="0"/>
-          <a:lstStyle/>
-          <a:p>
-            <a:pPr lvl="0"/>
-            <a:r>
-              <a:rPr lang="en-US" smtClean="0"/>
-              <a:t>Click to edit Master text styles</a:t>
-            </a:r>
-          </a:p>
-          <a:p>
-            <a:pPr lvl="1"/>
-            <a:r>
-              <a:rPr lang="en-US" smtClean="0"/>
-              <a:t>Second level</a:t>
-            </a:r>
-          </a:p>
-          <a:p>
-            <a:pPr lvl="2"/>
-            <a:r>
-              <a:rPr lang="en-US" smtClean="0"/>
-              <a:t>Third level</a:t>
-            </a:r>
-          </a:p>
-          <a:p>
-            <a:pPr lvl="3"/>
-            <a:r>
-              <a:rPr lang="en-US" smtClean="0"/>
-              <a:t>Fourth level</a:t>
-            </a:r>
-          </a:p>
-          <a:p>
-            <a:pPr lvl="4"/>
-            <a:r>
-              <a:rPr lang="en-US" smtClean="0"/>
-              <a:t>Fifth level</a:t>
-            </a:r>
-            <a:endParaRPr lang="en-US"/>
-          </a:p>
-        </p:txBody>
-      </p:sp>
-      <p:sp>
-        <p:nvSpPr>
-          <p:cNvPr id="6" name="Footer Placeholder 5"/>
-          <p:cNvSpPr>
-            <a:spLocks noGrp="1"/>
-          </p:cNvSpPr>
-          <p:nvPr>
-            <p:ph type="ftr" sz="quarter" idx="4"/>
-          </p:nvPr>
-        </p:nvSpPr>
-        <p:spPr>
-          <a:xfrm>
-            <a:off x="0" y="8685213"/>
-            <a:ext cx="2971800" cy="457200"/>
-          </a:xfrm>
-          <a:prstGeom prst="rect">
-            <a:avLst/>
-          </a:prstGeom>
-        </p:spPr>
-        <p:txBody>
-          <a:bodyPr vert="horz" lIns="91440" tIns="45720" rIns="91440" bIns="45720" rtlCol="0" anchor="b"/>
-          <a:lstStyle>
-            <a:lvl1pPr algn="l">
-              <a:defRPr sz="1200"/>
-            </a:lvl1pPr>
-          </a:lstStyle>
-          <a:p>
-            <a:endParaRPr lang="en-US"/>
-          </a:p>
-        </p:txBody>
-      </p:sp>
-      <p:sp>
-        <p:nvSpPr>
-          <p:cNvPr id="7" name="Slide Number Placeholder 6"/>
-          <p:cNvSpPr>
-            <a:spLocks noGrp="1"/>
-          </p:cNvSpPr>
-          <p:nvPr>
-            <p:ph type="sldNum" sz="quarter" idx="5"/>
-          </p:nvPr>
-        </p:nvSpPr>
-        <p:spPr>
-          <a:xfrm>
-            <a:off x="3884613" y="8685213"/>
-            <a:ext cx="2971800" cy="457200"/>
-          </a:xfrm>
-          <a:prstGeom prst="rect">
-            <a:avLst/>
-          </a:prstGeom>
-        </p:spPr>
-        <p:txBody>
-          <a:bodyPr vert="horz" lIns="91440" tIns="45720" rIns="91440" bIns="45720" rtlCol="0" anchor="b"/>
-          <a:lstStyle>
-            <a:lvl1pPr algn="r">
-              <a:defRPr sz="1200"/>
-            </a:lvl1pPr>
-          </a:lstStyle>
-          <a:p>
-            <a:fld id="{BB5E49A5-4136-284D-997B-48E1D791AD67}" type="slidenum">
-              <a:rPr lang="en-US" smtClean="0"/>
-              <a:t>‹#›</a:t>
-            </a:fld>
-            <a:endParaRPr lang="en-US"/>
-          </a:p>
-        </p:txBody>
-      </p:sp>
     </p:spTree>
     <p:extLst>
       <p:ext uri="{BB962C8B-B14F-4D97-AF65-F5344CB8AC3E}">
-        <p14:creationId xmlns:p14="http://schemas.microsoft.com/office/powerpoint/2010/main" val="2623252185"/>
+        <p14:creationId xmlns:p14="http://schemas.microsoft.com/office/powerpoint/2010/main" val="2956616574"/>
       </p:ext>
     </p:extLst>
   </p:cSld>
   <p:clrMap bg1="lt1" tx1="dk1" bg2="lt2" tx2="dk2" accent1="accent1" accent2="accent2" accent3="accent3" accent4="accent4" accent5="accent5" accent6="accent6" hlink="hlink" folHlink="folHlink"/>
   <p:notesStyle>
-    <a:lvl1pPr marL="0" algn="l" defTabSz="457200" rtl="0" eaLnBrk="1" latinLnBrk="0" hangingPunct="1">
+    <a:lvl1pPr marL="0" algn="l" defTabSz="914400" rtl="0" eaLnBrk="1" latinLnBrk="0" hangingPunct="1">
       <a:defRPr sz="1200" kern="1200">
         <a:solidFill>
           <a:schemeClr val="tx1"/>
@@ -381,7 +175,7 @@
         <a:cs typeface="+mn-cs"/>
       </a:defRPr>
     </a:lvl1pPr>
-    <a:lvl2pPr marL="457200" algn="l" defTabSz="457200" rtl="0" eaLnBrk="1" latinLnBrk="0" hangingPunct="1">
+    <a:lvl2pPr marL="457200" algn="l" defTabSz="914400" rtl="0" eaLnBrk="1" latinLnBrk="0" hangingPunct="1">
       <a:defRPr sz="1200" kern="1200">
         <a:solidFill>
           <a:schemeClr val="tx1"/>
@@ -391,7 +185,7 @@
         <a:cs typeface="+mn-cs"/>
       </a:defRPr>
     </a:lvl2pPr>
-    <a:lvl3pPr marL="914400" algn="l" defTabSz="457200" rtl="0" eaLnBrk="1" latinLnBrk="0" hangingPunct="1">
+    <a:lvl3pPr marL="914400" algn="l" defTabSz="914400" rtl="0" eaLnBrk="1" latinLnBrk="0" hangingPunct="1">
       <a:defRPr sz="1200" kern="1200">
         <a:solidFill>
           <a:schemeClr val="tx1"/>
@@ -401,7 +195,7 @@
         <a:cs typeface="+mn-cs"/>
       </a:defRPr>
     </a:lvl3pPr>
-    <a:lvl4pPr marL="1371600" algn="l" defTabSz="457200" rtl="0" eaLnBrk="1" latinLnBrk="0" hangingPunct="1">
+    <a:lvl4pPr marL="1371600" algn="l" defTabSz="914400" rtl="0" eaLnBrk="1" latinLnBrk="0" hangingPunct="1">
       <a:defRPr sz="1200" kern="1200">
         <a:solidFill>
           <a:schemeClr val="tx1"/>
@@ -411,7 +205,7 @@
         <a:cs typeface="+mn-cs"/>
       </a:defRPr>
     </a:lvl4pPr>
-    <a:lvl5pPr marL="1828800" algn="l" defTabSz="457200" rtl="0" eaLnBrk="1" latinLnBrk="0" hangingPunct="1">
+    <a:lvl5pPr marL="1828800" algn="l" defTabSz="914400" rtl="0" eaLnBrk="1" latinLnBrk="0" hangingPunct="1">
       <a:defRPr sz="1200" kern="1200">
         <a:solidFill>
           <a:schemeClr val="tx1"/>
@@ -421,7 +215,7 @@
         <a:cs typeface="+mn-cs"/>
       </a:defRPr>
     </a:lvl5pPr>
-    <a:lvl6pPr marL="2286000" algn="l" defTabSz="457200" rtl="0" eaLnBrk="1" latinLnBrk="0" hangingPunct="1">
+    <a:lvl6pPr marL="2286000" algn="l" defTabSz="914400" rtl="0" eaLnBrk="1" latinLnBrk="0" hangingPunct="1">
       <a:defRPr sz="1200" kern="1200">
         <a:solidFill>
           <a:schemeClr val="tx1"/>
@@ -431,7 +225,7 @@
         <a:cs typeface="+mn-cs"/>
       </a:defRPr>
     </a:lvl6pPr>
-    <a:lvl7pPr marL="2743200" algn="l" defTabSz="457200" rtl="0" eaLnBrk="1" latinLnBrk="0" hangingPunct="1">
+    <a:lvl7pPr marL="2743200" algn="l" defTabSz="914400" rtl="0" eaLnBrk="1" latinLnBrk="0" hangingPunct="1">
       <a:defRPr sz="1200" kern="1200">
         <a:solidFill>
           <a:schemeClr val="tx1"/>
@@ -441,7 +235,7 @@
         <a:cs typeface="+mn-cs"/>
       </a:defRPr>
     </a:lvl7pPr>
-    <a:lvl8pPr marL="3200400" algn="l" defTabSz="457200" rtl="0" eaLnBrk="1" latinLnBrk="0" hangingPunct="1">
+    <a:lvl8pPr marL="3200400" algn="l" defTabSz="914400" rtl="0" eaLnBrk="1" latinLnBrk="0" hangingPunct="1">
       <a:defRPr sz="1200" kern="1200">
         <a:solidFill>
           <a:schemeClr val="tx1"/>
@@ -451,7 +245,7 @@
         <a:cs typeface="+mn-cs"/>
       </a:defRPr>
     </a:lvl8pPr>
-    <a:lvl9pPr marL="3657600" algn="l" defTabSz="457200" rtl="0" eaLnBrk="1" latinLnBrk="0" hangingPunct="1">
+    <a:lvl9pPr marL="3657600" algn="l" defTabSz="914400" rtl="0" eaLnBrk="1" latinLnBrk="0" hangingPunct="1">
       <a:defRPr sz="1200" kern="1200">
         <a:solidFill>
           <a:schemeClr val="tx1"/>
@@ -466,7 +260,7 @@
 </file>
 
 <file path=ppt/notesSlides/notesSlide1.xml><?xml version="1.0" encoding="utf-8"?>
-<p:notes xmlns:a="http://schemas.openxmlformats.org/drawingml/2006/main" xmlns:p="http://schemas.openxmlformats.org/presentationml/2006/main" xmlns:r="http://schemas.openxmlformats.org/officeDocument/2006/relationships">
+<p:notes xmlns:a="http://schemas.openxmlformats.org/drawingml/2006/main" xmlns:r="http://schemas.openxmlformats.org/officeDocument/2006/relationships" xmlns:p="http://schemas.openxmlformats.org/presentationml/2006/main">
   <p:cSld>
     <p:spTree>
       <p:nvGrpSpPr>
@@ -486,7 +280,7 @@
         <p:nvSpPr>
           <p:cNvPr id="2" name="Slide Image Placeholder 1"/>
           <p:cNvSpPr>
-            <a:spLocks noGrp="1"/>
+            <a:spLocks noGrp="1" noRot="1" noChangeAspect="1"/>
           </p:cNvSpPr>
           <p:nvPr>
             <p:ph type="sldImg" idx="2"/>
@@ -501,7 +295,7 @@
             <a:spLocks noGrp="1"/>
           </p:cNvSpPr>
           <p:nvPr>
-            <p:ph type="body" idx="3" sz="quarter"/>
+            <p:ph type="body" sz="quarter" idx="3"/>
           </p:nvPr>
         </p:nvSpPr>
         <p:spPr/>
@@ -522,7 +316,7 @@
             <a:spLocks noGrp="1"/>
           </p:cNvSpPr>
           <p:nvPr>
-            <p:ph type="sldNum" idx="5" sz="quarter"/>
+            <p:ph type="sldNum" sz="quarter" idx="5"/>
           </p:nvPr>
         </p:nvSpPr>
         <p:spPr/>
@@ -536,7 +330,7 @@
 </file>
 
 <file path=ppt/notesSlides/notesSlide2.xml><?xml version="1.0" encoding="utf-8"?>
-<p:notes xmlns:a="http://schemas.openxmlformats.org/drawingml/2006/main" xmlns:p="http://schemas.openxmlformats.org/presentationml/2006/main" xmlns:r="http://schemas.openxmlformats.org/officeDocument/2006/relationships">
+<p:notes xmlns:a="http://schemas.openxmlformats.org/drawingml/2006/main" xmlns:r="http://schemas.openxmlformats.org/officeDocument/2006/relationships" xmlns:p="http://schemas.openxmlformats.org/presentationml/2006/main">
   <p:cSld>
     <p:spTree>
       <p:nvGrpSpPr>
@@ -556,7 +350,7 @@
         <p:nvSpPr>
           <p:cNvPr id="2" name="Slide Image Placeholder 1"/>
           <p:cNvSpPr>
-            <a:spLocks noGrp="1"/>
+            <a:spLocks noGrp="1" noRot="1" noChangeAspect="1"/>
           </p:cNvSpPr>
           <p:nvPr>
             <p:ph type="sldImg" idx="2"/>
@@ -571,7 +365,7 @@
             <a:spLocks noGrp="1"/>
           </p:cNvSpPr>
           <p:nvPr>
-            <p:ph type="body" idx="3" sz="quarter"/>
+            <p:ph type="body" sz="quarter" idx="3"/>
           </p:nvPr>
         </p:nvSpPr>
         <p:spPr/>
@@ -592,7 +386,7 @@
             <a:spLocks noGrp="1"/>
           </p:cNvSpPr>
           <p:nvPr>
-            <p:ph type="sldNum" idx="5" sz="quarter"/>
+            <p:ph type="sldNum" sz="quarter" idx="5"/>
           </p:nvPr>
         </p:nvSpPr>
         <p:spPr/>
@@ -606,7 +400,7 @@
 </file>
 
 <file path=ppt/notesSlides/notesSlide3.xml><?xml version="1.0" encoding="utf-8"?>
-<p:notes xmlns:a="http://schemas.openxmlformats.org/drawingml/2006/main" xmlns:p="http://schemas.openxmlformats.org/presentationml/2006/main" xmlns:r="http://schemas.openxmlformats.org/officeDocument/2006/relationships">
+<p:notes xmlns:a="http://schemas.openxmlformats.org/drawingml/2006/main" xmlns:r="http://schemas.openxmlformats.org/officeDocument/2006/relationships" xmlns:p="http://schemas.openxmlformats.org/presentationml/2006/main">
   <p:cSld>
     <p:spTree>
       <p:nvGrpSpPr>
@@ -626,7 +420,7 @@
         <p:nvSpPr>
           <p:cNvPr id="2" name="Slide Image Placeholder 1"/>
           <p:cNvSpPr>
-            <a:spLocks noGrp="1"/>
+            <a:spLocks noGrp="1" noRot="1" noChangeAspect="1"/>
           </p:cNvSpPr>
           <p:nvPr>
             <p:ph type="sldImg" idx="2"/>
@@ -641,7 +435,7 @@
             <a:spLocks noGrp="1"/>
           </p:cNvSpPr>
           <p:nvPr>
-            <p:ph type="body" idx="3" sz="quarter"/>
+            <p:ph type="body" sz="quarter" idx="3"/>
           </p:nvPr>
         </p:nvSpPr>
         <p:spPr/>
@@ -662,7 +456,7 @@
             <a:spLocks noGrp="1"/>
           </p:cNvSpPr>
           <p:nvPr>
-            <p:ph type="sldNum" idx="5" sz="quarter"/>
+            <p:ph type="sldNum" sz="quarter" idx="5"/>
           </p:nvPr>
         </p:nvSpPr>
         <p:spPr/>
@@ -676,7 +470,7 @@
 </file>
 
 <file path=ppt/notesSlides/notesSlide4.xml><?xml version="1.0" encoding="utf-8"?>
-<p:notes xmlns:a="http://schemas.openxmlformats.org/drawingml/2006/main" xmlns:p="http://schemas.openxmlformats.org/presentationml/2006/main" xmlns:r="http://schemas.openxmlformats.org/officeDocument/2006/relationships">
+<p:notes xmlns:a="http://schemas.openxmlformats.org/drawingml/2006/main" xmlns:r="http://schemas.openxmlformats.org/officeDocument/2006/relationships" xmlns:p="http://schemas.openxmlformats.org/presentationml/2006/main">
   <p:cSld>
     <p:spTree>
       <p:nvGrpSpPr>
@@ -696,7 +490,7 @@
         <p:nvSpPr>
           <p:cNvPr id="2" name="Slide Image Placeholder 1"/>
           <p:cNvSpPr>
-            <a:spLocks noGrp="1"/>
+            <a:spLocks noGrp="1" noRot="1" noChangeAspect="1"/>
           </p:cNvSpPr>
           <p:nvPr>
             <p:ph type="sldImg" idx="2"/>
@@ -711,7 +505,7 @@
             <a:spLocks noGrp="1"/>
           </p:cNvSpPr>
           <p:nvPr>
-            <p:ph type="body" idx="3" sz="quarter"/>
+            <p:ph type="body" sz="quarter" idx="3"/>
           </p:nvPr>
         </p:nvSpPr>
         <p:spPr/>
@@ -732,7 +526,7 @@
             <a:spLocks noGrp="1"/>
           </p:cNvSpPr>
           <p:nvPr>
-            <p:ph type="sldNum" idx="5" sz="quarter"/>
+            <p:ph type="sldNum" sz="quarter" idx="5"/>
           </p:nvPr>
         </p:nvSpPr>
         <p:spPr/>
@@ -746,7 +540,7 @@
 </file>
 
 <file path=ppt/notesSlides/notesSlide5.xml><?xml version="1.0" encoding="utf-8"?>
-<p:notes xmlns:a="http://schemas.openxmlformats.org/drawingml/2006/main" xmlns:p="http://schemas.openxmlformats.org/presentationml/2006/main" xmlns:r="http://schemas.openxmlformats.org/officeDocument/2006/relationships">
+<p:notes xmlns:a="http://schemas.openxmlformats.org/drawingml/2006/main" xmlns:r="http://schemas.openxmlformats.org/officeDocument/2006/relationships" xmlns:p="http://schemas.openxmlformats.org/presentationml/2006/main">
   <p:cSld>
     <p:spTree>
       <p:nvGrpSpPr>
@@ -766,7 +560,7 @@
         <p:nvSpPr>
           <p:cNvPr id="2" name="Slide Image Placeholder 1"/>
           <p:cNvSpPr>
-            <a:spLocks noGrp="1"/>
+            <a:spLocks noGrp="1" noRot="1" noChangeAspect="1"/>
           </p:cNvSpPr>
           <p:nvPr>
             <p:ph type="sldImg" idx="2"/>
@@ -781,7 +575,7 @@
             <a:spLocks noGrp="1"/>
           </p:cNvSpPr>
           <p:nvPr>
-            <p:ph type="body" idx="3" sz="quarter"/>
+            <p:ph type="body" sz="quarter" idx="3"/>
           </p:nvPr>
         </p:nvSpPr>
         <p:spPr/>
@@ -802,7 +596,7 @@
             <a:spLocks noGrp="1"/>
           </p:cNvSpPr>
           <p:nvPr>
-            <p:ph type="sldNum" idx="5" sz="quarter"/>
+            <p:ph type="sldNum" sz="quarter" idx="5"/>
           </p:nvPr>
         </p:nvSpPr>
         <p:spPr/>
@@ -816,7 +610,7 @@
 </file>
 
 <file path=ppt/notesSlides/notesSlide6.xml><?xml version="1.0" encoding="utf-8"?>
-<p:notes xmlns:a="http://schemas.openxmlformats.org/drawingml/2006/main" xmlns:p="http://schemas.openxmlformats.org/presentationml/2006/main" xmlns:r="http://schemas.openxmlformats.org/officeDocument/2006/relationships">
+<p:notes xmlns:a="http://schemas.openxmlformats.org/drawingml/2006/main" xmlns:r="http://schemas.openxmlformats.org/officeDocument/2006/relationships" xmlns:p="http://schemas.openxmlformats.org/presentationml/2006/main">
   <p:cSld>
     <p:spTree>
       <p:nvGrpSpPr>
@@ -836,7 +630,7 @@
         <p:nvSpPr>
           <p:cNvPr id="2" name="Slide Image Placeholder 1"/>
           <p:cNvSpPr>
-            <a:spLocks noGrp="1"/>
+            <a:spLocks noGrp="1" noRot="1" noChangeAspect="1"/>
           </p:cNvSpPr>
           <p:nvPr>
             <p:ph type="sldImg" idx="2"/>
@@ -851,7 +645,7 @@
             <a:spLocks noGrp="1"/>
           </p:cNvSpPr>
           <p:nvPr>
-            <p:ph type="body" idx="3" sz="quarter"/>
+            <p:ph type="body" sz="quarter" idx="3"/>
           </p:nvPr>
         </p:nvSpPr>
         <p:spPr/>
@@ -872,7 +666,7 @@
             <a:spLocks noGrp="1"/>
           </p:cNvSpPr>
           <p:nvPr>
-            <p:ph type="sldNum" idx="5" sz="quarter"/>
+            <p:ph type="sldNum" sz="quarter" idx="5"/>
           </p:nvPr>
         </p:nvSpPr>
         <p:spPr/>
@@ -886,7 +680,7 @@
 </file>
 
 <file path=ppt/notesSlides/notesSlide7.xml><?xml version="1.0" encoding="utf-8"?>
-<p:notes xmlns:a="http://schemas.openxmlformats.org/drawingml/2006/main" xmlns:p="http://schemas.openxmlformats.org/presentationml/2006/main" xmlns:r="http://schemas.openxmlformats.org/officeDocument/2006/relationships">
+<p:notes xmlns:a="http://schemas.openxmlformats.org/drawingml/2006/main" xmlns:r="http://schemas.openxmlformats.org/officeDocument/2006/relationships" xmlns:p="http://schemas.openxmlformats.org/presentationml/2006/main">
   <p:cSld>
     <p:spTree>
       <p:nvGrpSpPr>
@@ -906,7 +700,7 @@
         <p:nvSpPr>
           <p:cNvPr id="2" name="Slide Image Placeholder 1"/>
           <p:cNvSpPr>
-            <a:spLocks noGrp="1"/>
+            <a:spLocks noGrp="1" noRot="1" noChangeAspect="1"/>
           </p:cNvSpPr>
           <p:nvPr>
             <p:ph type="sldImg" idx="2"/>
@@ -921,7 +715,7 @@
             <a:spLocks noGrp="1"/>
           </p:cNvSpPr>
           <p:nvPr>
-            <p:ph type="body" idx="3" sz="quarter"/>
+            <p:ph type="body" sz="quarter" idx="3"/>
           </p:nvPr>
         </p:nvSpPr>
         <p:spPr/>
@@ -942,7 +736,7 @@
             <a:spLocks noGrp="1"/>
           </p:cNvSpPr>
           <p:nvPr>
-            <p:ph type="sldNum" idx="5" sz="quarter"/>
+            <p:ph type="sldNum" sz="quarter" idx="5"/>
           </p:nvPr>
         </p:nvSpPr>
         <p:spPr/>
@@ -956,7 +750,7 @@
 </file>
 
 <file path=ppt/notesSlides/notesSlide8.xml><?xml version="1.0" encoding="utf-8"?>
-<p:notes xmlns:a="http://schemas.openxmlformats.org/drawingml/2006/main" xmlns:p="http://schemas.openxmlformats.org/presentationml/2006/main" xmlns:r="http://schemas.openxmlformats.org/officeDocument/2006/relationships">
+<p:notes xmlns:a="http://schemas.openxmlformats.org/drawingml/2006/main" xmlns:r="http://schemas.openxmlformats.org/officeDocument/2006/relationships" xmlns:p="http://schemas.openxmlformats.org/presentationml/2006/main">
   <p:cSld>
     <p:spTree>
       <p:nvGrpSpPr>
@@ -976,7 +770,7 @@
         <p:nvSpPr>
           <p:cNvPr id="2" name="Slide Image Placeholder 1"/>
           <p:cNvSpPr>
-            <a:spLocks noGrp="1"/>
+            <a:spLocks noGrp="1" noRot="1" noChangeAspect="1"/>
           </p:cNvSpPr>
           <p:nvPr>
             <p:ph type="sldImg" idx="2"/>
@@ -991,7 +785,7 @@
             <a:spLocks noGrp="1"/>
           </p:cNvSpPr>
           <p:nvPr>
-            <p:ph type="body" idx="3" sz="quarter"/>
+            <p:ph type="body" sz="quarter" idx="3"/>
           </p:nvPr>
         </p:nvSpPr>
         <p:spPr/>
@@ -1012,7 +806,7 @@
             <a:spLocks noGrp="1"/>
           </p:cNvSpPr>
           <p:nvPr>
-            <p:ph type="sldNum" idx="5" sz="quarter"/>
+            <p:ph type="sldNum" sz="quarter" idx="5"/>
           </p:nvPr>
         </p:nvSpPr>
         <p:spPr/>
@@ -1026,7 +820,7 @@
 </file>
 
 <file path=ppt/notesSlides/notesSlide9.xml><?xml version="1.0" encoding="utf-8"?>
-<p:notes xmlns:a="http://schemas.openxmlformats.org/drawingml/2006/main" xmlns:p="http://schemas.openxmlformats.org/presentationml/2006/main" xmlns:r="http://schemas.openxmlformats.org/officeDocument/2006/relationships">
+<p:notes xmlns:a="http://schemas.openxmlformats.org/drawingml/2006/main" xmlns:r="http://schemas.openxmlformats.org/officeDocument/2006/relationships" xmlns:p="http://schemas.openxmlformats.org/presentationml/2006/main">
   <p:cSld>
     <p:spTree>
       <p:nvGrpSpPr>
@@ -1046,7 +840,7 @@
         <p:nvSpPr>
           <p:cNvPr id="2" name="Slide Image Placeholder 1"/>
           <p:cNvSpPr>
-            <a:spLocks noGrp="1"/>
+            <a:spLocks noGrp="1" noRot="1" noChangeAspect="1"/>
           </p:cNvSpPr>
           <p:nvPr>
             <p:ph type="sldImg" idx="2"/>
@@ -1061,7 +855,7 @@
             <a:spLocks noGrp="1"/>
           </p:cNvSpPr>
           <p:nvPr>
-            <p:ph type="body" idx="3" sz="quarter"/>
+            <p:ph type="body" sz="quarter" idx="3"/>
           </p:nvPr>
         </p:nvSpPr>
         <p:spPr/>
@@ -1082,7 +876,7 @@
             <a:spLocks noGrp="1"/>
           </p:cNvSpPr>
           <p:nvPr>
-            <p:ph type="sldNum" idx="5" sz="quarter"/>
+            <p:ph type="sldNum" sz="quarter" idx="5"/>
           </p:nvPr>
         </p:nvSpPr>
         <p:spPr/>
@@ -1133,10 +927,9 @@
           <a:lstStyle/>
           <a:p>
             <a:r>
-              <a:rPr lang="en-US" smtClean="0"/>
+              <a:rPr lang="en-US"/>
               <a:t>Click to edit Master title style</a:t>
             </a:r>
-            <a:endParaRPr lang="en-US"/>
           </a:p>
         </p:txBody>
       </p:sp>
@@ -1252,10 +1045,9 @@
           </a:lstStyle>
           <a:p>
             <a:r>
-              <a:rPr lang="en-US" smtClean="0"/>
+              <a:rPr lang="en-US"/>
               <a:t>Click to edit Master subtitle style</a:t>
             </a:r>
-            <a:endParaRPr lang="en-US"/>
           </a:p>
         </p:txBody>
       </p:sp>
@@ -1276,7 +1068,7 @@
           <a:p>
             <a:fld id="{5BCAD085-E8A6-8845-BD4E-CB4CCA059FC4}" type="datetimeFigureOut">
               <a:rPr lang="en-US" smtClean="0"/>
-              <a:t>1/27/13</a:t>
+              <a:t>8/31/2026</a:t>
             </a:fld>
             <a:endParaRPr lang="en-US"/>
           </a:p>
@@ -1370,10 +1162,9 @@
           <a:lstStyle/>
           <a:p>
             <a:r>
-              <a:rPr lang="en-US" smtClean="0"/>
+              <a:rPr lang="en-US"/>
               <a:t>Click to edit Master title style</a:t>
             </a:r>
-            <a:endParaRPr lang="en-US"/>
           </a:p>
         </p:txBody>
       </p:sp>
@@ -1394,38 +1185,37 @@
           <a:p>
             <a:pPr lvl="0"/>
             <a:r>
-              <a:rPr lang="en-US" smtClean="0"/>
+              <a:rPr lang="en-US"/>
               <a:t>Click to edit Master text styles</a:t>
             </a:r>
           </a:p>
           <a:p>
             <a:pPr lvl="1"/>
             <a:r>
-              <a:rPr lang="en-US" smtClean="0"/>
+              <a:rPr lang="en-US"/>
               <a:t>Second level</a:t>
             </a:r>
           </a:p>
           <a:p>
             <a:pPr lvl="2"/>
             <a:r>
-              <a:rPr lang="en-US" smtClean="0"/>
+              <a:rPr lang="en-US"/>
               <a:t>Third level</a:t>
             </a:r>
           </a:p>
           <a:p>
             <a:pPr lvl="3"/>
             <a:r>
-              <a:rPr lang="en-US" smtClean="0"/>
+              <a:rPr lang="en-US"/>
               <a:t>Fourth level</a:t>
             </a:r>
           </a:p>
           <a:p>
             <a:pPr lvl="4"/>
             <a:r>
-              <a:rPr lang="en-US" smtClean="0"/>
+              <a:rPr lang="en-US"/>
               <a:t>Fifth level</a:t>
             </a:r>
-            <a:endParaRPr lang="en-US"/>
           </a:p>
         </p:txBody>
       </p:sp>
@@ -1446,7 +1236,7 @@
           <a:p>
             <a:fld id="{5BCAD085-E8A6-8845-BD4E-CB4CCA059FC4}" type="datetimeFigureOut">
               <a:rPr lang="en-US" smtClean="0"/>
-              <a:t>1/27/13</a:t>
+              <a:t>8/31/2026</a:t>
             </a:fld>
             <a:endParaRPr lang="en-US"/>
           </a:p>
@@ -1545,10 +1335,9 @@
           <a:lstStyle/>
           <a:p>
             <a:r>
-              <a:rPr lang="en-US" smtClean="0"/>
+              <a:rPr lang="en-US"/>
               <a:t>Click to edit Master title style</a:t>
             </a:r>
-            <a:endParaRPr lang="en-US"/>
           </a:p>
         </p:txBody>
       </p:sp>
@@ -1574,38 +1363,37 @@
           <a:p>
             <a:pPr lvl="0"/>
             <a:r>
-              <a:rPr lang="en-US" smtClean="0"/>
+              <a:rPr lang="en-US"/>
               <a:t>Click to edit Master text styles</a:t>
             </a:r>
           </a:p>
           <a:p>
             <a:pPr lvl="1"/>
             <a:r>
-              <a:rPr lang="en-US" smtClean="0"/>
+              <a:rPr lang="en-US"/>
               <a:t>Second level</a:t>
             </a:r>
           </a:p>
           <a:p>
             <a:pPr lvl="2"/>
             <a:r>
-              <a:rPr lang="en-US" smtClean="0"/>
+              <a:rPr lang="en-US"/>
               <a:t>Third level</a:t>
             </a:r>
           </a:p>
           <a:p>
             <a:pPr lvl="3"/>
             <a:r>
-              <a:rPr lang="en-US" smtClean="0"/>
+              <a:rPr lang="en-US"/>
               <a:t>Fourth level</a:t>
             </a:r>
           </a:p>
           <a:p>
             <a:pPr lvl="4"/>
             <a:r>
-              <a:rPr lang="en-US" smtClean="0"/>
+              <a:rPr lang="en-US"/>
               <a:t>Fifth level</a:t>
             </a:r>
-            <a:endParaRPr lang="en-US"/>
           </a:p>
         </p:txBody>
       </p:sp>
@@ -1626,7 +1414,7 @@
           <a:p>
             <a:fld id="{5BCAD085-E8A6-8845-BD4E-CB4CCA059FC4}" type="datetimeFigureOut">
               <a:rPr lang="en-US" smtClean="0"/>
-              <a:t>1/27/13</a:t>
+              <a:t>8/31/2026</a:t>
             </a:fld>
             <a:endParaRPr lang="en-US"/>
           </a:p>
@@ -1720,10 +1508,9 @@
           <a:lstStyle/>
           <a:p>
             <a:r>
-              <a:rPr lang="en-US" smtClean="0"/>
+              <a:rPr lang="en-US"/>
               <a:t>Click to edit Master title style</a:t>
             </a:r>
-            <a:endParaRPr lang="en-US"/>
           </a:p>
         </p:txBody>
       </p:sp>
@@ -1744,38 +1531,37 @@
           <a:p>
             <a:pPr lvl="0"/>
             <a:r>
-              <a:rPr lang="en-US" smtClean="0"/>
+              <a:rPr lang="en-US"/>
               <a:t>Click to edit Master text styles</a:t>
             </a:r>
           </a:p>
           <a:p>
             <a:pPr lvl="1"/>
             <a:r>
-              <a:rPr lang="en-US" smtClean="0"/>
+              <a:rPr lang="en-US"/>
               <a:t>Second level</a:t>
             </a:r>
           </a:p>
           <a:p>
             <a:pPr lvl="2"/>
             <a:r>
-              <a:rPr lang="en-US" smtClean="0"/>
+              <a:rPr lang="en-US"/>
               <a:t>Third level</a:t>
             </a:r>
           </a:p>
           <a:p>
             <a:pPr lvl="3"/>
             <a:r>
-              <a:rPr lang="en-US" smtClean="0"/>
+              <a:rPr lang="en-US"/>
               <a:t>Fourth level</a:t>
             </a:r>
           </a:p>
           <a:p>
             <a:pPr lvl="4"/>
             <a:r>
-              <a:rPr lang="en-US" smtClean="0"/>
+              <a:rPr lang="en-US"/>
               <a:t>Fifth level</a:t>
             </a:r>
-            <a:endParaRPr lang="en-US"/>
           </a:p>
         </p:txBody>
       </p:sp>
@@ -1796,7 +1582,7 @@
           <a:p>
             <a:fld id="{5BCAD085-E8A6-8845-BD4E-CB4CCA059FC4}" type="datetimeFigureOut">
               <a:rPr lang="en-US" smtClean="0"/>
-              <a:t>1/27/13</a:t>
+              <a:t>8/31/2026</a:t>
             </a:fld>
             <a:endParaRPr lang="en-US"/>
           </a:p>
@@ -1899,10 +1685,9 @@
           </a:lstStyle>
           <a:p>
             <a:r>
-              <a:rPr lang="en-US" smtClean="0"/>
+              <a:rPr lang="en-US"/>
               <a:t>Click to edit Master title style</a:t>
             </a:r>
-            <a:endParaRPr lang="en-US"/>
           </a:p>
         </p:txBody>
       </p:sp>
@@ -2019,7 +1804,7 @@
           <a:p>
             <a:pPr lvl="0"/>
             <a:r>
-              <a:rPr lang="en-US" smtClean="0"/>
+              <a:rPr lang="en-US"/>
               <a:t>Click to edit Master text styles</a:t>
             </a:r>
           </a:p>
@@ -2042,7 +1827,7 @@
           <a:p>
             <a:fld id="{5BCAD085-E8A6-8845-BD4E-CB4CCA059FC4}" type="datetimeFigureOut">
               <a:rPr lang="en-US" smtClean="0"/>
-              <a:t>1/27/13</a:t>
+              <a:t>8/31/2026</a:t>
             </a:fld>
             <a:endParaRPr lang="en-US"/>
           </a:p>
@@ -2136,10 +1921,9 @@
           <a:lstStyle/>
           <a:p>
             <a:r>
-              <a:rPr lang="en-US" smtClean="0"/>
+              <a:rPr lang="en-US"/>
               <a:t>Click to edit Master title style</a:t>
             </a:r>
-            <a:endParaRPr lang="en-US"/>
           </a:p>
         </p:txBody>
       </p:sp>
@@ -2193,38 +1977,37 @@
           <a:p>
             <a:pPr lvl="0"/>
             <a:r>
-              <a:rPr lang="en-US" smtClean="0"/>
+              <a:rPr lang="en-US"/>
               <a:t>Click to edit Master text styles</a:t>
             </a:r>
           </a:p>
           <a:p>
             <a:pPr lvl="1"/>
             <a:r>
-              <a:rPr lang="en-US" smtClean="0"/>
+              <a:rPr lang="en-US"/>
               <a:t>Second level</a:t>
             </a:r>
           </a:p>
           <a:p>
             <a:pPr lvl="2"/>
             <a:r>
-              <a:rPr lang="en-US" smtClean="0"/>
+              <a:rPr lang="en-US"/>
               <a:t>Third level</a:t>
             </a:r>
           </a:p>
           <a:p>
             <a:pPr lvl="3"/>
             <a:r>
-              <a:rPr lang="en-US" smtClean="0"/>
+              <a:rPr lang="en-US"/>
               <a:t>Fourth level</a:t>
             </a:r>
           </a:p>
           <a:p>
             <a:pPr lvl="4"/>
             <a:r>
-              <a:rPr lang="en-US" smtClean="0"/>
+              <a:rPr lang="en-US"/>
               <a:t>Fifth level</a:t>
             </a:r>
-            <a:endParaRPr lang="en-US"/>
           </a:p>
         </p:txBody>
       </p:sp>
@@ -2278,38 +2061,37 @@
           <a:p>
             <a:pPr lvl="0"/>
             <a:r>
-              <a:rPr lang="en-US" smtClean="0"/>
+              <a:rPr lang="en-US"/>
               <a:t>Click to edit Master text styles</a:t>
             </a:r>
           </a:p>
           <a:p>
             <a:pPr lvl="1"/>
             <a:r>
-              <a:rPr lang="en-US" smtClean="0"/>
+              <a:rPr lang="en-US"/>
               <a:t>Second level</a:t>
             </a:r>
           </a:p>
           <a:p>
             <a:pPr lvl="2"/>
             <a:r>
-              <a:rPr lang="en-US" smtClean="0"/>
+              <a:rPr lang="en-US"/>
               <a:t>Third level</a:t>
             </a:r>
           </a:p>
           <a:p>
             <a:pPr lvl="3"/>
             <a:r>
-              <a:rPr lang="en-US" smtClean="0"/>
+              <a:rPr lang="en-US"/>
               <a:t>Fourth level</a:t>
             </a:r>
           </a:p>
           <a:p>
             <a:pPr lvl="4"/>
             <a:r>
-              <a:rPr lang="en-US" smtClean="0"/>
+              <a:rPr lang="en-US"/>
               <a:t>Fifth level</a:t>
             </a:r>
-            <a:endParaRPr lang="en-US"/>
           </a:p>
         </p:txBody>
       </p:sp>
@@ -2330,7 +2112,7 @@
           <a:p>
             <a:fld id="{5BCAD085-E8A6-8845-BD4E-CB4CCA059FC4}" type="datetimeFigureOut">
               <a:rPr lang="en-US" smtClean="0"/>
-              <a:t>1/27/13</a:t>
+              <a:t>8/31/2026</a:t>
             </a:fld>
             <a:endParaRPr lang="en-US"/>
           </a:p>
@@ -2428,10 +2210,9 @@
           </a:lstStyle>
           <a:p>
             <a:r>
-              <a:rPr lang="en-US" smtClean="0"/>
+              <a:rPr lang="en-US"/>
               <a:t>Click to edit Master title style</a:t>
             </a:r>
-            <a:endParaRPr lang="en-US"/>
           </a:p>
         </p:txBody>
       </p:sp>
@@ -2494,7 +2275,7 @@
           <a:p>
             <a:pPr lvl="0"/>
             <a:r>
-              <a:rPr lang="en-US" smtClean="0"/>
+              <a:rPr lang="en-US"/>
               <a:t>Click to edit Master text styles</a:t>
             </a:r>
           </a:p>
@@ -2550,38 +2331,37 @@
           <a:p>
             <a:pPr lvl="0"/>
             <a:r>
-              <a:rPr lang="en-US" smtClean="0"/>
+              <a:rPr lang="en-US"/>
               <a:t>Click to edit Master text styles</a:t>
             </a:r>
           </a:p>
           <a:p>
             <a:pPr lvl="1"/>
             <a:r>
-              <a:rPr lang="en-US" smtClean="0"/>
+              <a:rPr lang="en-US"/>
               <a:t>Second level</a:t>
             </a:r>
           </a:p>
           <a:p>
             <a:pPr lvl="2"/>
             <a:r>
-              <a:rPr lang="en-US" smtClean="0"/>
+              <a:rPr lang="en-US"/>
               <a:t>Third level</a:t>
             </a:r>
           </a:p>
           <a:p>
             <a:pPr lvl="3"/>
             <a:r>
-              <a:rPr lang="en-US" smtClean="0"/>
+              <a:rPr lang="en-US"/>
               <a:t>Fourth level</a:t>
             </a:r>
           </a:p>
           <a:p>
             <a:pPr lvl="4"/>
             <a:r>
-              <a:rPr lang="en-US" smtClean="0"/>
+              <a:rPr lang="en-US"/>
               <a:t>Fifth level</a:t>
             </a:r>
-            <a:endParaRPr lang="en-US"/>
           </a:p>
         </p:txBody>
       </p:sp>
@@ -2644,7 +2424,7 @@
           <a:p>
             <a:pPr lvl="0"/>
             <a:r>
-              <a:rPr lang="en-US" smtClean="0"/>
+              <a:rPr lang="en-US"/>
               <a:t>Click to edit Master text styles</a:t>
             </a:r>
           </a:p>
@@ -2700,38 +2480,37 @@
           <a:p>
             <a:pPr lvl="0"/>
             <a:r>
-              <a:rPr lang="en-US" smtClean="0"/>
+              <a:rPr lang="en-US"/>
               <a:t>Click to edit Master text styles</a:t>
             </a:r>
           </a:p>
           <a:p>
             <a:pPr lvl="1"/>
             <a:r>
-              <a:rPr lang="en-US" smtClean="0"/>
+              <a:rPr lang="en-US"/>
               <a:t>Second level</a:t>
             </a:r>
           </a:p>
           <a:p>
             <a:pPr lvl="2"/>
             <a:r>
-              <a:rPr lang="en-US" smtClean="0"/>
+              <a:rPr lang="en-US"/>
               <a:t>Third level</a:t>
             </a:r>
           </a:p>
           <a:p>
             <a:pPr lvl="3"/>
             <a:r>
-              <a:rPr lang="en-US" smtClean="0"/>
+              <a:rPr lang="en-US"/>
               <a:t>Fourth level</a:t>
             </a:r>
           </a:p>
           <a:p>
             <a:pPr lvl="4"/>
             <a:r>
-              <a:rPr lang="en-US" smtClean="0"/>
+              <a:rPr lang="en-US"/>
               <a:t>Fifth level</a:t>
             </a:r>
-            <a:endParaRPr lang="en-US"/>
           </a:p>
         </p:txBody>
       </p:sp>
@@ -2752,7 +2531,7 @@
           <a:p>
             <a:fld id="{5BCAD085-E8A6-8845-BD4E-CB4CCA059FC4}" type="datetimeFigureOut">
               <a:rPr lang="en-US" smtClean="0"/>
-              <a:t>1/27/13</a:t>
+              <a:t>8/31/2026</a:t>
             </a:fld>
             <a:endParaRPr lang="en-US"/>
           </a:p>
@@ -2846,10 +2625,9 @@
           <a:lstStyle/>
           <a:p>
             <a:r>
-              <a:rPr lang="en-US" smtClean="0"/>
+              <a:rPr lang="en-US"/>
               <a:t>Click to edit Master title style</a:t>
             </a:r>
-            <a:endParaRPr lang="en-US"/>
           </a:p>
         </p:txBody>
       </p:sp>
@@ -2870,7 +2648,7 @@
           <a:p>
             <a:fld id="{5BCAD085-E8A6-8845-BD4E-CB4CCA059FC4}" type="datetimeFigureOut">
               <a:rPr lang="en-US" smtClean="0"/>
-              <a:t>1/27/13</a:t>
+              <a:t>8/31/2026</a:t>
             </a:fld>
             <a:endParaRPr lang="en-US"/>
           </a:p>
@@ -2965,7 +2743,7 @@
           <a:p>
             <a:fld id="{5BCAD085-E8A6-8845-BD4E-CB4CCA059FC4}" type="datetimeFigureOut">
               <a:rPr lang="en-US" smtClean="0"/>
-              <a:t>1/27/13</a:t>
+              <a:t>8/31/2026</a:t>
             </a:fld>
             <a:endParaRPr lang="en-US"/>
           </a:p>
@@ -3068,10 +2846,9 @@
           </a:lstStyle>
           <a:p>
             <a:r>
-              <a:rPr lang="en-US" smtClean="0"/>
+              <a:rPr lang="en-US"/>
               <a:t>Click to edit Master title style</a:t>
             </a:r>
-            <a:endParaRPr lang="en-US"/>
           </a:p>
         </p:txBody>
       </p:sp>
@@ -3125,38 +2902,37 @@
           <a:p>
             <a:pPr lvl="0"/>
             <a:r>
-              <a:rPr lang="en-US" smtClean="0"/>
+              <a:rPr lang="en-US"/>
               <a:t>Click to edit Master text styles</a:t>
             </a:r>
           </a:p>
           <a:p>
             <a:pPr lvl="1"/>
             <a:r>
-              <a:rPr lang="en-US" smtClean="0"/>
+              <a:rPr lang="en-US"/>
               <a:t>Second level</a:t>
             </a:r>
           </a:p>
           <a:p>
             <a:pPr lvl="2"/>
             <a:r>
-              <a:rPr lang="en-US" smtClean="0"/>
+              <a:rPr lang="en-US"/>
               <a:t>Third level</a:t>
             </a:r>
           </a:p>
           <a:p>
             <a:pPr lvl="3"/>
             <a:r>
-              <a:rPr lang="en-US" smtClean="0"/>
+              <a:rPr lang="en-US"/>
               <a:t>Fourth level</a:t>
             </a:r>
           </a:p>
           <a:p>
             <a:pPr lvl="4"/>
             <a:r>
-              <a:rPr lang="en-US" smtClean="0"/>
+              <a:rPr lang="en-US"/>
               <a:t>Fifth level</a:t>
             </a:r>
-            <a:endParaRPr lang="en-US"/>
           </a:p>
         </p:txBody>
       </p:sp>
@@ -3219,7 +2995,7 @@
           <a:p>
             <a:pPr lvl="0"/>
             <a:r>
-              <a:rPr lang="en-US" smtClean="0"/>
+              <a:rPr lang="en-US"/>
               <a:t>Click to edit Master text styles</a:t>
             </a:r>
           </a:p>
@@ -3242,7 +3018,7 @@
           <a:p>
             <a:fld id="{5BCAD085-E8A6-8845-BD4E-CB4CCA059FC4}" type="datetimeFigureOut">
               <a:rPr lang="en-US" smtClean="0"/>
-              <a:t>1/27/13</a:t>
+              <a:t>8/31/2026</a:t>
             </a:fld>
             <a:endParaRPr lang="en-US"/>
           </a:p>
@@ -3345,10 +3121,9 @@
           </a:lstStyle>
           <a:p>
             <a:r>
-              <a:rPr lang="en-US" smtClean="0"/>
+              <a:rPr lang="en-US"/>
               <a:t>Click to edit Master title style</a:t>
             </a:r>
-            <a:endParaRPr lang="en-US"/>
           </a:p>
         </p:txBody>
       </p:sp>
@@ -3472,7 +3247,7 @@
           <a:p>
             <a:pPr lvl="0"/>
             <a:r>
-              <a:rPr lang="en-US" smtClean="0"/>
+              <a:rPr lang="en-US"/>
               <a:t>Click to edit Master text styles</a:t>
             </a:r>
           </a:p>
@@ -3495,7 +3270,7 @@
           <a:p>
             <a:fld id="{5BCAD085-E8A6-8845-BD4E-CB4CCA059FC4}" type="datetimeFigureOut">
               <a:rPr lang="en-US" smtClean="0"/>
-              <a:t>1/27/13</a:t>
+              <a:t>8/31/2026</a:t>
             </a:fld>
             <a:endParaRPr lang="en-US"/>
           </a:p>
@@ -3604,10 +3379,9 @@
           <a:lstStyle/>
           <a:p>
             <a:r>
-              <a:rPr lang="en-US" smtClean="0"/>
+              <a:rPr lang="en-US"/>
               <a:t>Click to edit Master title style</a:t>
             </a:r>
-            <a:endParaRPr lang="en-US"/>
           </a:p>
         </p:txBody>
       </p:sp>
@@ -3638,38 +3412,37 @@
           <a:p>
             <a:pPr lvl="0"/>
             <a:r>
-              <a:rPr lang="en-US" smtClean="0"/>
+              <a:rPr lang="en-US"/>
               <a:t>Click to edit Master text styles</a:t>
             </a:r>
           </a:p>
           <a:p>
             <a:pPr lvl="1"/>
             <a:r>
-              <a:rPr lang="en-US" smtClean="0"/>
+              <a:rPr lang="en-US"/>
               <a:t>Second level</a:t>
             </a:r>
           </a:p>
           <a:p>
             <a:pPr lvl="2"/>
             <a:r>
-              <a:rPr lang="en-US" smtClean="0"/>
+              <a:rPr lang="en-US"/>
               <a:t>Third level</a:t>
             </a:r>
           </a:p>
           <a:p>
             <a:pPr lvl="3"/>
             <a:r>
-              <a:rPr lang="en-US" smtClean="0"/>
+              <a:rPr lang="en-US"/>
               <a:t>Fourth level</a:t>
             </a:r>
           </a:p>
           <a:p>
             <a:pPr lvl="4"/>
             <a:r>
-              <a:rPr lang="en-US" smtClean="0"/>
+              <a:rPr lang="en-US"/>
               <a:t>Fifth level</a:t>
             </a:r>
-            <a:endParaRPr lang="en-US"/>
           </a:p>
         </p:txBody>
       </p:sp>
@@ -3708,7 +3481,7 @@
           <a:p>
             <a:fld id="{5BCAD085-E8A6-8845-BD4E-CB4CCA059FC4}" type="datetimeFigureOut">
               <a:rPr lang="en-US" smtClean="0"/>
-              <a:t>1/27/13</a:t>
+              <a:t>8/31/2026</a:t>
             </a:fld>
             <a:endParaRPr lang="en-US"/>
           </a:p>
@@ -4067,7 +3840,7 @@
 </file>
 
 <file path=ppt/slides/slide1.xml><?xml version="1.0" encoding="utf-8"?>
-<p:sld xmlns:a="http://schemas.openxmlformats.org/drawingml/2006/main" xmlns:p="http://schemas.openxmlformats.org/presentationml/2006/main" xmlns:r="http://schemas.openxmlformats.org/officeDocument/2006/relationships">
+<p:sld xmlns:a="http://schemas.openxmlformats.org/drawingml/2006/main" xmlns:r="http://schemas.openxmlformats.org/officeDocument/2006/relationships" xmlns:p="http://schemas.openxmlformats.org/presentationml/2006/main">
   <p:cSld>
     <p:bg>
       <p:bgPr>
@@ -4083,7 +3856,14 @@
         <p:cNvGrpSpPr/>
         <p:nvPr/>
       </p:nvGrpSpPr>
-      <p:grpSpPr/>
+      <p:grpSpPr>
+        <a:xfrm>
+          <a:off x="0" y="0"/>
+          <a:ext cx="0" cy="0"/>
+          <a:chOff x="0" y="0"/>
+          <a:chExt cx="0" cy="0"/>
+        </a:xfrm>
+      </p:grpSpPr>
       <p:sp>
         <p:nvSpPr>
           <p:cNvPr id="2" name="TextBox 1"/>
@@ -4101,7 +3881,7 @@
           <a:noFill/>
         </p:spPr>
         <p:txBody>
-          <a:bodyPr wrap="square" lIns="0" rIns="0" tIns="0" bIns="0">
+          <a:bodyPr wrap="square" lIns="0" tIns="0" rIns="0" bIns="0">
             <a:spAutoFit/>
           </a:bodyPr>
           <a:lstStyle/>
@@ -4144,7 +3924,7 @@
           <a:noFill/>
         </p:spPr>
         <p:txBody>
-          <a:bodyPr wrap="square" lIns="0" rIns="0" tIns="0" bIns="0">
+          <a:bodyPr wrap="square" lIns="0" tIns="0" rIns="0" bIns="0">
             <a:spAutoFit/>
           </a:bodyPr>
           <a:lstStyle/>
@@ -4183,7 +3963,7 @@
           <a:noFill/>
         </p:spPr>
         <p:txBody>
-          <a:bodyPr wrap="square" lIns="0" rIns="0" tIns="0" bIns="0">
+          <a:bodyPr wrap="square" lIns="0" tIns="0" rIns="0" bIns="0">
             <a:spAutoFit/>
           </a:bodyPr>
           <a:lstStyle/>
@@ -4230,7 +4010,7 @@
           <p:nvPr/>
         </p:nvPicPr>
         <p:blipFill>
-          <a:blip r:embed="rId2"/>
+          <a:blip r:embed="rId3"/>
           <a:stretch>
             <a:fillRect/>
           </a:stretch>
@@ -4254,7 +4034,7 @@
 </file>
 
 <file path=ppt/slides/slide2.xml><?xml version="1.0" encoding="utf-8"?>
-<p:sld xmlns:a="http://schemas.openxmlformats.org/drawingml/2006/main" xmlns:p="http://schemas.openxmlformats.org/presentationml/2006/main" xmlns:r="http://schemas.openxmlformats.org/officeDocument/2006/relationships">
+<p:sld xmlns:a="http://schemas.openxmlformats.org/drawingml/2006/main" xmlns:r="http://schemas.openxmlformats.org/officeDocument/2006/relationships" xmlns:p="http://schemas.openxmlformats.org/presentationml/2006/main">
   <p:cSld>
     <p:bg>
       <p:bgPr>
@@ -4270,7 +4050,14 @@
         <p:cNvGrpSpPr/>
         <p:nvPr/>
       </p:nvGrpSpPr>
-      <p:grpSpPr/>
+      <p:grpSpPr>
+        <a:xfrm>
+          <a:off x="0" y="0"/>
+          <a:ext cx="0" cy="0"/>
+          <a:chOff x="0" y="0"/>
+          <a:chExt cx="0" cy="0"/>
+        </a:xfrm>
+      </p:grpSpPr>
       <p:sp>
         <p:nvSpPr>
           <p:cNvPr id="2" name="TextBox 1"/>
@@ -4288,7 +4075,7 @@
           <a:noFill/>
         </p:spPr>
         <p:txBody>
-          <a:bodyPr wrap="square" lIns="0" rIns="0" tIns="0" bIns="0">
+          <a:bodyPr wrap="square" lIns="0" tIns="0" rIns="0" bIns="0">
             <a:spAutoFit/>
           </a:bodyPr>
           <a:lstStyle/>
@@ -4327,7 +4114,7 @@
           <a:noFill/>
         </p:spPr>
         <p:txBody>
-          <a:bodyPr wrap="square" lIns="0" rIns="0" tIns="0" bIns="0">
+          <a:bodyPr wrap="square" lIns="0" tIns="0" rIns="0" bIns="0">
             <a:spAutoFit/>
           </a:bodyPr>
           <a:lstStyle/>
@@ -4433,6 +4220,7 @@
           <a:lstStyle/>
           <a:p>
             <a:pPr algn="ctr"/>
+            <a:endParaRPr/>
           </a:p>
         </p:txBody>
       </p:sp>
@@ -4453,7 +4241,7 @@
           <a:noFill/>
         </p:spPr>
         <p:txBody>
-          <a:bodyPr wrap="square" lIns="0" rIns="0" tIns="0" bIns="0">
+          <a:bodyPr wrap="square" lIns="0" tIns="0" rIns="0" bIns="0">
             <a:spAutoFit/>
           </a:bodyPr>
           <a:lstStyle/>
@@ -4521,6 +4309,7 @@
           <a:lstStyle/>
           <a:p>
             <a:pPr algn="ctr"/>
+            <a:endParaRPr/>
           </a:p>
         </p:txBody>
       </p:sp>
@@ -4541,7 +4330,7 @@
           <a:noFill/>
         </p:spPr>
         <p:txBody>
-          <a:bodyPr wrap="square" lIns="0" rIns="0" tIns="0" bIns="0">
+          <a:bodyPr wrap="square" lIns="0" tIns="0" rIns="0" bIns="0">
             <a:spAutoFit/>
           </a:bodyPr>
           <a:lstStyle/>
@@ -4583,7 +4372,7 @@
           <a:noFill/>
         </p:spPr>
         <p:txBody>
-          <a:bodyPr wrap="square" lIns="0" rIns="0" tIns="0" bIns="0">
+          <a:bodyPr wrap="square" lIns="0" tIns="0" rIns="0" bIns="0">
             <a:spAutoFit/>
           </a:bodyPr>
           <a:lstStyle/>
@@ -4622,7 +4411,7 @@
           <a:noFill/>
         </p:spPr>
         <p:txBody>
-          <a:bodyPr wrap="square" lIns="0" rIns="0" tIns="0" bIns="0">
+          <a:bodyPr wrap="square" lIns="0" tIns="0" rIns="0" bIns="0">
             <a:spAutoFit/>
           </a:bodyPr>
           <a:lstStyle/>
@@ -4661,7 +4450,7 @@
           <a:noFill/>
         </p:spPr>
         <p:txBody>
-          <a:bodyPr wrap="square" lIns="0" rIns="0" tIns="0" bIns="0">
+          <a:bodyPr wrap="square" lIns="0" tIns="0" rIns="0" bIns="0">
             <a:spAutoFit/>
           </a:bodyPr>
           <a:lstStyle/>
@@ -4700,7 +4489,7 @@
           <a:noFill/>
         </p:spPr>
         <p:txBody>
-          <a:bodyPr wrap="square" lIns="0" rIns="0" tIns="0" bIns="0">
+          <a:bodyPr wrap="square" lIns="0" tIns="0" rIns="0" bIns="0">
             <a:spAutoFit/>
           </a:bodyPr>
           <a:lstStyle/>
@@ -4742,7 +4531,7 @@
           <a:noFill/>
         </p:spPr>
         <p:txBody>
-          <a:bodyPr wrap="square" lIns="0" rIns="0" tIns="0" bIns="0">
+          <a:bodyPr wrap="square" lIns="0" tIns="0" rIns="0" bIns="0">
             <a:spAutoFit/>
           </a:bodyPr>
           <a:lstStyle/>
@@ -4781,7 +4570,7 @@
           <a:noFill/>
         </p:spPr>
         <p:txBody>
-          <a:bodyPr wrap="square" lIns="0" rIns="0" tIns="0" bIns="0">
+          <a:bodyPr wrap="square" lIns="0" tIns="0" rIns="0" bIns="0">
             <a:spAutoFit/>
           </a:bodyPr>
           <a:lstStyle/>
@@ -4820,7 +4609,7 @@
           <a:noFill/>
         </p:spPr>
         <p:txBody>
-          <a:bodyPr wrap="square" lIns="0" rIns="0" tIns="0" bIns="0">
+          <a:bodyPr wrap="square" lIns="0" tIns="0" rIns="0" bIns="0">
             <a:spAutoFit/>
           </a:bodyPr>
           <a:lstStyle/>
@@ -4854,7 +4643,7 @@
 </file>
 
 <file path=ppt/slides/slide3.xml><?xml version="1.0" encoding="utf-8"?>
-<p:sld xmlns:a="http://schemas.openxmlformats.org/drawingml/2006/main" xmlns:p="http://schemas.openxmlformats.org/presentationml/2006/main" xmlns:r="http://schemas.openxmlformats.org/officeDocument/2006/relationships">
+<p:sld xmlns:a="http://schemas.openxmlformats.org/drawingml/2006/main" xmlns:r="http://schemas.openxmlformats.org/officeDocument/2006/relationships" xmlns:p="http://schemas.openxmlformats.org/presentationml/2006/main">
   <p:cSld>
     <p:bg>
       <p:bgPr>
@@ -4870,7 +4659,14 @@
         <p:cNvGrpSpPr/>
         <p:nvPr/>
       </p:nvGrpSpPr>
-      <p:grpSpPr/>
+      <p:grpSpPr>
+        <a:xfrm>
+          <a:off x="0" y="0"/>
+          <a:ext cx="0" cy="0"/>
+          <a:chOff x="0" y="0"/>
+          <a:chExt cx="0" cy="0"/>
+        </a:xfrm>
+      </p:grpSpPr>
       <p:sp>
         <p:nvSpPr>
           <p:cNvPr id="2" name="TextBox 1"/>
@@ -4888,7 +4684,7 @@
           <a:noFill/>
         </p:spPr>
         <p:txBody>
-          <a:bodyPr wrap="square" lIns="0" rIns="0" tIns="0" bIns="0">
+          <a:bodyPr wrap="square" lIns="0" tIns="0" rIns="0" bIns="0">
             <a:spAutoFit/>
           </a:bodyPr>
           <a:lstStyle/>
@@ -4951,7 +4747,7 @@
           </a:fontRef>
         </p:style>
         <p:txBody>
-          <a:bodyPr rtlCol="0" anchor="ctr" wrap="square"/>
+          <a:bodyPr wrap="square" rtlCol="0" anchor="ctr"/>
           <a:lstStyle/>
           <a:p>
             <a:pPr algn="ctr"/>
@@ -5009,6 +4805,7 @@
           <a:lstStyle/>
           <a:p>
             <a:pPr algn="ctr"/>
+            <a:endParaRPr/>
           </a:p>
         </p:txBody>
       </p:sp>
@@ -5053,7 +4850,7 @@
           </a:fontRef>
         </p:style>
         <p:txBody>
-          <a:bodyPr rtlCol="0" anchor="ctr" wrap="square"/>
+          <a:bodyPr wrap="square" rtlCol="0" anchor="ctr"/>
           <a:lstStyle/>
           <a:p>
             <a:pPr algn="ctr"/>
@@ -5110,6 +4907,7 @@
           <a:lstStyle/>
           <a:p>
             <a:pPr algn="ctr"/>
+            <a:endParaRPr/>
           </a:p>
         </p:txBody>
       </p:sp>
@@ -5154,7 +4952,7 @@
           </a:fontRef>
         </p:style>
         <p:txBody>
-          <a:bodyPr rtlCol="0" anchor="ctr" wrap="square"/>
+          <a:bodyPr wrap="square" rtlCol="0" anchor="ctr"/>
           <a:lstStyle/>
           <a:p>
             <a:pPr algn="ctr"/>
@@ -5211,6 +5009,7 @@
           <a:lstStyle/>
           <a:p>
             <a:pPr algn="ctr"/>
+            <a:endParaRPr/>
           </a:p>
         </p:txBody>
       </p:sp>
@@ -5255,7 +5054,7 @@
           </a:fontRef>
         </p:style>
         <p:txBody>
-          <a:bodyPr rtlCol="0" anchor="ctr" wrap="square"/>
+          <a:bodyPr wrap="square" rtlCol="0" anchor="ctr"/>
           <a:lstStyle/>
           <a:p>
             <a:pPr algn="ctr"/>
@@ -5312,6 +5111,7 @@
           <a:lstStyle/>
           <a:p>
             <a:pPr algn="ctr"/>
+            <a:endParaRPr/>
           </a:p>
         </p:txBody>
       </p:sp>
@@ -5356,7 +5156,7 @@
           </a:fontRef>
         </p:style>
         <p:txBody>
-          <a:bodyPr rtlCol="0" anchor="ctr" wrap="square"/>
+          <a:bodyPr wrap="square" rtlCol="0" anchor="ctr"/>
           <a:lstStyle/>
           <a:p>
             <a:pPr algn="ctr"/>
@@ -5390,7 +5190,7 @@
           <a:noFill/>
         </p:spPr>
         <p:txBody>
-          <a:bodyPr wrap="square" lIns="0" rIns="0" tIns="0" bIns="0">
+          <a:bodyPr wrap="square" lIns="0" tIns="0" rIns="0" bIns="0">
             <a:spAutoFit/>
           </a:bodyPr>
           <a:lstStyle/>
@@ -5429,7 +5229,7 @@
           <a:noFill/>
         </p:spPr>
         <p:txBody>
-          <a:bodyPr wrap="square" lIns="0" rIns="0" tIns="0" bIns="0">
+          <a:bodyPr wrap="square" lIns="0" tIns="0" rIns="0" bIns="0">
             <a:spAutoFit/>
           </a:bodyPr>
           <a:lstStyle/>
@@ -5468,7 +5268,7 @@
           <a:noFill/>
         </p:spPr>
         <p:txBody>
-          <a:bodyPr wrap="square" lIns="0" rIns="0" tIns="0" bIns="0">
+          <a:bodyPr wrap="square" lIns="0" tIns="0" rIns="0" bIns="0">
             <a:spAutoFit/>
           </a:bodyPr>
           <a:lstStyle/>
@@ -5529,7 +5329,7 @@
           <a:noFill/>
         </p:spPr>
         <p:txBody>
-          <a:bodyPr wrap="square" lIns="0" rIns="0" tIns="0" bIns="0">
+          <a:bodyPr wrap="square" lIns="0" tIns="0" rIns="0" bIns="0">
             <a:spAutoFit/>
           </a:bodyPr>
           <a:lstStyle/>
@@ -5568,7 +5368,7 @@
           <a:noFill/>
         </p:spPr>
         <p:txBody>
-          <a:bodyPr wrap="square" lIns="0" rIns="0" tIns="0" bIns="0">
+          <a:bodyPr wrap="square" lIns="0" tIns="0" rIns="0" bIns="0">
             <a:spAutoFit/>
           </a:bodyPr>
           <a:lstStyle/>
@@ -5610,7 +5410,7 @@
           <a:noFill/>
         </p:spPr>
         <p:txBody>
-          <a:bodyPr wrap="square" lIns="0" rIns="0" tIns="0" bIns="0">
+          <a:bodyPr wrap="square" lIns="0" tIns="0" rIns="0" bIns="0">
             <a:spAutoFit/>
           </a:bodyPr>
           <a:lstStyle/>
@@ -5649,7 +5449,7 @@
           <a:noFill/>
         </p:spPr>
         <p:txBody>
-          <a:bodyPr wrap="square" lIns="0" rIns="0" tIns="0" bIns="0">
+          <a:bodyPr wrap="square" lIns="0" tIns="0" rIns="0" bIns="0">
             <a:spAutoFit/>
           </a:bodyPr>
           <a:lstStyle/>
@@ -5683,7 +5483,7 @@
 </file>
 
 <file path=ppt/slides/slide4.xml><?xml version="1.0" encoding="utf-8"?>
-<p:sld xmlns:a="http://schemas.openxmlformats.org/drawingml/2006/main" xmlns:p="http://schemas.openxmlformats.org/presentationml/2006/main" xmlns:r="http://schemas.openxmlformats.org/officeDocument/2006/relationships">
+<p:sld xmlns:a="http://schemas.openxmlformats.org/drawingml/2006/main" xmlns:r="http://schemas.openxmlformats.org/officeDocument/2006/relationships" xmlns:p="http://schemas.openxmlformats.org/presentationml/2006/main">
   <p:cSld>
     <p:bg>
       <p:bgPr>
@@ -5699,7 +5499,14 @@
         <p:cNvGrpSpPr/>
         <p:nvPr/>
       </p:nvGrpSpPr>
-      <p:grpSpPr/>
+      <p:grpSpPr>
+        <a:xfrm>
+          <a:off x="0" y="0"/>
+          <a:ext cx="0" cy="0"/>
+          <a:chOff x="0" y="0"/>
+          <a:chExt cx="0" cy="0"/>
+        </a:xfrm>
+      </p:grpSpPr>
       <p:sp>
         <p:nvSpPr>
           <p:cNvPr id="2" name="TextBox 1"/>
@@ -5717,7 +5524,7 @@
           <a:noFill/>
         </p:spPr>
         <p:txBody>
-          <a:bodyPr wrap="square" lIns="0" rIns="0" tIns="0" bIns="0">
+          <a:bodyPr wrap="square" lIns="0" tIns="0" rIns="0" bIns="0">
             <a:spAutoFit/>
           </a:bodyPr>
           <a:lstStyle/>
@@ -5748,7 +5555,7 @@
           <p:nvPr/>
         </p:nvPicPr>
         <p:blipFill>
-          <a:blip r:embed="rId2"/>
+          <a:blip r:embed="rId3"/>
           <a:stretch>
             <a:fillRect/>
           </a:stretch>
@@ -5780,7 +5587,7 @@
           <a:noFill/>
         </p:spPr>
         <p:txBody>
-          <a:bodyPr wrap="square" lIns="0" rIns="0" tIns="0" bIns="0">
+          <a:bodyPr wrap="square" lIns="0" tIns="0" rIns="0" bIns="0">
             <a:spAutoFit/>
           </a:bodyPr>
           <a:lstStyle/>
@@ -5841,7 +5648,7 @@
           <a:noFill/>
         </p:spPr>
         <p:txBody>
-          <a:bodyPr wrap="square" lIns="0" rIns="0" tIns="0" bIns="0">
+          <a:bodyPr wrap="square" lIns="0" tIns="0" rIns="0" bIns="0">
             <a:spAutoFit/>
           </a:bodyPr>
           <a:lstStyle/>
@@ -5880,7 +5687,7 @@
           <a:noFill/>
         </p:spPr>
         <p:txBody>
-          <a:bodyPr wrap="square" lIns="0" rIns="0" tIns="0" bIns="0">
+          <a:bodyPr wrap="square" lIns="0" tIns="0" rIns="0" bIns="0">
             <a:spAutoFit/>
           </a:bodyPr>
           <a:lstStyle/>
@@ -5914,7 +5721,7 @@
 </file>
 
 <file path=ppt/slides/slide5.xml><?xml version="1.0" encoding="utf-8"?>
-<p:sld xmlns:a="http://schemas.openxmlformats.org/drawingml/2006/main" xmlns:p="http://schemas.openxmlformats.org/presentationml/2006/main" xmlns:r="http://schemas.openxmlformats.org/officeDocument/2006/relationships">
+<p:sld xmlns:a="http://schemas.openxmlformats.org/drawingml/2006/main" xmlns:r="http://schemas.openxmlformats.org/officeDocument/2006/relationships" xmlns:p="http://schemas.openxmlformats.org/presentationml/2006/main">
   <p:cSld>
     <p:bg>
       <p:bgPr>
@@ -5930,7 +5737,14 @@
         <p:cNvGrpSpPr/>
         <p:nvPr/>
       </p:nvGrpSpPr>
-      <p:grpSpPr/>
+      <p:grpSpPr>
+        <a:xfrm>
+          <a:off x="0" y="0"/>
+          <a:ext cx="0" cy="0"/>
+          <a:chOff x="0" y="0"/>
+          <a:chExt cx="0" cy="0"/>
+        </a:xfrm>
+      </p:grpSpPr>
       <p:sp>
         <p:nvSpPr>
           <p:cNvPr id="2" name="TextBox 1"/>
@@ -5948,7 +5762,7 @@
           <a:noFill/>
         </p:spPr>
         <p:txBody>
-          <a:bodyPr wrap="square" lIns="0" rIns="0" tIns="0" bIns="0">
+          <a:bodyPr wrap="square" lIns="0" tIns="0" rIns="0" bIns="0">
             <a:spAutoFit/>
           </a:bodyPr>
           <a:lstStyle/>
@@ -5989,10 +5803,34 @@
                 <a:tableStyleId>{5C22544A-7EE6-4342-B048-85BDC9FD1C3A}</a:tableStyleId>
               </a:tblPr>
               <a:tblGrid>
-                <a:gridCol w="3383280"/>
-                <a:gridCol w="1188720"/>
-                <a:gridCol w="1188720"/>
-                <a:gridCol w="1188720"/>
+                <a:gridCol w="3383280">
+                  <a:extLst>
+                    <a:ext uri="{9D8B030D-6E8A-4147-A177-3AD203B41FA5}">
+                      <a16:colId xmlns:a16="http://schemas.microsoft.com/office/drawing/2014/main" val="20000"/>
+                    </a:ext>
+                  </a:extLst>
+                </a:gridCol>
+                <a:gridCol w="1188720">
+                  <a:extLst>
+                    <a:ext uri="{9D8B030D-6E8A-4147-A177-3AD203B41FA5}">
+                      <a16:colId xmlns:a16="http://schemas.microsoft.com/office/drawing/2014/main" val="20001"/>
+                    </a:ext>
+                  </a:extLst>
+                </a:gridCol>
+                <a:gridCol w="1188720">
+                  <a:extLst>
+                    <a:ext uri="{9D8B030D-6E8A-4147-A177-3AD203B41FA5}">
+                      <a16:colId xmlns:a16="http://schemas.microsoft.com/office/drawing/2014/main" val="20002"/>
+                    </a:ext>
+                  </a:extLst>
+                </a:gridCol>
+                <a:gridCol w="1188720">
+                  <a:extLst>
+                    <a:ext uri="{9D8B030D-6E8A-4147-A177-3AD203B41FA5}">
+                      <a16:colId xmlns:a16="http://schemas.microsoft.com/office/drawing/2014/main" val="20003"/>
+                    </a:ext>
+                  </a:extLst>
+                </a:gridCol>
               </a:tblGrid>
               <a:tr h="457200">
                 <a:tc>
@@ -6087,6 +5925,11 @@
                     </a:solidFill>
                   </a:tcPr>
                 </a:tc>
+                <a:extLst>
+                  <a:ext uri="{0D108BD9-81ED-4DB2-BD59-A6C34878D82A}">
+                    <a16:rowId xmlns:a16="http://schemas.microsoft.com/office/drawing/2014/main" val="10000"/>
+                  </a:ext>
+                </a:extLst>
               </a:tr>
               <a:tr h="457200">
                 <a:tc>
@@ -6181,6 +6024,11 @@
                     </a:solidFill>
                   </a:tcPr>
                 </a:tc>
+                <a:extLst>
+                  <a:ext uri="{0D108BD9-81ED-4DB2-BD59-A6C34878D82A}">
+                    <a16:rowId xmlns:a16="http://schemas.microsoft.com/office/drawing/2014/main" val="10001"/>
+                  </a:ext>
+                </a:extLst>
               </a:tr>
               <a:tr h="457200">
                 <a:tc>
@@ -6275,6 +6123,11 @@
                     </a:solidFill>
                   </a:tcPr>
                 </a:tc>
+                <a:extLst>
+                  <a:ext uri="{0D108BD9-81ED-4DB2-BD59-A6C34878D82A}">
+                    <a16:rowId xmlns:a16="http://schemas.microsoft.com/office/drawing/2014/main" val="10002"/>
+                  </a:ext>
+                </a:extLst>
               </a:tr>
               <a:tr h="457200">
                 <a:tc>
@@ -6369,6 +6222,11 @@
                     </a:solidFill>
                   </a:tcPr>
                 </a:tc>
+                <a:extLst>
+                  <a:ext uri="{0D108BD9-81ED-4DB2-BD59-A6C34878D82A}">
+                    <a16:rowId xmlns:a16="http://schemas.microsoft.com/office/drawing/2014/main" val="10003"/>
+                  </a:ext>
+                </a:extLst>
               </a:tr>
               <a:tr h="457200">
                 <a:tc>
@@ -6463,6 +6321,11 @@
                     </a:solidFill>
                   </a:tcPr>
                 </a:tc>
+                <a:extLst>
+                  <a:ext uri="{0D108BD9-81ED-4DB2-BD59-A6C34878D82A}">
+                    <a16:rowId xmlns:a16="http://schemas.microsoft.com/office/drawing/2014/main" val="10004"/>
+                  </a:ext>
+                </a:extLst>
               </a:tr>
               <a:tr h="457200">
                 <a:tc>
@@ -6557,6 +6420,11 @@
                     </a:solidFill>
                   </a:tcPr>
                 </a:tc>
+                <a:extLst>
+                  <a:ext uri="{0D108BD9-81ED-4DB2-BD59-A6C34878D82A}">
+                    <a16:rowId xmlns:a16="http://schemas.microsoft.com/office/drawing/2014/main" val="10005"/>
+                  </a:ext>
+                </a:extLst>
               </a:tr>
             </a:tbl>
           </a:graphicData>
@@ -6579,7 +6447,7 @@
           <a:noFill/>
         </p:spPr>
         <p:txBody>
-          <a:bodyPr wrap="square" lIns="0" rIns="0" tIns="0" bIns="0">
+          <a:bodyPr wrap="square" lIns="0" tIns="0" rIns="0" bIns="0">
             <a:spAutoFit/>
           </a:bodyPr>
           <a:lstStyle/>
@@ -6618,7 +6486,7 @@
           <a:noFill/>
         </p:spPr>
         <p:txBody>
-          <a:bodyPr wrap="square" lIns="0" rIns="0" tIns="0" bIns="0">
+          <a:bodyPr wrap="square" lIns="0" tIns="0" rIns="0" bIns="0">
             <a:spAutoFit/>
           </a:bodyPr>
           <a:lstStyle/>
@@ -6657,7 +6525,7 @@
           <a:noFill/>
         </p:spPr>
         <p:txBody>
-          <a:bodyPr wrap="square" lIns="0" rIns="0" tIns="0" bIns="0">
+          <a:bodyPr wrap="square" lIns="0" tIns="0" rIns="0" bIns="0">
             <a:spAutoFit/>
           </a:bodyPr>
           <a:lstStyle/>
@@ -6699,7 +6567,7 @@
           <a:noFill/>
         </p:spPr>
         <p:txBody>
-          <a:bodyPr wrap="square" lIns="0" rIns="0" tIns="0" bIns="0">
+          <a:bodyPr wrap="square" lIns="0" tIns="0" rIns="0" bIns="0">
             <a:spAutoFit/>
           </a:bodyPr>
           <a:lstStyle/>
@@ -6738,7 +6606,7 @@
           <a:noFill/>
         </p:spPr>
         <p:txBody>
-          <a:bodyPr wrap="square" lIns="0" rIns="0" tIns="0" bIns="0">
+          <a:bodyPr wrap="square" lIns="0" tIns="0" rIns="0" bIns="0">
             <a:spAutoFit/>
           </a:bodyPr>
           <a:lstStyle/>
@@ -6780,7 +6648,7 @@
           <a:noFill/>
         </p:spPr>
         <p:txBody>
-          <a:bodyPr wrap="square" lIns="0" rIns="0" tIns="0" bIns="0">
+          <a:bodyPr wrap="square" lIns="0" tIns="0" rIns="0" bIns="0">
             <a:spAutoFit/>
           </a:bodyPr>
           <a:lstStyle/>
@@ -6814,7 +6682,7 @@
 </file>
 
 <file path=ppt/slides/slide6.xml><?xml version="1.0" encoding="utf-8"?>
-<p:sld xmlns:a="http://schemas.openxmlformats.org/drawingml/2006/main" xmlns:p="http://schemas.openxmlformats.org/presentationml/2006/main" xmlns:r="http://schemas.openxmlformats.org/officeDocument/2006/relationships">
+<p:sld xmlns:a="http://schemas.openxmlformats.org/drawingml/2006/main" xmlns:r="http://schemas.openxmlformats.org/officeDocument/2006/relationships" xmlns:p="http://schemas.openxmlformats.org/presentationml/2006/main">
   <p:cSld>
     <p:bg>
       <p:bgPr>
@@ -6830,7 +6698,14 @@
         <p:cNvGrpSpPr/>
         <p:nvPr/>
       </p:nvGrpSpPr>
-      <p:grpSpPr/>
+      <p:grpSpPr>
+        <a:xfrm>
+          <a:off x="0" y="0"/>
+          <a:ext cx="0" cy="0"/>
+          <a:chOff x="0" y="0"/>
+          <a:chExt cx="0" cy="0"/>
+        </a:xfrm>
+      </p:grpSpPr>
       <p:sp>
         <p:nvSpPr>
           <p:cNvPr id="2" name="TextBox 1"/>
@@ -6848,7 +6723,7 @@
           <a:noFill/>
         </p:spPr>
         <p:txBody>
-          <a:bodyPr wrap="square" lIns="0" rIns="0" tIns="0" bIns="0">
+          <a:bodyPr wrap="square" lIns="0" tIns="0" rIns="0" bIns="0">
             <a:spAutoFit/>
           </a:bodyPr>
           <a:lstStyle/>
@@ -6879,7 +6754,7 @@
           <p:nvPr/>
         </p:nvPicPr>
         <p:blipFill>
-          <a:blip r:embed="rId2"/>
+          <a:blip r:embed="rId3"/>
           <a:stretch>
             <a:fillRect/>
           </a:stretch>
@@ -6911,7 +6786,7 @@
           <a:noFill/>
         </p:spPr>
         <p:txBody>
-          <a:bodyPr wrap="square" lIns="0" rIns="0" tIns="0" bIns="0">
+          <a:bodyPr wrap="square" lIns="0" tIns="0" rIns="0" bIns="0">
             <a:spAutoFit/>
           </a:bodyPr>
           <a:lstStyle/>
@@ -6972,7 +6847,7 @@
           <a:noFill/>
         </p:spPr>
         <p:txBody>
-          <a:bodyPr wrap="square" lIns="0" rIns="0" tIns="0" bIns="0">
+          <a:bodyPr wrap="square" lIns="0" tIns="0" rIns="0" bIns="0">
             <a:spAutoFit/>
           </a:bodyPr>
           <a:lstStyle/>
@@ -7011,7 +6886,7 @@
           <a:noFill/>
         </p:spPr>
         <p:txBody>
-          <a:bodyPr wrap="square" lIns="0" rIns="0" tIns="0" bIns="0">
+          <a:bodyPr wrap="square" lIns="0" tIns="0" rIns="0" bIns="0">
             <a:spAutoFit/>
           </a:bodyPr>
           <a:lstStyle/>
@@ -7053,7 +6928,7 @@
           <a:noFill/>
         </p:spPr>
         <p:txBody>
-          <a:bodyPr wrap="square" lIns="0" rIns="0" tIns="0" bIns="0">
+          <a:bodyPr wrap="square" lIns="0" tIns="0" rIns="0" bIns="0">
             <a:spAutoFit/>
           </a:bodyPr>
           <a:lstStyle/>
@@ -7092,7 +6967,7 @@
           <a:noFill/>
         </p:spPr>
         <p:txBody>
-          <a:bodyPr wrap="square" lIns="0" rIns="0" tIns="0" bIns="0">
+          <a:bodyPr wrap="square" lIns="0" tIns="0" rIns="0" bIns="0">
             <a:spAutoFit/>
           </a:bodyPr>
           <a:lstStyle/>
@@ -7126,7 +7001,7 @@
 </file>
 
 <file path=ppt/slides/slide7.xml><?xml version="1.0" encoding="utf-8"?>
-<p:sld xmlns:a="http://schemas.openxmlformats.org/drawingml/2006/main" xmlns:p="http://schemas.openxmlformats.org/presentationml/2006/main" xmlns:r="http://schemas.openxmlformats.org/officeDocument/2006/relationships">
+<p:sld xmlns:a="http://schemas.openxmlformats.org/drawingml/2006/main" xmlns:r="http://schemas.openxmlformats.org/officeDocument/2006/relationships" xmlns:p="http://schemas.openxmlformats.org/presentationml/2006/main">
   <p:cSld>
     <p:bg>
       <p:bgPr>
@@ -7142,7 +7017,14 @@
         <p:cNvGrpSpPr/>
         <p:nvPr/>
       </p:nvGrpSpPr>
-      <p:grpSpPr/>
+      <p:grpSpPr>
+        <a:xfrm>
+          <a:off x="0" y="0"/>
+          <a:ext cx="0" cy="0"/>
+          <a:chOff x="0" y="0"/>
+          <a:chExt cx="0" cy="0"/>
+        </a:xfrm>
+      </p:grpSpPr>
       <p:sp>
         <p:nvSpPr>
           <p:cNvPr id="2" name="TextBox 1"/>
@@ -7160,7 +7042,7 @@
           <a:noFill/>
         </p:spPr>
         <p:txBody>
-          <a:bodyPr wrap="square" lIns="0" rIns="0" tIns="0" bIns="0">
+          <a:bodyPr wrap="square" lIns="0" tIns="0" rIns="0" bIns="0">
             <a:spAutoFit/>
           </a:bodyPr>
           <a:lstStyle/>
@@ -7199,7 +7081,7 @@
           <a:noFill/>
         </p:spPr>
         <p:txBody>
-          <a:bodyPr wrap="square" lIns="0" rIns="0" tIns="0" bIns="0">
+          <a:bodyPr wrap="square" lIns="0" tIns="0" rIns="0" bIns="0">
             <a:spAutoFit/>
           </a:bodyPr>
           <a:lstStyle/>
@@ -7238,7 +7120,7 @@
           <a:noFill/>
         </p:spPr>
         <p:txBody>
-          <a:bodyPr wrap="square" lIns="0" rIns="0" tIns="0" bIns="0">
+          <a:bodyPr wrap="square" lIns="0" tIns="0" rIns="0" bIns="0">
             <a:spAutoFit/>
           </a:bodyPr>
           <a:lstStyle/>
@@ -7277,7 +7159,7 @@
           <a:noFill/>
         </p:spPr>
         <p:txBody>
-          <a:bodyPr wrap="square" lIns="0" rIns="0" tIns="0" bIns="0">
+          <a:bodyPr wrap="square" lIns="0" tIns="0" rIns="0" bIns="0">
             <a:spAutoFit/>
           </a:bodyPr>
           <a:lstStyle/>
@@ -7316,7 +7198,7 @@
           <a:noFill/>
         </p:spPr>
         <p:txBody>
-          <a:bodyPr wrap="square" lIns="0" rIns="0" tIns="0" bIns="0">
+          <a:bodyPr wrap="square" lIns="0" tIns="0" rIns="0" bIns="0">
             <a:spAutoFit/>
           </a:bodyPr>
           <a:lstStyle/>
@@ -7358,7 +7240,7 @@
           <a:noFill/>
         </p:spPr>
         <p:txBody>
-          <a:bodyPr wrap="square" lIns="0" rIns="0" tIns="0" bIns="0">
+          <a:bodyPr wrap="square" lIns="0" tIns="0" rIns="0" bIns="0">
             <a:spAutoFit/>
           </a:bodyPr>
           <a:lstStyle/>
@@ -7397,7 +7279,7 @@
           <a:noFill/>
         </p:spPr>
         <p:txBody>
-          <a:bodyPr wrap="square" lIns="0" rIns="0" tIns="0" bIns="0">
+          <a:bodyPr wrap="square" lIns="0" tIns="0" rIns="0" bIns="0">
             <a:spAutoFit/>
           </a:bodyPr>
           <a:lstStyle/>
@@ -7436,7 +7318,7 @@
           <a:noFill/>
         </p:spPr>
         <p:txBody>
-          <a:bodyPr wrap="square" lIns="0" rIns="0" tIns="0" bIns="0">
+          <a:bodyPr wrap="square" lIns="0" tIns="0" rIns="0" bIns="0">
             <a:spAutoFit/>
           </a:bodyPr>
           <a:lstStyle/>
@@ -7504,6 +7386,7 @@
           <a:lstStyle/>
           <a:p>
             <a:pPr algn="ctr"/>
+            <a:endParaRPr/>
           </a:p>
         </p:txBody>
       </p:sp>
@@ -7524,7 +7407,7 @@
           <a:noFill/>
         </p:spPr>
         <p:txBody>
-          <a:bodyPr wrap="square" lIns="0" rIns="0" tIns="0" bIns="0">
+          <a:bodyPr wrap="square" lIns="0" tIns="0" rIns="0" bIns="0">
             <a:spAutoFit/>
           </a:bodyPr>
           <a:lstStyle/>
@@ -7563,7 +7446,7 @@
           <a:noFill/>
         </p:spPr>
         <p:txBody>
-          <a:bodyPr wrap="square" lIns="0" rIns="0" tIns="0" bIns="0">
+          <a:bodyPr wrap="square" lIns="0" tIns="0" rIns="0" bIns="0">
             <a:spAutoFit/>
           </a:bodyPr>
           <a:lstStyle/>
@@ -7635,7 +7518,7 @@
 </file>
 
 <file path=ppt/slides/slide8.xml><?xml version="1.0" encoding="utf-8"?>
-<p:sld xmlns:a="http://schemas.openxmlformats.org/drawingml/2006/main" xmlns:p="http://schemas.openxmlformats.org/presentationml/2006/main" xmlns:r="http://schemas.openxmlformats.org/officeDocument/2006/relationships">
+<p:sld xmlns:a="http://schemas.openxmlformats.org/drawingml/2006/main" xmlns:r="http://schemas.openxmlformats.org/officeDocument/2006/relationships" xmlns:p="http://schemas.openxmlformats.org/presentationml/2006/main">
   <p:cSld>
     <p:bg>
       <p:bgPr>
@@ -7651,7 +7534,14 @@
         <p:cNvGrpSpPr/>
         <p:nvPr/>
       </p:nvGrpSpPr>
-      <p:grpSpPr/>
+      <p:grpSpPr>
+        <a:xfrm>
+          <a:off x="0" y="0"/>
+          <a:ext cx="0" cy="0"/>
+          <a:chOff x="0" y="0"/>
+          <a:chExt cx="0" cy="0"/>
+        </a:xfrm>
+      </p:grpSpPr>
       <p:sp>
         <p:nvSpPr>
           <p:cNvPr id="2" name="TextBox 1"/>
@@ -7669,7 +7559,7 @@
           <a:noFill/>
         </p:spPr>
         <p:txBody>
-          <a:bodyPr wrap="square" lIns="0" rIns="0" tIns="0" bIns="0">
+          <a:bodyPr wrap="square" lIns="0" tIns="0" rIns="0" bIns="0">
             <a:spAutoFit/>
           </a:bodyPr>
           <a:lstStyle/>
@@ -7708,7 +7598,7 @@
           <a:noFill/>
         </p:spPr>
         <p:txBody>
-          <a:bodyPr wrap="square" lIns="0" rIns="0" tIns="0" bIns="0">
+          <a:bodyPr wrap="square" lIns="0" tIns="0" rIns="0" bIns="0">
             <a:spAutoFit/>
           </a:bodyPr>
           <a:lstStyle/>
@@ -7747,7 +7637,7 @@
           <a:noFill/>
         </p:spPr>
         <p:txBody>
-          <a:bodyPr wrap="square" lIns="0" rIns="0" tIns="0" bIns="0">
+          <a:bodyPr wrap="square" lIns="0" tIns="0" rIns="0" bIns="0">
             <a:spAutoFit/>
           </a:bodyPr>
           <a:lstStyle/>
@@ -7786,7 +7676,7 @@
           <a:noFill/>
         </p:spPr>
         <p:txBody>
-          <a:bodyPr wrap="square" lIns="0" rIns="0" tIns="0" bIns="0">
+          <a:bodyPr wrap="square" lIns="0" tIns="0" rIns="0" bIns="0">
             <a:spAutoFit/>
           </a:bodyPr>
           <a:lstStyle/>
@@ -7825,7 +7715,7 @@
           <a:noFill/>
         </p:spPr>
         <p:txBody>
-          <a:bodyPr wrap="square" lIns="0" rIns="0" tIns="0" bIns="0">
+          <a:bodyPr wrap="square" lIns="0" tIns="0" rIns="0" bIns="0">
             <a:spAutoFit/>
           </a:bodyPr>
           <a:lstStyle/>
@@ -7867,7 +7757,7 @@
           <a:noFill/>
         </p:spPr>
         <p:txBody>
-          <a:bodyPr wrap="square" lIns="0" rIns="0" tIns="0" bIns="0">
+          <a:bodyPr wrap="square" lIns="0" tIns="0" rIns="0" bIns="0">
             <a:spAutoFit/>
           </a:bodyPr>
           <a:lstStyle/>
@@ -7906,7 +7796,7 @@
           <a:noFill/>
         </p:spPr>
         <p:txBody>
-          <a:bodyPr wrap="square" lIns="0" rIns="0" tIns="0" bIns="0">
+          <a:bodyPr wrap="square" lIns="0" tIns="0" rIns="0" bIns="0">
             <a:spAutoFit/>
           </a:bodyPr>
           <a:lstStyle/>
@@ -7945,7 +7835,7 @@
           <a:noFill/>
         </p:spPr>
         <p:txBody>
-          <a:bodyPr wrap="square" lIns="0" rIns="0" tIns="0" bIns="0">
+          <a:bodyPr wrap="square" lIns="0" tIns="0" rIns="0" bIns="0">
             <a:spAutoFit/>
           </a:bodyPr>
           <a:lstStyle/>
@@ -8013,6 +7903,7 @@
           <a:lstStyle/>
           <a:p>
             <a:pPr algn="ctr"/>
+            <a:endParaRPr/>
           </a:p>
         </p:txBody>
       </p:sp>
@@ -8033,7 +7924,7 @@
           <a:noFill/>
         </p:spPr>
         <p:txBody>
-          <a:bodyPr wrap="square" lIns="0" rIns="0" tIns="0" bIns="0">
+          <a:bodyPr wrap="square" lIns="0" tIns="0" rIns="0" bIns="0">
             <a:spAutoFit/>
           </a:bodyPr>
           <a:lstStyle/>
@@ -8072,7 +7963,7 @@
           <a:noFill/>
         </p:spPr>
         <p:txBody>
-          <a:bodyPr wrap="square" lIns="0" rIns="0" tIns="0" bIns="0">
+          <a:bodyPr wrap="square" lIns="0" tIns="0" rIns="0" bIns="0">
             <a:spAutoFit/>
           </a:bodyPr>
           <a:lstStyle/>
@@ -8144,7 +8035,7 @@
 </file>
 
 <file path=ppt/slides/slide9.xml><?xml version="1.0" encoding="utf-8"?>
-<p:sld xmlns:a="http://schemas.openxmlformats.org/drawingml/2006/main" xmlns:p="http://schemas.openxmlformats.org/presentationml/2006/main" xmlns:r="http://schemas.openxmlformats.org/officeDocument/2006/relationships">
+<p:sld xmlns:a="http://schemas.openxmlformats.org/drawingml/2006/main" xmlns:r="http://schemas.openxmlformats.org/officeDocument/2006/relationships" xmlns:p="http://schemas.openxmlformats.org/presentationml/2006/main">
   <p:cSld>
     <p:bg>
       <p:bgPr>
@@ -8160,7 +8051,14 @@
         <p:cNvGrpSpPr/>
         <p:nvPr/>
       </p:nvGrpSpPr>
-      <p:grpSpPr/>
+      <p:grpSpPr>
+        <a:xfrm>
+          <a:off x="0" y="0"/>
+          <a:ext cx="0" cy="0"/>
+          <a:chOff x="0" y="0"/>
+          <a:chExt cx="0" cy="0"/>
+        </a:xfrm>
+      </p:grpSpPr>
       <p:sp>
         <p:nvSpPr>
           <p:cNvPr id="2" name="TextBox 1"/>
@@ -8178,7 +8076,7 @@
           <a:noFill/>
         </p:spPr>
         <p:txBody>
-          <a:bodyPr wrap="square" lIns="0" rIns="0" tIns="0" bIns="0">
+          <a:bodyPr wrap="square" lIns="0" tIns="0" rIns="0" bIns="0">
             <a:spAutoFit/>
           </a:bodyPr>
           <a:lstStyle/>
@@ -8217,7 +8115,7 @@
           <a:noFill/>
         </p:spPr>
         <p:txBody>
-          <a:bodyPr wrap="square" lIns="0" rIns="0" tIns="0" bIns="0">
+          <a:bodyPr wrap="square" lIns="0" tIns="0" rIns="0" bIns="0">
             <a:spAutoFit/>
           </a:bodyPr>
           <a:lstStyle/>
@@ -8304,6 +8202,7 @@
           <a:lstStyle/>
           <a:p>
             <a:pPr algn="ctr"/>
+            <a:endParaRPr/>
           </a:p>
         </p:txBody>
       </p:sp>
@@ -8324,7 +8223,7 @@
           <a:noFill/>
         </p:spPr>
         <p:txBody>
-          <a:bodyPr wrap="square" lIns="0" rIns="0" tIns="0" bIns="0">
+          <a:bodyPr wrap="square" lIns="0" tIns="0" rIns="0" bIns="0">
             <a:spAutoFit/>
           </a:bodyPr>
           <a:lstStyle/>
@@ -8385,7 +8284,7 @@
           <a:noFill/>
         </p:spPr>
         <p:txBody>
-          <a:bodyPr wrap="square" lIns="0" rIns="0" tIns="0" bIns="0">
+          <a:bodyPr wrap="square" lIns="0" tIns="0" rIns="0" bIns="0">
             <a:spAutoFit/>
           </a:bodyPr>
           <a:lstStyle/>
@@ -8746,44 +8645,44 @@
         <a:sysClr val="window" lastClr="FFFFFF"/>
       </a:lt1>
       <a:dk2>
-        <a:srgbClr val="1F497D"/>
+        <a:srgbClr val="0E2841"/>
       </a:dk2>
       <a:lt2>
-        <a:srgbClr val="EEECE1"/>
+        <a:srgbClr val="E8E8E8"/>
       </a:lt2>
       <a:accent1>
-        <a:srgbClr val="4F81BD"/>
+        <a:srgbClr val="156082"/>
       </a:accent1>
       <a:accent2>
-        <a:srgbClr val="C0504D"/>
+        <a:srgbClr val="E97132"/>
       </a:accent2>
       <a:accent3>
-        <a:srgbClr val="9BBB59"/>
+        <a:srgbClr val="196B24"/>
       </a:accent3>
       <a:accent4>
-        <a:srgbClr val="8064A2"/>
+        <a:srgbClr val="0F9ED5"/>
       </a:accent4>
       <a:accent5>
-        <a:srgbClr val="4BACC6"/>
+        <a:srgbClr val="A02B93"/>
       </a:accent5>
       <a:accent6>
-        <a:srgbClr val="F79646"/>
+        <a:srgbClr val="4EA72E"/>
       </a:accent6>
       <a:hlink>
-        <a:srgbClr val="0000FF"/>
+        <a:srgbClr val="467886"/>
       </a:hlink>
       <a:folHlink>
-        <a:srgbClr val="800080"/>
+        <a:srgbClr val="96607D"/>
       </a:folHlink>
     </a:clrScheme>
     <a:fontScheme name="Office">
       <a:majorFont>
-        <a:latin typeface="Calibri"/>
+        <a:latin typeface="Aptos Display" panose="02110004020202020204"/>
         <a:ea typeface=""/>
         <a:cs typeface=""/>
-        <a:font script="Jpan" typeface="ＭＳ Ｐゴシック"/>
+        <a:font script="Jpan" typeface="游ゴシック Light"/>
         <a:font script="Hang" typeface="맑은 고딕"/>
-        <a:font script="Hans" typeface="宋体"/>
+        <a:font script="Hans" typeface="等线 Light"/>
         <a:font script="Hant" typeface="新細明體"/>
         <a:font script="Arab" typeface="Times New Roman"/>
         <a:font script="Hebr" typeface="Times New Roman"/>
@@ -8811,14 +8710,31 @@
         <a:font script="Viet" typeface="Times New Roman"/>
         <a:font script="Uigh" typeface="Microsoft Uighur"/>
         <a:font script="Geor" typeface="Sylfaen"/>
+        <a:font script="Armn" typeface="Arial"/>
+        <a:font script="Bugi" typeface="Leelawadee UI"/>
+        <a:font script="Bopo" typeface="Microsoft JhengHei"/>
+        <a:font script="Java" typeface="Javanese Text"/>
+        <a:font script="Lisu" typeface="Segoe UI"/>
+        <a:font script="Mymr" typeface="Myanmar Text"/>
+        <a:font script="Nkoo" typeface="Ebrima"/>
+        <a:font script="Olck" typeface="Nirmala UI"/>
+        <a:font script="Osma" typeface="Ebrima"/>
+        <a:font script="Phag" typeface="Phagspa"/>
+        <a:font script="Syrn" typeface="Estrangelo Edessa"/>
+        <a:font script="Syrj" typeface="Estrangelo Edessa"/>
+        <a:font script="Syre" typeface="Estrangelo Edessa"/>
+        <a:font script="Sora" typeface="Nirmala UI"/>
+        <a:font script="Tale" typeface="Microsoft Tai Le"/>
+        <a:font script="Talu" typeface="Microsoft New Tai Lue"/>
+        <a:font script="Tfng" typeface="Ebrima"/>
       </a:majorFont>
       <a:minorFont>
-        <a:latin typeface="Calibri"/>
+        <a:latin typeface="Aptos" panose="02110004020202020204"/>
         <a:ea typeface=""/>
         <a:cs typeface=""/>
-        <a:font script="Jpan" typeface="ＭＳ Ｐゴシック"/>
+        <a:font script="Jpan" typeface="游ゴシック"/>
         <a:font script="Hang" typeface="맑은 고딕"/>
-        <a:font script="Hans" typeface="宋体"/>
+        <a:font script="Hans" typeface="等线"/>
         <a:font script="Hant" typeface="新細明體"/>
         <a:font script="Arab" typeface="Arial"/>
         <a:font script="Hebr" typeface="Arial"/>
@@ -8846,6 +8762,23 @@
         <a:font script="Viet" typeface="Arial"/>
         <a:font script="Uigh" typeface="Microsoft Uighur"/>
         <a:font script="Geor" typeface="Sylfaen"/>
+        <a:font script="Armn" typeface="Arial"/>
+        <a:font script="Bugi" typeface="Leelawadee UI"/>
+        <a:font script="Bopo" typeface="Microsoft JhengHei"/>
+        <a:font script="Java" typeface="Javanese Text"/>
+        <a:font script="Lisu" typeface="Segoe UI"/>
+        <a:font script="Mymr" typeface="Myanmar Text"/>
+        <a:font script="Nkoo" typeface="Ebrima"/>
+        <a:font script="Olck" typeface="Nirmala UI"/>
+        <a:font script="Osma" typeface="Ebrima"/>
+        <a:font script="Phag" typeface="Phagspa"/>
+        <a:font script="Syrn" typeface="Estrangelo Edessa"/>
+        <a:font script="Syrj" typeface="Estrangelo Edessa"/>
+        <a:font script="Syre" typeface="Estrangelo Edessa"/>
+        <a:font script="Sora" typeface="Nirmala UI"/>
+        <a:font script="Tale" typeface="Microsoft Tai Le"/>
+        <a:font script="Talu" typeface="Microsoft New Tai Lue"/>
+        <a:font script="Tfng" typeface="Ebrima"/>
       </a:minorFont>
     </a:fontScheme>
     <a:fmtScheme name="Office">
@@ -8857,180 +8790,136 @@
           <a:gsLst>
             <a:gs pos="0">
               <a:schemeClr val="phClr">
-                <a:tint val="50000"/>
-                <a:satMod val="300000"/>
+                <a:lumMod val="110000"/>
+                <a:satMod val="105000"/>
+                <a:tint val="67000"/>
               </a:schemeClr>
             </a:gs>
-            <a:gs pos="35000">
+            <a:gs pos="50000">
               <a:schemeClr val="phClr">
-                <a:tint val="37000"/>
-                <a:satMod val="300000"/>
+                <a:lumMod val="105000"/>
+                <a:satMod val="103000"/>
+                <a:tint val="73000"/>
               </a:schemeClr>
             </a:gs>
             <a:gs pos="100000">
               <a:schemeClr val="phClr">
-                <a:tint val="15000"/>
-                <a:satMod val="350000"/>
+                <a:lumMod val="105000"/>
+                <a:satMod val="109000"/>
+                <a:tint val="81000"/>
               </a:schemeClr>
             </a:gs>
           </a:gsLst>
-          <a:lin ang="16200000" scaled="1"/>
+          <a:lin ang="5400000" scaled="0"/>
         </a:gradFill>
         <a:gradFill rotWithShape="1">
           <a:gsLst>
             <a:gs pos="0">
               <a:schemeClr val="phClr">
-                <a:tint val="100000"/>
+                <a:satMod val="103000"/>
+                <a:lumMod val="102000"/>
+                <a:tint val="94000"/>
+              </a:schemeClr>
+            </a:gs>
+            <a:gs pos="50000">
+              <a:schemeClr val="phClr">
+                <a:satMod val="110000"/>
+                <a:lumMod val="100000"/>
                 <a:shade val="100000"/>
-                <a:satMod val="130000"/>
               </a:schemeClr>
             </a:gs>
             <a:gs pos="100000">
               <a:schemeClr val="phClr">
-                <a:tint val="50000"/>
-                <a:shade val="100000"/>
-                <a:satMod val="350000"/>
+                <a:lumMod val="99000"/>
+                <a:satMod val="120000"/>
+                <a:shade val="78000"/>
               </a:schemeClr>
             </a:gs>
           </a:gsLst>
-          <a:lin ang="16200000" scaled="0"/>
+          <a:lin ang="5400000" scaled="0"/>
         </a:gradFill>
       </a:fillStyleLst>
       <a:lnStyleLst>
-        <a:ln w="9525" cap="flat" cmpd="sng" algn="ctr">
+        <a:ln w="12700" cap="flat" cmpd="sng" algn="ctr">
           <a:solidFill>
-            <a:schemeClr val="phClr">
-              <a:shade val="95000"/>
-              <a:satMod val="105000"/>
-            </a:schemeClr>
+            <a:schemeClr val="phClr"/>
           </a:solidFill>
           <a:prstDash val="solid"/>
+          <a:miter lim="800000"/>
+        </a:ln>
+        <a:ln w="19050" cap="flat" cmpd="sng" algn="ctr">
+          <a:solidFill>
+            <a:schemeClr val="phClr"/>
+          </a:solidFill>
+          <a:prstDash val="solid"/>
+          <a:miter lim="800000"/>
         </a:ln>
         <a:ln w="25400" cap="flat" cmpd="sng" algn="ctr">
           <a:solidFill>
             <a:schemeClr val="phClr"/>
           </a:solidFill>
           <a:prstDash val="solid"/>
-        </a:ln>
-        <a:ln w="38100" cap="flat" cmpd="sng" algn="ctr">
-          <a:solidFill>
-            <a:schemeClr val="phClr"/>
-          </a:solidFill>
-          <a:prstDash val="solid"/>
+          <a:miter lim="800000"/>
         </a:ln>
       </a:lnStyleLst>
       <a:effectStyleLst>
         <a:effectStyle>
+          <a:effectLst/>
+        </a:effectStyle>
+        <a:effectStyle>
+          <a:effectLst/>
+        </a:effectStyle>
+        <a:effectStyle>
           <a:effectLst>
-            <a:outerShdw blurRad="40000" dist="20000" dir="5400000" rotWithShape="0">
+            <a:outerShdw blurRad="57150" dist="19050" dir="5400000" algn="ctr" rotWithShape="0">
               <a:srgbClr val="000000">
-                <a:alpha val="38000"/>
+                <a:alpha val="63000"/>
               </a:srgbClr>
             </a:outerShdw>
           </a:effectLst>
-        </a:effectStyle>
-        <a:effectStyle>
-          <a:effectLst>
-            <a:outerShdw blurRad="40000" dist="23000" dir="5400000" rotWithShape="0">
-              <a:srgbClr val="000000">
-                <a:alpha val="35000"/>
-              </a:srgbClr>
-            </a:outerShdw>
-          </a:effectLst>
-        </a:effectStyle>
-        <a:effectStyle>
-          <a:effectLst>
-            <a:outerShdw blurRad="40000" dist="23000" dir="5400000" rotWithShape="0">
-              <a:srgbClr val="000000">
-                <a:alpha val="35000"/>
-              </a:srgbClr>
-            </a:outerShdw>
-          </a:effectLst>
-          <a:scene3d>
-            <a:camera prst="orthographicFront">
-              <a:rot lat="0" lon="0" rev="0"/>
-            </a:camera>
-            <a:lightRig rig="threePt" dir="t">
-              <a:rot lat="0" lon="0" rev="1200000"/>
-            </a:lightRig>
-          </a:scene3d>
-          <a:sp3d>
-            <a:bevelT w="63500" h="25400"/>
-          </a:sp3d>
         </a:effectStyle>
       </a:effectStyleLst>
       <a:bgFillStyleLst>
         <a:solidFill>
           <a:schemeClr val="phClr"/>
         </a:solidFill>
+        <a:solidFill>
+          <a:schemeClr val="phClr">
+            <a:tint val="95000"/>
+            <a:satMod val="170000"/>
+          </a:schemeClr>
+        </a:solidFill>
         <a:gradFill rotWithShape="1">
           <a:gsLst>
             <a:gs pos="0">
               <a:schemeClr val="phClr">
-                <a:tint val="40000"/>
-                <a:satMod val="350000"/>
+                <a:tint val="93000"/>
+                <a:satMod val="150000"/>
+                <a:shade val="98000"/>
+                <a:lumMod val="102000"/>
               </a:schemeClr>
             </a:gs>
-            <a:gs pos="40000">
+            <a:gs pos="50000">
               <a:schemeClr val="phClr">
-                <a:tint val="45000"/>
-                <a:shade val="99000"/>
-                <a:satMod val="350000"/>
+                <a:tint val="98000"/>
+                <a:satMod val="130000"/>
+                <a:shade val="90000"/>
+                <a:lumMod val="103000"/>
               </a:schemeClr>
             </a:gs>
             <a:gs pos="100000">
               <a:schemeClr val="phClr">
-                <a:shade val="20000"/>
-                <a:satMod val="255000"/>
+                <a:shade val="63000"/>
+                <a:satMod val="120000"/>
               </a:schemeClr>
             </a:gs>
           </a:gsLst>
-          <a:path path="circle">
-            <a:fillToRect l="50000" t="-80000" r="50000" b="180000"/>
-          </a:path>
-        </a:gradFill>
-        <a:gradFill rotWithShape="1">
-          <a:gsLst>
-            <a:gs pos="0">
-              <a:schemeClr val="phClr">
-                <a:tint val="80000"/>
-                <a:satMod val="300000"/>
-              </a:schemeClr>
-            </a:gs>
-            <a:gs pos="100000">
-              <a:schemeClr val="phClr">
-                <a:shade val="30000"/>
-                <a:satMod val="200000"/>
-              </a:schemeClr>
-            </a:gs>
-          </a:gsLst>
-          <a:path path="circle">
-            <a:fillToRect l="50000" t="50000" r="50000" b="50000"/>
-          </a:path>
+          <a:lin ang="5400000" scaled="0"/>
         </a:gradFill>
       </a:bgFillStyleLst>
     </a:fmtScheme>
   </a:themeElements>
   <a:objectDefaults>
-    <a:spDef>
-      <a:spPr/>
-      <a:bodyPr/>
-      <a:lstStyle/>
-      <a:style>
-        <a:lnRef idx="1">
-          <a:schemeClr val="accent1"/>
-        </a:lnRef>
-        <a:fillRef idx="3">
-          <a:schemeClr val="accent1"/>
-        </a:fillRef>
-        <a:effectRef idx="2">
-          <a:schemeClr val="accent1"/>
-        </a:effectRef>
-        <a:fontRef idx="minor">
-          <a:schemeClr val="lt1"/>
-        </a:fontRef>
-      </a:style>
-    </a:spDef>
     <a:lnDef>
       <a:spPr/>
       <a:bodyPr/>
@@ -9052,5 +8941,10 @@
     </a:lnDef>
   </a:objectDefaults>
   <a:extraClrSchemeLst/>
+  <a:extLst>
+    <a:ext uri="{05A4C25C-085E-4340-85A3-A5531E510DB2}">
+      <thm15:themeFamily xmlns:thm15="http://schemas.microsoft.com/office/thememl/2012/main" name="Office Theme" id="{2E142A2C-CD16-42D6-873A-C26D2A0506FA}" vid="{1BDDFF52-6CD6-40A5-AB3C-68EB2F1E4D0A}"/>
+    </a:ext>
+  </a:extLst>
 </a:theme>
 </file>
--- a/video_slides.pptx
+++ b/video_slides.pptx
@@ -4,21 +4,18 @@
   <p:sldMasterIdLst>
     <p:sldMasterId id="2147483648" r:id="rId1"/>
   </p:sldMasterIdLst>
-  <p:notesMasterIdLst>
-    <p:notesMasterId r:id="rId11"/>
-  </p:notesMasterIdLst>
   <p:sldIdLst>
-    <p:sldId id="256" r:id="rId2"/>
-    <p:sldId id="257" r:id="rId3"/>
-    <p:sldId id="258" r:id="rId4"/>
-    <p:sldId id="259" r:id="rId5"/>
-    <p:sldId id="260" r:id="rId6"/>
-    <p:sldId id="261" r:id="rId7"/>
-    <p:sldId id="262" r:id="rId8"/>
-    <p:sldId id="263" r:id="rId9"/>
-    <p:sldId id="264" r:id="rId10"/>
+    <p:sldId id="256" r:id="rId7"/>
+    <p:sldId id="257" r:id="rId9"/>
+    <p:sldId id="258" r:id="rId10"/>
+    <p:sldId id="259" r:id="rId11"/>
+    <p:sldId id="260" r:id="rId12"/>
+    <p:sldId id="261" r:id="rId13"/>
+    <p:sldId id="262" r:id="rId14"/>
+    <p:sldId id="263" r:id="rId15"/>
+    <p:sldId id="264" r:id="rId16"/>
   </p:sldIdLst>
-  <p:sldSz cx="12192000" cy="6858000"/>
+  <p:sldSz cx="12191695" cy="6858000" type="screen4x3"/>
   <p:notesSz cx="6858000" cy="9144000"/>
   <p:defaultTextStyle>
     <a:defPPr>
@@ -115,27 +112,11 @@
       </a:defRPr>
     </a:lvl9pPr>
   </p:defaultTextStyle>
-  <p:extLst>
-    <p:ext uri="{EFAFB233-063F-42B5-8137-9DF3F51BA10A}">
-      <p15:sldGuideLst xmlns:p15="http://schemas.microsoft.com/office/powerpoint/2012/main">
-        <p15:guide id="1" orient="horz" pos="2160">
-          <p15:clr>
-            <a:srgbClr val="A4A3A4"/>
-          </p15:clr>
-        </p15:guide>
-        <p15:guide id="2" pos="2880">
-          <p15:clr>
-            <a:srgbClr val="A4A3A4"/>
-          </p15:clr>
-        </p15:guide>
-      </p15:sldGuideLst>
-    </p:ext>
-  </p:extLst>
 </p:presentation>
 </file>
 
 <file path=ppt/notesMasters/notesMaster1.xml><?xml version="1.0" encoding="utf-8"?>
-<p:notesMaster xmlns:a="http://schemas.openxmlformats.org/drawingml/2006/main" xmlns:r="http://schemas.openxmlformats.org/officeDocument/2006/relationships" xmlns:p="http://schemas.openxmlformats.org/presentationml/2006/main">
+<p:notesMaster xmlns:a="http://schemas.openxmlformats.org/drawingml/2006/main" xmlns:p="http://schemas.openxmlformats.org/presentationml/2006/main" xmlns:r="http://schemas.openxmlformats.org/officeDocument/2006/relationships">
   <p:cSld>
     <p:bg>
       <p:bgRef idx="1001">
@@ -156,16 +137,241 @@
           <a:chExt cx="0" cy="0"/>
         </a:xfrm>
       </p:grpSpPr>
+      <p:sp>
+        <p:nvSpPr>
+          <p:cNvPr id="2" name="Header Placeholder 1"/>
+          <p:cNvSpPr>
+            <a:spLocks noGrp="1"/>
+          </p:cNvSpPr>
+          <p:nvPr>
+            <p:ph type="hdr" sz="quarter"/>
+          </p:nvPr>
+        </p:nvSpPr>
+        <p:spPr>
+          <a:xfrm>
+            <a:off x="0" y="0"/>
+            <a:ext cx="2971800" cy="457200"/>
+          </a:xfrm>
+          <a:prstGeom prst="rect">
+            <a:avLst/>
+          </a:prstGeom>
+        </p:spPr>
+        <p:txBody>
+          <a:bodyPr vert="horz" lIns="91440" tIns="45720" rIns="91440" bIns="45720" rtlCol="0"/>
+          <a:lstStyle>
+            <a:lvl1pPr algn="l">
+              <a:defRPr sz="1200"/>
+            </a:lvl1pPr>
+          </a:lstStyle>
+          <a:p>
+            <a:endParaRPr lang="en-US"/>
+          </a:p>
+        </p:txBody>
+      </p:sp>
+      <p:sp>
+        <p:nvSpPr>
+          <p:cNvPr id="3" name="Date Placeholder 2"/>
+          <p:cNvSpPr>
+            <a:spLocks noGrp="1"/>
+          </p:cNvSpPr>
+          <p:nvPr>
+            <p:ph type="dt" idx="1"/>
+          </p:nvPr>
+        </p:nvSpPr>
+        <p:spPr>
+          <a:xfrm>
+            <a:off x="3884613" y="0"/>
+            <a:ext cx="2971800" cy="457200"/>
+          </a:xfrm>
+          <a:prstGeom prst="rect">
+            <a:avLst/>
+          </a:prstGeom>
+        </p:spPr>
+        <p:txBody>
+          <a:bodyPr vert="horz" lIns="91440" tIns="45720" rIns="91440" bIns="45720" rtlCol="0"/>
+          <a:lstStyle>
+            <a:lvl1pPr algn="r">
+              <a:defRPr sz="1200"/>
+            </a:lvl1pPr>
+          </a:lstStyle>
+          <a:p>
+            <a:fld id="{0F89C1C7-3DCD-1040-A9CF-14679D8B5DDD}" type="datetimeFigureOut">
+              <a:rPr lang="en-US" smtClean="0"/>
+              <a:t>10/17/16</a:t>
+            </a:fld>
+            <a:endParaRPr lang="en-US"/>
+          </a:p>
+        </p:txBody>
+      </p:sp>
+      <p:sp>
+        <p:nvSpPr>
+          <p:cNvPr id="4" name="Slide Image Placeholder 3"/>
+          <p:cNvSpPr>
+            <a:spLocks noGrp="1" noRot="1" noChangeAspect="1"/>
+          </p:cNvSpPr>
+          <p:nvPr>
+            <p:ph type="sldImg" idx="2"/>
+          </p:nvPr>
+        </p:nvSpPr>
+        <p:spPr>
+          <a:xfrm>
+            <a:off x="1143000" y="685800"/>
+            <a:ext cx="4572000" cy="3429000"/>
+          </a:xfrm>
+          <a:prstGeom prst="rect">
+            <a:avLst/>
+          </a:prstGeom>
+          <a:noFill/>
+          <a:ln w="12700">
+            <a:solidFill>
+              <a:prstClr val="black"/>
+            </a:solidFill>
+          </a:ln>
+        </p:spPr>
+        <p:txBody>
+          <a:bodyPr vert="horz" lIns="91440" tIns="45720" rIns="91440" bIns="45720" rtlCol="0" anchor="ctr"/>
+          <a:lstStyle/>
+          <a:p>
+            <a:endParaRPr lang="en-US"/>
+          </a:p>
+        </p:txBody>
+      </p:sp>
+      <p:sp>
+        <p:nvSpPr>
+          <p:cNvPr id="5" name="Notes Placeholder 4"/>
+          <p:cNvSpPr>
+            <a:spLocks noGrp="1"/>
+          </p:cNvSpPr>
+          <p:nvPr>
+            <p:ph type="body" sz="quarter" idx="3"/>
+          </p:nvPr>
+        </p:nvSpPr>
+        <p:spPr>
+          <a:xfrm>
+            <a:off x="685800" y="4343400"/>
+            <a:ext cx="5486400" cy="4114800"/>
+          </a:xfrm>
+          <a:prstGeom prst="rect">
+            <a:avLst/>
+          </a:prstGeom>
+        </p:spPr>
+        <p:txBody>
+          <a:bodyPr vert="horz" lIns="91440" tIns="45720" rIns="91440" bIns="45720" rtlCol="0"/>
+          <a:lstStyle/>
+          <a:p>
+            <a:pPr lvl="0"/>
+            <a:r>
+              <a:rPr lang="en-US" smtClean="0"/>
+              <a:t>Click to edit Master text styles</a:t>
+            </a:r>
+          </a:p>
+          <a:p>
+            <a:pPr lvl="1"/>
+            <a:r>
+              <a:rPr lang="en-US" smtClean="0"/>
+              <a:t>Second level</a:t>
+            </a:r>
+          </a:p>
+          <a:p>
+            <a:pPr lvl="2"/>
+            <a:r>
+              <a:rPr lang="en-US" smtClean="0"/>
+              <a:t>Third level</a:t>
+            </a:r>
+          </a:p>
+          <a:p>
+            <a:pPr lvl="3"/>
+            <a:r>
+              <a:rPr lang="en-US" smtClean="0"/>
+              <a:t>Fourth level</a:t>
+            </a:r>
+          </a:p>
+          <a:p>
+            <a:pPr lvl="4"/>
+            <a:r>
+              <a:rPr lang="en-US" smtClean="0"/>
+              <a:t>Fifth level</a:t>
+            </a:r>
+            <a:endParaRPr lang="en-US"/>
+          </a:p>
+        </p:txBody>
+      </p:sp>
+      <p:sp>
+        <p:nvSpPr>
+          <p:cNvPr id="6" name="Footer Placeholder 5"/>
+          <p:cNvSpPr>
+            <a:spLocks noGrp="1"/>
+          </p:cNvSpPr>
+          <p:nvPr>
+            <p:ph type="ftr" sz="quarter" idx="4"/>
+          </p:nvPr>
+        </p:nvSpPr>
+        <p:spPr>
+          <a:xfrm>
+            <a:off x="0" y="8685213"/>
+            <a:ext cx="2971800" cy="457200"/>
+          </a:xfrm>
+          <a:prstGeom prst="rect">
+            <a:avLst/>
+          </a:prstGeom>
+        </p:spPr>
+        <p:txBody>
+          <a:bodyPr vert="horz" lIns="91440" tIns="45720" rIns="91440" bIns="45720" rtlCol="0" anchor="b"/>
+          <a:lstStyle>
+            <a:lvl1pPr algn="l">
+              <a:defRPr sz="1200"/>
+            </a:lvl1pPr>
+          </a:lstStyle>
+          <a:p>
+            <a:endParaRPr lang="en-US"/>
+          </a:p>
+        </p:txBody>
+      </p:sp>
+      <p:sp>
+        <p:nvSpPr>
+          <p:cNvPr id="7" name="Slide Number Placeholder 6"/>
+          <p:cNvSpPr>
+            <a:spLocks noGrp="1"/>
+          </p:cNvSpPr>
+          <p:nvPr>
+            <p:ph type="sldNum" sz="quarter" idx="5"/>
+          </p:nvPr>
+        </p:nvSpPr>
+        <p:spPr>
+          <a:xfrm>
+            <a:off x="3884613" y="8685213"/>
+            <a:ext cx="2971800" cy="457200"/>
+          </a:xfrm>
+          <a:prstGeom prst="rect">
+            <a:avLst/>
+          </a:prstGeom>
+        </p:spPr>
+        <p:txBody>
+          <a:bodyPr vert="horz" lIns="91440" tIns="45720" rIns="91440" bIns="45720" rtlCol="0" anchor="b"/>
+          <a:lstStyle>
+            <a:lvl1pPr algn="r">
+              <a:defRPr sz="1200"/>
+            </a:lvl1pPr>
+          </a:lstStyle>
+          <a:p>
+            <a:fld id="{BB5E49A5-4136-284D-997B-48E1D791AD67}" type="slidenum">
+              <a:rPr lang="en-US" smtClean="0"/>
+              <a:t>‹#›</a:t>
+            </a:fld>
+            <a:endParaRPr lang="en-US"/>
+          </a:p>
+        </p:txBody>
+      </p:sp>
     </p:spTree>
     <p:extLst>
       <p:ext uri="{BB962C8B-B14F-4D97-AF65-F5344CB8AC3E}">
-        <p14:creationId xmlns:p14="http://schemas.microsoft.com/office/powerpoint/2010/main" val="2956616574"/>
+        <p14:creationId xmlns:p14="http://schemas.microsoft.com/office/powerpoint/2010/main" val="2623252185"/>
       </p:ext>
     </p:extLst>
   </p:cSld>
   <p:clrMap bg1="lt1" tx1="dk1" bg2="lt2" tx2="dk2" accent1="accent1" accent2="accent2" accent3="accent3" accent4="accent4" accent5="accent5" accent6="accent6" hlink="hlink" folHlink="folHlink"/>
   <p:notesStyle>
-    <a:lvl1pPr marL="0" algn="l" defTabSz="914400" rtl="0" eaLnBrk="1" latinLnBrk="0" hangingPunct="1">
+    <a:lvl1pPr marL="0" algn="l" defTabSz="457200" rtl="0" eaLnBrk="1" latinLnBrk="0" hangingPunct="1">
       <a:defRPr sz="1200" kern="1200">
         <a:solidFill>
           <a:schemeClr val="tx1"/>
@@ -175,7 +381,7 @@
         <a:cs typeface="+mn-cs"/>
       </a:defRPr>
     </a:lvl1pPr>
-    <a:lvl2pPr marL="457200" algn="l" defTabSz="914400" rtl="0" eaLnBrk="1" latinLnBrk="0" hangingPunct="1">
+    <a:lvl2pPr marL="457200" algn="l" defTabSz="457200" rtl="0" eaLnBrk="1" latinLnBrk="0" hangingPunct="1">
       <a:defRPr sz="1200" kern="1200">
         <a:solidFill>
           <a:schemeClr val="tx1"/>
@@ -185,7 +391,7 @@
         <a:cs typeface="+mn-cs"/>
       </a:defRPr>
     </a:lvl2pPr>
-    <a:lvl3pPr marL="914400" algn="l" defTabSz="914400" rtl="0" eaLnBrk="1" latinLnBrk="0" hangingPunct="1">
+    <a:lvl3pPr marL="914400" algn="l" defTabSz="457200" rtl="0" eaLnBrk="1" latinLnBrk="0" hangingPunct="1">
       <a:defRPr sz="1200" kern="1200">
         <a:solidFill>
           <a:schemeClr val="tx1"/>
@@ -195,7 +401,7 @@
         <a:cs typeface="+mn-cs"/>
       </a:defRPr>
     </a:lvl3pPr>
-    <a:lvl4pPr marL="1371600" algn="l" defTabSz="914400" rtl="0" eaLnBrk="1" latinLnBrk="0" hangingPunct="1">
+    <a:lvl4pPr marL="1371600" algn="l" defTabSz="457200" rtl="0" eaLnBrk="1" latinLnBrk="0" hangingPunct="1">
       <a:defRPr sz="1200" kern="1200">
         <a:solidFill>
           <a:schemeClr val="tx1"/>
@@ -205,7 +411,7 @@
         <a:cs typeface="+mn-cs"/>
       </a:defRPr>
     </a:lvl4pPr>
-    <a:lvl5pPr marL="1828800" algn="l" defTabSz="914400" rtl="0" eaLnBrk="1" latinLnBrk="0" hangingPunct="1">
+    <a:lvl5pPr marL="1828800" algn="l" defTabSz="457200" rtl="0" eaLnBrk="1" latinLnBrk="0" hangingPunct="1">
       <a:defRPr sz="1200" kern="1200">
         <a:solidFill>
           <a:schemeClr val="tx1"/>
@@ -215,7 +421,7 @@
         <a:cs typeface="+mn-cs"/>
       </a:defRPr>
     </a:lvl5pPr>
-    <a:lvl6pPr marL="2286000" algn="l" defTabSz="914400" rtl="0" eaLnBrk="1" latinLnBrk="0" hangingPunct="1">
+    <a:lvl6pPr marL="2286000" algn="l" defTabSz="457200" rtl="0" eaLnBrk="1" latinLnBrk="0" hangingPunct="1">
       <a:defRPr sz="1200" kern="1200">
         <a:solidFill>
           <a:schemeClr val="tx1"/>
@@ -225,7 +431,7 @@
         <a:cs typeface="+mn-cs"/>
       </a:defRPr>
     </a:lvl6pPr>
-    <a:lvl7pPr marL="2743200" algn="l" defTabSz="914400" rtl="0" eaLnBrk="1" latinLnBrk="0" hangingPunct="1">
+    <a:lvl7pPr marL="2743200" algn="l" defTabSz="457200" rtl="0" eaLnBrk="1" latinLnBrk="0" hangingPunct="1">
       <a:defRPr sz="1200" kern="1200">
         <a:solidFill>
           <a:schemeClr val="tx1"/>
@@ -235,7 +441,7 @@
         <a:cs typeface="+mn-cs"/>
       </a:defRPr>
     </a:lvl7pPr>
-    <a:lvl8pPr marL="3200400" algn="l" defTabSz="914400" rtl="0" eaLnBrk="1" latinLnBrk="0" hangingPunct="1">
+    <a:lvl8pPr marL="3200400" algn="l" defTabSz="457200" rtl="0" eaLnBrk="1" latinLnBrk="0" hangingPunct="1">
       <a:defRPr sz="1200" kern="1200">
         <a:solidFill>
           <a:schemeClr val="tx1"/>
@@ -245,7 +451,7 @@
         <a:cs typeface="+mn-cs"/>
       </a:defRPr>
     </a:lvl8pPr>
-    <a:lvl9pPr marL="3657600" algn="l" defTabSz="914400" rtl="0" eaLnBrk="1" latinLnBrk="0" hangingPunct="1">
+    <a:lvl9pPr marL="3657600" algn="l" defTabSz="457200" rtl="0" eaLnBrk="1" latinLnBrk="0" hangingPunct="1">
       <a:defRPr sz="1200" kern="1200">
         <a:solidFill>
           <a:schemeClr val="tx1"/>
@@ -260,7 +466,7 @@
 </file>
 
 <file path=ppt/notesSlides/notesSlide1.xml><?xml version="1.0" encoding="utf-8"?>
-<p:notes xmlns:a="http://schemas.openxmlformats.org/drawingml/2006/main" xmlns:r="http://schemas.openxmlformats.org/officeDocument/2006/relationships" xmlns:p="http://schemas.openxmlformats.org/presentationml/2006/main">
+<p:notes xmlns:a="http://schemas.openxmlformats.org/drawingml/2006/main" xmlns:p="http://schemas.openxmlformats.org/presentationml/2006/main" xmlns:r="http://schemas.openxmlformats.org/officeDocument/2006/relationships">
   <p:cSld>
     <p:spTree>
       <p:nvGrpSpPr>
@@ -280,7 +486,7 @@
         <p:nvSpPr>
           <p:cNvPr id="2" name="Slide Image Placeholder 1"/>
           <p:cNvSpPr>
-            <a:spLocks noGrp="1" noRot="1" noChangeAspect="1"/>
+            <a:spLocks noGrp="1"/>
           </p:cNvSpPr>
           <p:nvPr>
             <p:ph type="sldImg" idx="2"/>
@@ -295,7 +501,7 @@
             <a:spLocks noGrp="1"/>
           </p:cNvSpPr>
           <p:nvPr>
-            <p:ph type="body" sz="quarter" idx="3"/>
+            <p:ph type="body" idx="3" sz="quarter"/>
           </p:nvPr>
         </p:nvSpPr>
         <p:spPr/>
@@ -316,7 +522,7 @@
             <a:spLocks noGrp="1"/>
           </p:cNvSpPr>
           <p:nvPr>
-            <p:ph type="sldNum" sz="quarter" idx="5"/>
+            <p:ph type="sldNum" idx="5" sz="quarter"/>
           </p:nvPr>
         </p:nvSpPr>
         <p:spPr/>
@@ -330,7 +536,7 @@
 </file>
 
 <file path=ppt/notesSlides/notesSlide2.xml><?xml version="1.0" encoding="utf-8"?>
-<p:notes xmlns:a="http://schemas.openxmlformats.org/drawingml/2006/main" xmlns:r="http://schemas.openxmlformats.org/officeDocument/2006/relationships" xmlns:p="http://schemas.openxmlformats.org/presentationml/2006/main">
+<p:notes xmlns:a="http://schemas.openxmlformats.org/drawingml/2006/main" xmlns:p="http://schemas.openxmlformats.org/presentationml/2006/main" xmlns:r="http://schemas.openxmlformats.org/officeDocument/2006/relationships">
   <p:cSld>
     <p:spTree>
       <p:nvGrpSpPr>
@@ -350,7 +556,7 @@
         <p:nvSpPr>
           <p:cNvPr id="2" name="Slide Image Placeholder 1"/>
           <p:cNvSpPr>
-            <a:spLocks noGrp="1" noRot="1" noChangeAspect="1"/>
+            <a:spLocks noGrp="1"/>
           </p:cNvSpPr>
           <p:nvPr>
             <p:ph type="sldImg" idx="2"/>
@@ -365,7 +571,7 @@
             <a:spLocks noGrp="1"/>
           </p:cNvSpPr>
           <p:nvPr>
-            <p:ph type="body" sz="quarter" idx="3"/>
+            <p:ph type="body" idx="3" sz="quarter"/>
           </p:nvPr>
         </p:nvSpPr>
         <p:spPr/>
@@ -386,7 +592,7 @@
             <a:spLocks noGrp="1"/>
           </p:cNvSpPr>
           <p:nvPr>
-            <p:ph type="sldNum" sz="quarter" idx="5"/>
+            <p:ph type="sldNum" idx="5" sz="quarter"/>
           </p:nvPr>
         </p:nvSpPr>
         <p:spPr/>
@@ -400,7 +606,7 @@
 </file>
 
 <file path=ppt/notesSlides/notesSlide3.xml><?xml version="1.0" encoding="utf-8"?>
-<p:notes xmlns:a="http://schemas.openxmlformats.org/drawingml/2006/main" xmlns:r="http://schemas.openxmlformats.org/officeDocument/2006/relationships" xmlns:p="http://schemas.openxmlformats.org/presentationml/2006/main">
+<p:notes xmlns:a="http://schemas.openxmlformats.org/drawingml/2006/main" xmlns:p="http://schemas.openxmlformats.org/presentationml/2006/main" xmlns:r="http://schemas.openxmlformats.org/officeDocument/2006/relationships">
   <p:cSld>
     <p:spTree>
       <p:nvGrpSpPr>
@@ -420,7 +626,7 @@
         <p:nvSpPr>
           <p:cNvPr id="2" name="Slide Image Placeholder 1"/>
           <p:cNvSpPr>
-            <a:spLocks noGrp="1" noRot="1" noChangeAspect="1"/>
+            <a:spLocks noGrp="1"/>
           </p:cNvSpPr>
           <p:nvPr>
             <p:ph type="sldImg" idx="2"/>
@@ -435,7 +641,7 @@
             <a:spLocks noGrp="1"/>
           </p:cNvSpPr>
           <p:nvPr>
-            <p:ph type="body" sz="quarter" idx="3"/>
+            <p:ph type="body" idx="3" sz="quarter"/>
           </p:nvPr>
         </p:nvSpPr>
         <p:spPr/>
@@ -456,7 +662,7 @@
             <a:spLocks noGrp="1"/>
           </p:cNvSpPr>
           <p:nvPr>
-            <p:ph type="sldNum" sz="quarter" idx="5"/>
+            <p:ph type="sldNum" idx="5" sz="quarter"/>
           </p:nvPr>
         </p:nvSpPr>
         <p:spPr/>
@@ -470,7 +676,7 @@
 </file>
 
 <file path=ppt/notesSlides/notesSlide4.xml><?xml version="1.0" encoding="utf-8"?>
-<p:notes xmlns:a="http://schemas.openxmlformats.org/drawingml/2006/main" xmlns:r="http://schemas.openxmlformats.org/officeDocument/2006/relationships" xmlns:p="http://schemas.openxmlformats.org/presentationml/2006/main">
+<p:notes xmlns:a="http://schemas.openxmlformats.org/drawingml/2006/main" xmlns:p="http://schemas.openxmlformats.org/presentationml/2006/main" xmlns:r="http://schemas.openxmlformats.org/officeDocument/2006/relationships">
   <p:cSld>
     <p:spTree>
       <p:nvGrpSpPr>
@@ -490,7 +696,7 @@
         <p:nvSpPr>
           <p:cNvPr id="2" name="Slide Image Placeholder 1"/>
           <p:cNvSpPr>
-            <a:spLocks noGrp="1" noRot="1" noChangeAspect="1"/>
+            <a:spLocks noGrp="1"/>
           </p:cNvSpPr>
           <p:nvPr>
             <p:ph type="sldImg" idx="2"/>
@@ -505,7 +711,7 @@
             <a:spLocks noGrp="1"/>
           </p:cNvSpPr>
           <p:nvPr>
-            <p:ph type="body" sz="quarter" idx="3"/>
+            <p:ph type="body" idx="3" sz="quarter"/>
           </p:nvPr>
         </p:nvSpPr>
         <p:spPr/>
@@ -526,7 +732,7 @@
             <a:spLocks noGrp="1"/>
           </p:cNvSpPr>
           <p:nvPr>
-            <p:ph type="sldNum" sz="quarter" idx="5"/>
+            <p:ph type="sldNum" idx="5" sz="quarter"/>
           </p:nvPr>
         </p:nvSpPr>
         <p:spPr/>
@@ -540,7 +746,7 @@
 </file>
 
 <file path=ppt/notesSlides/notesSlide5.xml><?xml version="1.0" encoding="utf-8"?>
-<p:notes xmlns:a="http://schemas.openxmlformats.org/drawingml/2006/main" xmlns:r="http://schemas.openxmlformats.org/officeDocument/2006/relationships" xmlns:p="http://schemas.openxmlformats.org/presentationml/2006/main">
+<p:notes xmlns:a="http://schemas.openxmlformats.org/drawingml/2006/main" xmlns:p="http://schemas.openxmlformats.org/presentationml/2006/main" xmlns:r="http://schemas.openxmlformats.org/officeDocument/2006/relationships">
   <p:cSld>
     <p:spTree>
       <p:nvGrpSpPr>
@@ -560,7 +766,7 @@
         <p:nvSpPr>
           <p:cNvPr id="2" name="Slide Image Placeholder 1"/>
           <p:cNvSpPr>
-            <a:spLocks noGrp="1" noRot="1" noChangeAspect="1"/>
+            <a:spLocks noGrp="1"/>
           </p:cNvSpPr>
           <p:nvPr>
             <p:ph type="sldImg" idx="2"/>
@@ -575,7 +781,7 @@
             <a:spLocks noGrp="1"/>
           </p:cNvSpPr>
           <p:nvPr>
-            <p:ph type="body" sz="quarter" idx="3"/>
+            <p:ph type="body" idx="3" sz="quarter"/>
           </p:nvPr>
         </p:nvSpPr>
         <p:spPr/>
@@ -596,7 +802,7 @@
             <a:spLocks noGrp="1"/>
           </p:cNvSpPr>
           <p:nvPr>
-            <p:ph type="sldNum" sz="quarter" idx="5"/>
+            <p:ph type="sldNum" idx="5" sz="quarter"/>
           </p:nvPr>
         </p:nvSpPr>
         <p:spPr/>
@@ -610,7 +816,7 @@
 </file>
 
 <file path=ppt/notesSlides/notesSlide6.xml><?xml version="1.0" encoding="utf-8"?>
-<p:notes xmlns:a="http://schemas.openxmlformats.org/drawingml/2006/main" xmlns:r="http://schemas.openxmlformats.org/officeDocument/2006/relationships" xmlns:p="http://schemas.openxmlformats.org/presentationml/2006/main">
+<p:notes xmlns:a="http://schemas.openxmlformats.org/drawingml/2006/main" xmlns:p="http://schemas.openxmlformats.org/presentationml/2006/main" xmlns:r="http://schemas.openxmlformats.org/officeDocument/2006/relationships">
   <p:cSld>
     <p:spTree>
       <p:nvGrpSpPr>
@@ -630,7 +836,7 @@
         <p:nvSpPr>
           <p:cNvPr id="2" name="Slide Image Placeholder 1"/>
           <p:cNvSpPr>
-            <a:spLocks noGrp="1" noRot="1" noChangeAspect="1"/>
+            <a:spLocks noGrp="1"/>
           </p:cNvSpPr>
           <p:nvPr>
             <p:ph type="sldImg" idx="2"/>
@@ -645,7 +851,7 @@
             <a:spLocks noGrp="1"/>
           </p:cNvSpPr>
           <p:nvPr>
-            <p:ph type="body" sz="quarter" idx="3"/>
+            <p:ph type="body" idx="3" sz="quarter"/>
           </p:nvPr>
         </p:nvSpPr>
         <p:spPr/>
@@ -666,7 +872,7 @@
             <a:spLocks noGrp="1"/>
           </p:cNvSpPr>
           <p:nvPr>
-            <p:ph type="sldNum" sz="quarter" idx="5"/>
+            <p:ph type="sldNum" idx="5" sz="quarter"/>
           </p:nvPr>
         </p:nvSpPr>
         <p:spPr/>
@@ -680,7 +886,7 @@
 </file>
 
 <file path=ppt/notesSlides/notesSlide7.xml><?xml version="1.0" encoding="utf-8"?>
-<p:notes xmlns:a="http://schemas.openxmlformats.org/drawingml/2006/main" xmlns:r="http://schemas.openxmlformats.org/officeDocument/2006/relationships" xmlns:p="http://schemas.openxmlformats.org/presentationml/2006/main">
+<p:notes xmlns:a="http://schemas.openxmlformats.org/drawingml/2006/main" xmlns:p="http://schemas.openxmlformats.org/presentationml/2006/main" xmlns:r="http://schemas.openxmlformats.org/officeDocument/2006/relationships">
   <p:cSld>
     <p:spTree>
       <p:nvGrpSpPr>
@@ -700,7 +906,7 @@
         <p:nvSpPr>
           <p:cNvPr id="2" name="Slide Image Placeholder 1"/>
           <p:cNvSpPr>
-            <a:spLocks noGrp="1" noRot="1" noChangeAspect="1"/>
+            <a:spLocks noGrp="1"/>
           </p:cNvSpPr>
           <p:nvPr>
             <p:ph type="sldImg" idx="2"/>
@@ -715,7 +921,7 @@
             <a:spLocks noGrp="1"/>
           </p:cNvSpPr>
           <p:nvPr>
-            <p:ph type="body" sz="quarter" idx="3"/>
+            <p:ph type="body" idx="3" sz="quarter"/>
           </p:nvPr>
         </p:nvSpPr>
         <p:spPr/>
@@ -736,7 +942,7 @@
             <a:spLocks noGrp="1"/>
           </p:cNvSpPr>
           <p:nvPr>
-            <p:ph type="sldNum" sz="quarter" idx="5"/>
+            <p:ph type="sldNum" idx="5" sz="quarter"/>
           </p:nvPr>
         </p:nvSpPr>
         <p:spPr/>
@@ -750,7 +956,7 @@
 </file>
 
 <file path=ppt/notesSlides/notesSlide8.xml><?xml version="1.0" encoding="utf-8"?>
-<p:notes xmlns:a="http://schemas.openxmlformats.org/drawingml/2006/main" xmlns:r="http://schemas.openxmlformats.org/officeDocument/2006/relationships" xmlns:p="http://schemas.openxmlformats.org/presentationml/2006/main">
+<p:notes xmlns:a="http://schemas.openxmlformats.org/drawingml/2006/main" xmlns:p="http://schemas.openxmlformats.org/presentationml/2006/main" xmlns:r="http://schemas.openxmlformats.org/officeDocument/2006/relationships">
   <p:cSld>
     <p:spTree>
       <p:nvGrpSpPr>
@@ -770,7 +976,7 @@
         <p:nvSpPr>
           <p:cNvPr id="2" name="Slide Image Placeholder 1"/>
           <p:cNvSpPr>
-            <a:spLocks noGrp="1" noRot="1" noChangeAspect="1"/>
+            <a:spLocks noGrp="1"/>
           </p:cNvSpPr>
           <p:nvPr>
             <p:ph type="sldImg" idx="2"/>
@@ -785,7 +991,7 @@
             <a:spLocks noGrp="1"/>
           </p:cNvSpPr>
           <p:nvPr>
-            <p:ph type="body" sz="quarter" idx="3"/>
+            <p:ph type="body" idx="3" sz="quarter"/>
           </p:nvPr>
         </p:nvSpPr>
         <p:spPr/>
@@ -806,7 +1012,7 @@
             <a:spLocks noGrp="1"/>
           </p:cNvSpPr>
           <p:nvPr>
-            <p:ph type="sldNum" sz="quarter" idx="5"/>
+            <p:ph type="sldNum" idx="5" sz="quarter"/>
           </p:nvPr>
         </p:nvSpPr>
         <p:spPr/>
@@ -820,7 +1026,7 @@
 </file>
 
 <file path=ppt/notesSlides/notesSlide9.xml><?xml version="1.0" encoding="utf-8"?>
-<p:notes xmlns:a="http://schemas.openxmlformats.org/drawingml/2006/main" xmlns:r="http://schemas.openxmlformats.org/officeDocument/2006/relationships" xmlns:p="http://schemas.openxmlformats.org/presentationml/2006/main">
+<p:notes xmlns:a="http://schemas.openxmlformats.org/drawingml/2006/main" xmlns:p="http://schemas.openxmlformats.org/presentationml/2006/main" xmlns:r="http://schemas.openxmlformats.org/officeDocument/2006/relationships">
   <p:cSld>
     <p:spTree>
       <p:nvGrpSpPr>
@@ -840,7 +1046,7 @@
         <p:nvSpPr>
           <p:cNvPr id="2" name="Slide Image Placeholder 1"/>
           <p:cNvSpPr>
-            <a:spLocks noGrp="1" noRot="1" noChangeAspect="1"/>
+            <a:spLocks noGrp="1"/>
           </p:cNvSpPr>
           <p:nvPr>
             <p:ph type="sldImg" idx="2"/>
@@ -855,7 +1061,7 @@
             <a:spLocks noGrp="1"/>
           </p:cNvSpPr>
           <p:nvPr>
-            <p:ph type="body" sz="quarter" idx="3"/>
+            <p:ph type="body" idx="3" sz="quarter"/>
           </p:nvPr>
         </p:nvSpPr>
         <p:spPr/>
@@ -876,7 +1082,7 @@
             <a:spLocks noGrp="1"/>
           </p:cNvSpPr>
           <p:nvPr>
-            <p:ph type="sldNum" sz="quarter" idx="5"/>
+            <p:ph type="sldNum" idx="5" sz="quarter"/>
           </p:nvPr>
         </p:nvSpPr>
         <p:spPr/>
@@ -927,9 +1133,10 @@
           <a:lstStyle/>
           <a:p>
             <a:r>
-              <a:rPr lang="en-US"/>
+              <a:rPr lang="en-US" smtClean="0"/>
               <a:t>Click to edit Master title style</a:t>
             </a:r>
+            <a:endParaRPr lang="en-US"/>
           </a:p>
         </p:txBody>
       </p:sp>
@@ -1045,9 +1252,10 @@
           </a:lstStyle>
           <a:p>
             <a:r>
-              <a:rPr lang="en-US"/>
+              <a:rPr lang="en-US" smtClean="0"/>
               <a:t>Click to edit Master subtitle style</a:t>
             </a:r>
+            <a:endParaRPr lang="en-US"/>
           </a:p>
         </p:txBody>
       </p:sp>
@@ -1068,7 +1276,7 @@
           <a:p>
             <a:fld id="{5BCAD085-E8A6-8845-BD4E-CB4CCA059FC4}" type="datetimeFigureOut">
               <a:rPr lang="en-US" smtClean="0"/>
-              <a:t>8/31/2026</a:t>
+              <a:t>1/27/13</a:t>
             </a:fld>
             <a:endParaRPr lang="en-US"/>
           </a:p>
@@ -1162,9 +1370,10 @@
           <a:lstStyle/>
           <a:p>
             <a:r>
-              <a:rPr lang="en-US"/>
+              <a:rPr lang="en-US" smtClean="0"/>
               <a:t>Click to edit Master title style</a:t>
             </a:r>
+            <a:endParaRPr lang="en-US"/>
           </a:p>
         </p:txBody>
       </p:sp>
@@ -1185,37 +1394,38 @@
           <a:p>
             <a:pPr lvl="0"/>
             <a:r>
-              <a:rPr lang="en-US"/>
+              <a:rPr lang="en-US" smtClean="0"/>
               <a:t>Click to edit Master text styles</a:t>
             </a:r>
           </a:p>
           <a:p>
             <a:pPr lvl="1"/>
             <a:r>
-              <a:rPr lang="en-US"/>
+              <a:rPr lang="en-US" smtClean="0"/>
               <a:t>Second level</a:t>
             </a:r>
           </a:p>
           <a:p>
             <a:pPr lvl="2"/>
             <a:r>
-              <a:rPr lang="en-US"/>
+              <a:rPr lang="en-US" smtClean="0"/>
               <a:t>Third level</a:t>
             </a:r>
           </a:p>
           <a:p>
             <a:pPr lvl="3"/>
             <a:r>
-              <a:rPr lang="en-US"/>
+              <a:rPr lang="en-US" smtClean="0"/>
               <a:t>Fourth level</a:t>
             </a:r>
           </a:p>
           <a:p>
             <a:pPr lvl="4"/>
             <a:r>
-              <a:rPr lang="en-US"/>
+              <a:rPr lang="en-US" smtClean="0"/>
               <a:t>Fifth level</a:t>
             </a:r>
+            <a:endParaRPr lang="en-US"/>
           </a:p>
         </p:txBody>
       </p:sp>
@@ -1236,7 +1446,7 @@
           <a:p>
             <a:fld id="{5BCAD085-E8A6-8845-BD4E-CB4CCA059FC4}" type="datetimeFigureOut">
               <a:rPr lang="en-US" smtClean="0"/>
-              <a:t>8/31/2026</a:t>
+              <a:t>1/27/13</a:t>
             </a:fld>
             <a:endParaRPr lang="en-US"/>
           </a:p>
@@ -1335,9 +1545,10 @@
           <a:lstStyle/>
           <a:p>
             <a:r>
-              <a:rPr lang="en-US"/>
+              <a:rPr lang="en-US" smtClean="0"/>
               <a:t>Click to edit Master title style</a:t>
             </a:r>
+            <a:endParaRPr lang="en-US"/>
           </a:p>
         </p:txBody>
       </p:sp>
@@ -1363,37 +1574,38 @@
           <a:p>
             <a:pPr lvl="0"/>
             <a:r>
-              <a:rPr lang="en-US"/>
+              <a:rPr lang="en-US" smtClean="0"/>
               <a:t>Click to edit Master text styles</a:t>
             </a:r>
           </a:p>
           <a:p>
             <a:pPr lvl="1"/>
             <a:r>
-              <a:rPr lang="en-US"/>
+              <a:rPr lang="en-US" smtClean="0"/>
               <a:t>Second level</a:t>
             </a:r>
           </a:p>
           <a:p>
             <a:pPr lvl="2"/>
             <a:r>
-              <a:rPr lang="en-US"/>
+              <a:rPr lang="en-US" smtClean="0"/>
               <a:t>Third level</a:t>
             </a:r>
           </a:p>
           <a:p>
             <a:pPr lvl="3"/>
             <a:r>
-              <a:rPr lang="en-US"/>
+              <a:rPr lang="en-US" smtClean="0"/>
               <a:t>Fourth level</a:t>
             </a:r>
           </a:p>
           <a:p>
             <a:pPr lvl="4"/>
             <a:r>
-              <a:rPr lang="en-US"/>
+              <a:rPr lang="en-US" smtClean="0"/>
               <a:t>Fifth level</a:t>
             </a:r>
+            <a:endParaRPr lang="en-US"/>
           </a:p>
         </p:txBody>
       </p:sp>
@@ -1414,7 +1626,7 @@
           <a:p>
             <a:fld id="{5BCAD085-E8A6-8845-BD4E-CB4CCA059FC4}" type="datetimeFigureOut">
               <a:rPr lang="en-US" smtClean="0"/>
-              <a:t>8/31/2026</a:t>
+              <a:t>1/27/13</a:t>
             </a:fld>
             <a:endParaRPr lang="en-US"/>
           </a:p>
@@ -1508,9 +1720,10 @@
           <a:lstStyle/>
           <a:p>
             <a:r>
-              <a:rPr lang="en-US"/>
+              <a:rPr lang="en-US" smtClean="0"/>
               <a:t>Click to edit Master title style</a:t>
             </a:r>
+            <a:endParaRPr lang="en-US"/>
           </a:p>
         </p:txBody>
       </p:sp>
@@ -1531,37 +1744,38 @@
           <a:p>
             <a:pPr lvl="0"/>
             <a:r>
-              <a:rPr lang="en-US"/>
+              <a:rPr lang="en-US" smtClean="0"/>
               <a:t>Click to edit Master text styles</a:t>
             </a:r>
           </a:p>
           <a:p>
             <a:pPr lvl="1"/>
             <a:r>
-              <a:rPr lang="en-US"/>
+              <a:rPr lang="en-US" smtClean="0"/>
               <a:t>Second level</a:t>
             </a:r>
           </a:p>
           <a:p>
             <a:pPr lvl="2"/>
             <a:r>
-              <a:rPr lang="en-US"/>
+              <a:rPr lang="en-US" smtClean="0"/>
               <a:t>Third level</a:t>
             </a:r>
           </a:p>
           <a:p>
             <a:pPr lvl="3"/>
             <a:r>
-              <a:rPr lang="en-US"/>
+              <a:rPr lang="en-US" smtClean="0"/>
               <a:t>Fourth level</a:t>
             </a:r>
           </a:p>
           <a:p>
             <a:pPr lvl="4"/>
             <a:r>
-              <a:rPr lang="en-US"/>
+              <a:rPr lang="en-US" smtClean="0"/>
               <a:t>Fifth level</a:t>
             </a:r>
+            <a:endParaRPr lang="en-US"/>
           </a:p>
         </p:txBody>
       </p:sp>
@@ -1582,7 +1796,7 @@
           <a:p>
             <a:fld id="{5BCAD085-E8A6-8845-BD4E-CB4CCA059FC4}" type="datetimeFigureOut">
               <a:rPr lang="en-US" smtClean="0"/>
-              <a:t>8/31/2026</a:t>
+              <a:t>1/27/13</a:t>
             </a:fld>
             <a:endParaRPr lang="en-US"/>
           </a:p>
@@ -1685,9 +1899,10 @@
           </a:lstStyle>
           <a:p>
             <a:r>
-              <a:rPr lang="en-US"/>
+              <a:rPr lang="en-US" smtClean="0"/>
               <a:t>Click to edit Master title style</a:t>
             </a:r>
+            <a:endParaRPr lang="en-US"/>
           </a:p>
         </p:txBody>
       </p:sp>
@@ -1804,7 +2019,7 @@
           <a:p>
             <a:pPr lvl="0"/>
             <a:r>
-              <a:rPr lang="en-US"/>
+              <a:rPr lang="en-US" smtClean="0"/>
               <a:t>Click to edit Master text styles</a:t>
             </a:r>
           </a:p>
@@ -1827,7 +2042,7 @@
           <a:p>
             <a:fld id="{5BCAD085-E8A6-8845-BD4E-CB4CCA059FC4}" type="datetimeFigureOut">
               <a:rPr lang="en-US" smtClean="0"/>
-              <a:t>8/31/2026</a:t>
+              <a:t>1/27/13</a:t>
             </a:fld>
             <a:endParaRPr lang="en-US"/>
           </a:p>
@@ -1921,9 +2136,10 @@
           <a:lstStyle/>
           <a:p>
             <a:r>
-              <a:rPr lang="en-US"/>
+              <a:rPr lang="en-US" smtClean="0"/>
               <a:t>Click to edit Master title style</a:t>
             </a:r>
+            <a:endParaRPr lang="en-US"/>
           </a:p>
         </p:txBody>
       </p:sp>
@@ -1977,37 +2193,38 @@
           <a:p>
             <a:pPr lvl="0"/>
             <a:r>
-              <a:rPr lang="en-US"/>
+              <a:rPr lang="en-US" smtClean="0"/>
               <a:t>Click to edit Master text styles</a:t>
             </a:r>
           </a:p>
           <a:p>
             <a:pPr lvl="1"/>
             <a:r>
-              <a:rPr lang="en-US"/>
+              <a:rPr lang="en-US" smtClean="0"/>
               <a:t>Second level</a:t>
             </a:r>
           </a:p>
           <a:p>
             <a:pPr lvl="2"/>
             <a:r>
-              <a:rPr lang="en-US"/>
+              <a:rPr lang="en-US" smtClean="0"/>
               <a:t>Third level</a:t>
             </a:r>
           </a:p>
           <a:p>
             <a:pPr lvl="3"/>
             <a:r>
-              <a:rPr lang="en-US"/>
+              <a:rPr lang="en-US" smtClean="0"/>
               <a:t>Fourth level</a:t>
             </a:r>
           </a:p>
           <a:p>
             <a:pPr lvl="4"/>
             <a:r>
-              <a:rPr lang="en-US"/>
+              <a:rPr lang="en-US" smtClean="0"/>
               <a:t>Fifth level</a:t>
             </a:r>
+            <a:endParaRPr lang="en-US"/>
           </a:p>
         </p:txBody>
       </p:sp>
@@ -2061,37 +2278,38 @@
           <a:p>
             <a:pPr lvl="0"/>
             <a:r>
-              <a:rPr lang="en-US"/>
+              <a:rPr lang="en-US" smtClean="0"/>
               <a:t>Click to edit Master text styles</a:t>
             </a:r>
           </a:p>
           <a:p>
             <a:pPr lvl="1"/>
             <a:r>
-              <a:rPr lang="en-US"/>
+              <a:rPr lang="en-US" smtClean="0"/>
               <a:t>Second level</a:t>
             </a:r>
           </a:p>
           <a:p>
             <a:pPr lvl="2"/>
             <a:r>
-              <a:rPr lang="en-US"/>
+              <a:rPr lang="en-US" smtClean="0"/>
               <a:t>Third level</a:t>
             </a:r>
           </a:p>
           <a:p>
             <a:pPr lvl="3"/>
             <a:r>
-              <a:rPr lang="en-US"/>
+              <a:rPr lang="en-US" smtClean="0"/>
               <a:t>Fourth level</a:t>
             </a:r>
           </a:p>
           <a:p>
             <a:pPr lvl="4"/>
             <a:r>
-              <a:rPr lang="en-US"/>
+              <a:rPr lang="en-US" smtClean="0"/>
               <a:t>Fifth level</a:t>
             </a:r>
+            <a:endParaRPr lang="en-US"/>
           </a:p>
         </p:txBody>
       </p:sp>
@@ -2112,7 +2330,7 @@
           <a:p>
             <a:fld id="{5BCAD085-E8A6-8845-BD4E-CB4CCA059FC4}" type="datetimeFigureOut">
               <a:rPr lang="en-US" smtClean="0"/>
-              <a:t>8/31/2026</a:t>
+              <a:t>1/27/13</a:t>
             </a:fld>
             <a:endParaRPr lang="en-US"/>
           </a:p>
@@ -2210,9 +2428,10 @@
           </a:lstStyle>
           <a:p>
             <a:r>
-              <a:rPr lang="en-US"/>
+              <a:rPr lang="en-US" smtClean="0"/>
               <a:t>Click to edit Master title style</a:t>
             </a:r>
+            <a:endParaRPr lang="en-US"/>
           </a:p>
         </p:txBody>
       </p:sp>
@@ -2275,7 +2494,7 @@
           <a:p>
             <a:pPr lvl="0"/>
             <a:r>
-              <a:rPr lang="en-US"/>
+              <a:rPr lang="en-US" smtClean="0"/>
               <a:t>Click to edit Master text styles</a:t>
             </a:r>
           </a:p>
@@ -2331,37 +2550,38 @@
           <a:p>
             <a:pPr lvl="0"/>
             <a:r>
-              <a:rPr lang="en-US"/>
+              <a:rPr lang="en-US" smtClean="0"/>
               <a:t>Click to edit Master text styles</a:t>
             </a:r>
           </a:p>
           <a:p>
             <a:pPr lvl="1"/>
             <a:r>
-              <a:rPr lang="en-US"/>
+              <a:rPr lang="en-US" smtClean="0"/>
               <a:t>Second level</a:t>
             </a:r>
           </a:p>
           <a:p>
             <a:pPr lvl="2"/>
             <a:r>
-              <a:rPr lang="en-US"/>
+              <a:rPr lang="en-US" smtClean="0"/>
               <a:t>Third level</a:t>
             </a:r>
           </a:p>
           <a:p>
             <a:pPr lvl="3"/>
             <a:r>
-              <a:rPr lang="en-US"/>
+              <a:rPr lang="en-US" smtClean="0"/>
               <a:t>Fourth level</a:t>
             </a:r>
           </a:p>
           <a:p>
             <a:pPr lvl="4"/>
             <a:r>
-              <a:rPr lang="en-US"/>
+              <a:rPr lang="en-US" smtClean="0"/>
               <a:t>Fifth level</a:t>
             </a:r>
+            <a:endParaRPr lang="en-US"/>
           </a:p>
         </p:txBody>
       </p:sp>
@@ -2424,7 +2644,7 @@
           <a:p>
             <a:pPr lvl="0"/>
             <a:r>
-              <a:rPr lang="en-US"/>
+              <a:rPr lang="en-US" smtClean="0"/>
               <a:t>Click to edit Master text styles</a:t>
             </a:r>
           </a:p>
@@ -2480,37 +2700,38 @@
           <a:p>
             <a:pPr lvl="0"/>
             <a:r>
-              <a:rPr lang="en-US"/>
+              <a:rPr lang="en-US" smtClean="0"/>
               <a:t>Click to edit Master text styles</a:t>
             </a:r>
           </a:p>
           <a:p>
             <a:pPr lvl="1"/>
             <a:r>
-              <a:rPr lang="en-US"/>
+              <a:rPr lang="en-US" smtClean="0"/>
               <a:t>Second level</a:t>
             </a:r>
           </a:p>
           <a:p>
             <a:pPr lvl="2"/>
             <a:r>
-              <a:rPr lang="en-US"/>
+              <a:rPr lang="en-US" smtClean="0"/>
               <a:t>Third level</a:t>
             </a:r>
           </a:p>
           <a:p>
             <a:pPr lvl="3"/>
             <a:r>
-              <a:rPr lang="en-US"/>
+              <a:rPr lang="en-US" smtClean="0"/>
               <a:t>Fourth level</a:t>
             </a:r>
           </a:p>
           <a:p>
             <a:pPr lvl="4"/>
             <a:r>
-              <a:rPr lang="en-US"/>
+              <a:rPr lang="en-US" smtClean="0"/>
               <a:t>Fifth level</a:t>
             </a:r>
+            <a:endParaRPr lang="en-US"/>
           </a:p>
         </p:txBody>
       </p:sp>
@@ -2531,7 +2752,7 @@
           <a:p>
             <a:fld id="{5BCAD085-E8A6-8845-BD4E-CB4CCA059FC4}" type="datetimeFigureOut">
               <a:rPr lang="en-US" smtClean="0"/>
-              <a:t>8/31/2026</a:t>
+              <a:t>1/27/13</a:t>
             </a:fld>
             <a:endParaRPr lang="en-US"/>
           </a:p>
@@ -2625,9 +2846,10 @@
           <a:lstStyle/>
           <a:p>
             <a:r>
-              <a:rPr lang="en-US"/>
+              <a:rPr lang="en-US" smtClean="0"/>
               <a:t>Click to edit Master title style</a:t>
             </a:r>
+            <a:endParaRPr lang="en-US"/>
           </a:p>
         </p:txBody>
       </p:sp>
@@ -2648,7 +2870,7 @@
           <a:p>
             <a:fld id="{5BCAD085-E8A6-8845-BD4E-CB4CCA059FC4}" type="datetimeFigureOut">
               <a:rPr lang="en-US" smtClean="0"/>
-              <a:t>8/31/2026</a:t>
+              <a:t>1/27/13</a:t>
             </a:fld>
             <a:endParaRPr lang="en-US"/>
           </a:p>
@@ -2743,7 +2965,7 @@
           <a:p>
             <a:fld id="{5BCAD085-E8A6-8845-BD4E-CB4CCA059FC4}" type="datetimeFigureOut">
               <a:rPr lang="en-US" smtClean="0"/>
-              <a:t>8/31/2026</a:t>
+              <a:t>1/27/13</a:t>
             </a:fld>
             <a:endParaRPr lang="en-US"/>
           </a:p>
@@ -2846,9 +3068,10 @@
           </a:lstStyle>
           <a:p>
             <a:r>
-              <a:rPr lang="en-US"/>
+              <a:rPr lang="en-US" smtClean="0"/>
               <a:t>Click to edit Master title style</a:t>
             </a:r>
+            <a:endParaRPr lang="en-US"/>
           </a:p>
         </p:txBody>
       </p:sp>
@@ -2902,37 +3125,38 @@
           <a:p>
             <a:pPr lvl="0"/>
             <a:r>
-              <a:rPr lang="en-US"/>
+              <a:rPr lang="en-US" smtClean="0"/>
               <a:t>Click to edit Master text styles</a:t>
             </a:r>
           </a:p>
           <a:p>
             <a:pPr lvl="1"/>
             <a:r>
-              <a:rPr lang="en-US"/>
+              <a:rPr lang="en-US" smtClean="0"/>
               <a:t>Second level</a:t>
             </a:r>
           </a:p>
           <a:p>
             <a:pPr lvl="2"/>
             <a:r>
-              <a:rPr lang="en-US"/>
+              <a:rPr lang="en-US" smtClean="0"/>
               <a:t>Third level</a:t>
             </a:r>
           </a:p>
           <a:p>
             <a:pPr lvl="3"/>
             <a:r>
-              <a:rPr lang="en-US"/>
+              <a:rPr lang="en-US" smtClean="0"/>
               <a:t>Fourth level</a:t>
             </a:r>
           </a:p>
           <a:p>
             <a:pPr lvl="4"/>
             <a:r>
-              <a:rPr lang="en-US"/>
+              <a:rPr lang="en-US" smtClean="0"/>
               <a:t>Fifth level</a:t>
             </a:r>
+            <a:endParaRPr lang="en-US"/>
           </a:p>
         </p:txBody>
       </p:sp>
@@ -2995,7 +3219,7 @@
           <a:p>
             <a:pPr lvl="0"/>
             <a:r>
-              <a:rPr lang="en-US"/>
+              <a:rPr lang="en-US" smtClean="0"/>
               <a:t>Click to edit Master text styles</a:t>
             </a:r>
           </a:p>
@@ -3018,7 +3242,7 @@
           <a:p>
             <a:fld id="{5BCAD085-E8A6-8845-BD4E-CB4CCA059FC4}" type="datetimeFigureOut">
               <a:rPr lang="en-US" smtClean="0"/>
-              <a:t>8/31/2026</a:t>
+              <a:t>1/27/13</a:t>
             </a:fld>
             <a:endParaRPr lang="en-US"/>
           </a:p>
@@ -3121,9 +3345,10 @@
           </a:lstStyle>
           <a:p>
             <a:r>
-              <a:rPr lang="en-US"/>
+              <a:rPr lang="en-US" smtClean="0"/>
               <a:t>Click to edit Master title style</a:t>
             </a:r>
+            <a:endParaRPr lang="en-US"/>
           </a:p>
         </p:txBody>
       </p:sp>
@@ -3247,7 +3472,7 @@
           <a:p>
             <a:pPr lvl="0"/>
             <a:r>
-              <a:rPr lang="en-US"/>
+              <a:rPr lang="en-US" smtClean="0"/>
               <a:t>Click to edit Master text styles</a:t>
             </a:r>
           </a:p>
@@ -3270,7 +3495,7 @@
           <a:p>
             <a:fld id="{5BCAD085-E8A6-8845-BD4E-CB4CCA059FC4}" type="datetimeFigureOut">
               <a:rPr lang="en-US" smtClean="0"/>
-              <a:t>8/31/2026</a:t>
+              <a:t>1/27/13</a:t>
             </a:fld>
             <a:endParaRPr lang="en-US"/>
           </a:p>
@@ -3379,9 +3604,10 @@
           <a:lstStyle/>
           <a:p>
             <a:r>
-              <a:rPr lang="en-US"/>
+              <a:rPr lang="en-US" smtClean="0"/>
               <a:t>Click to edit Master title style</a:t>
             </a:r>
+            <a:endParaRPr lang="en-US"/>
           </a:p>
         </p:txBody>
       </p:sp>
@@ -3412,37 +3638,38 @@
           <a:p>
             <a:pPr lvl="0"/>
             <a:r>
-              <a:rPr lang="en-US"/>
+              <a:rPr lang="en-US" smtClean="0"/>
               <a:t>Click to edit Master text styles</a:t>
             </a:r>
           </a:p>
           <a:p>
             <a:pPr lvl="1"/>
             <a:r>
-              <a:rPr lang="en-US"/>
+              <a:rPr lang="en-US" smtClean="0"/>
               <a:t>Second level</a:t>
             </a:r>
           </a:p>
           <a:p>
             <a:pPr lvl="2"/>
             <a:r>
-              <a:rPr lang="en-US"/>
+              <a:rPr lang="en-US" smtClean="0"/>
               <a:t>Third level</a:t>
             </a:r>
           </a:p>
           <a:p>
             <a:pPr lvl="3"/>
             <a:r>
-              <a:rPr lang="en-US"/>
+              <a:rPr lang="en-US" smtClean="0"/>
               <a:t>Fourth level</a:t>
             </a:r>
           </a:p>
           <a:p>
             <a:pPr lvl="4"/>
             <a:r>
-              <a:rPr lang="en-US"/>
+              <a:rPr lang="en-US" smtClean="0"/>
               <a:t>Fifth level</a:t>
             </a:r>
+            <a:endParaRPr lang="en-US"/>
           </a:p>
         </p:txBody>
       </p:sp>
@@ -3481,7 +3708,7 @@
           <a:p>
             <a:fld id="{5BCAD085-E8A6-8845-BD4E-CB4CCA059FC4}" type="datetimeFigureOut">
               <a:rPr lang="en-US" smtClean="0"/>
-              <a:t>8/31/2026</a:t>
+              <a:t>1/27/13</a:t>
             </a:fld>
             <a:endParaRPr lang="en-US"/>
           </a:p>
@@ -3840,7 +4067,7 @@
 </file>
 
 <file path=ppt/slides/slide1.xml><?xml version="1.0" encoding="utf-8"?>
-<p:sld xmlns:a="http://schemas.openxmlformats.org/drawingml/2006/main" xmlns:r="http://schemas.openxmlformats.org/officeDocument/2006/relationships" xmlns:p="http://schemas.openxmlformats.org/presentationml/2006/main">
+<p:sld xmlns:a="http://schemas.openxmlformats.org/drawingml/2006/main" xmlns:p="http://schemas.openxmlformats.org/presentationml/2006/main" xmlns:r="http://schemas.openxmlformats.org/officeDocument/2006/relationships">
   <p:cSld>
     <p:bg>
       <p:bgPr>
@@ -3856,14 +4083,7 @@
         <p:cNvGrpSpPr/>
         <p:nvPr/>
       </p:nvGrpSpPr>
-      <p:grpSpPr>
-        <a:xfrm>
-          <a:off x="0" y="0"/>
-          <a:ext cx="0" cy="0"/>
-          <a:chOff x="0" y="0"/>
-          <a:chExt cx="0" cy="0"/>
-        </a:xfrm>
-      </p:grpSpPr>
+      <p:grpSpPr/>
       <p:sp>
         <p:nvSpPr>
           <p:cNvPr id="2" name="TextBox 1"/>
@@ -3881,7 +4101,7 @@
           <a:noFill/>
         </p:spPr>
         <p:txBody>
-          <a:bodyPr wrap="square" lIns="0" tIns="0" rIns="0" bIns="0">
+          <a:bodyPr wrap="square" lIns="0" rIns="0" tIns="0" bIns="0">
             <a:spAutoFit/>
           </a:bodyPr>
           <a:lstStyle/>
@@ -3924,7 +4144,7 @@
           <a:noFill/>
         </p:spPr>
         <p:txBody>
-          <a:bodyPr wrap="square" lIns="0" tIns="0" rIns="0" bIns="0">
+          <a:bodyPr wrap="square" lIns="0" rIns="0" tIns="0" bIns="0">
             <a:spAutoFit/>
           </a:bodyPr>
           <a:lstStyle/>
@@ -3963,7 +4183,7 @@
           <a:noFill/>
         </p:spPr>
         <p:txBody>
-          <a:bodyPr wrap="square" lIns="0" tIns="0" rIns="0" bIns="0">
+          <a:bodyPr wrap="square" lIns="0" rIns="0" tIns="0" bIns="0">
             <a:spAutoFit/>
           </a:bodyPr>
           <a:lstStyle/>
@@ -4010,7 +4230,7 @@
           <p:nvPr/>
         </p:nvPicPr>
         <p:blipFill>
-          <a:blip r:embed="rId3"/>
+          <a:blip r:embed="rId2"/>
           <a:stretch>
             <a:fillRect/>
           </a:stretch>
@@ -4034,7 +4254,7 @@
 </file>
 
 <file path=ppt/slides/slide2.xml><?xml version="1.0" encoding="utf-8"?>
-<p:sld xmlns:a="http://schemas.openxmlformats.org/drawingml/2006/main" xmlns:r="http://schemas.openxmlformats.org/officeDocument/2006/relationships" xmlns:p="http://schemas.openxmlformats.org/presentationml/2006/main">
+<p:sld xmlns:a="http://schemas.openxmlformats.org/drawingml/2006/main" xmlns:p="http://schemas.openxmlformats.org/presentationml/2006/main" xmlns:r="http://schemas.openxmlformats.org/officeDocument/2006/relationships">
   <p:cSld>
     <p:bg>
       <p:bgPr>
@@ -4050,14 +4270,7 @@
         <p:cNvGrpSpPr/>
         <p:nvPr/>
       </p:nvGrpSpPr>
-      <p:grpSpPr>
-        <a:xfrm>
-          <a:off x="0" y="0"/>
-          <a:ext cx="0" cy="0"/>
-          <a:chOff x="0" y="0"/>
-          <a:chExt cx="0" cy="0"/>
-        </a:xfrm>
-      </p:grpSpPr>
+      <p:grpSpPr/>
       <p:sp>
         <p:nvSpPr>
           <p:cNvPr id="2" name="TextBox 1"/>
@@ -4075,7 +4288,7 @@
           <a:noFill/>
         </p:spPr>
         <p:txBody>
-          <a:bodyPr wrap="square" lIns="0" tIns="0" rIns="0" bIns="0">
+          <a:bodyPr wrap="square" lIns="0" rIns="0" tIns="0" bIns="0">
             <a:spAutoFit/>
           </a:bodyPr>
           <a:lstStyle/>
@@ -4114,7 +4327,7 @@
           <a:noFill/>
         </p:spPr>
         <p:txBody>
-          <a:bodyPr wrap="square" lIns="0" tIns="0" rIns="0" bIns="0">
+          <a:bodyPr wrap="square" lIns="0" rIns="0" tIns="0" bIns="0">
             <a:spAutoFit/>
           </a:bodyPr>
           <a:lstStyle/>
@@ -4220,7 +4433,6 @@
           <a:lstStyle/>
           <a:p>
             <a:pPr algn="ctr"/>
-            <a:endParaRPr/>
           </a:p>
         </p:txBody>
       </p:sp>
@@ -4241,7 +4453,7 @@
           <a:noFill/>
         </p:spPr>
         <p:txBody>
-          <a:bodyPr wrap="square" lIns="0" tIns="0" rIns="0" bIns="0">
+          <a:bodyPr wrap="square" lIns="0" rIns="0" tIns="0" bIns="0">
             <a:spAutoFit/>
           </a:bodyPr>
           <a:lstStyle/>
@@ -4309,7 +4521,6 @@
           <a:lstStyle/>
           <a:p>
             <a:pPr algn="ctr"/>
-            <a:endParaRPr/>
           </a:p>
         </p:txBody>
       </p:sp>
@@ -4330,7 +4541,7 @@
           <a:noFill/>
         </p:spPr>
         <p:txBody>
-          <a:bodyPr wrap="square" lIns="0" tIns="0" rIns="0" bIns="0">
+          <a:bodyPr wrap="square" lIns="0" rIns="0" tIns="0" bIns="0">
             <a:spAutoFit/>
           </a:bodyPr>
           <a:lstStyle/>
@@ -4372,7 +4583,7 @@
           <a:noFill/>
         </p:spPr>
         <p:txBody>
-          <a:bodyPr wrap="square" lIns="0" tIns="0" rIns="0" bIns="0">
+          <a:bodyPr wrap="square" lIns="0" rIns="0" tIns="0" bIns="0">
             <a:spAutoFit/>
           </a:bodyPr>
           <a:lstStyle/>
@@ -4411,7 +4622,7 @@
           <a:noFill/>
         </p:spPr>
         <p:txBody>
-          <a:bodyPr wrap="square" lIns="0" tIns="0" rIns="0" bIns="0">
+          <a:bodyPr wrap="square" lIns="0" rIns="0" tIns="0" bIns="0">
             <a:spAutoFit/>
           </a:bodyPr>
           <a:lstStyle/>
@@ -4450,7 +4661,7 @@
           <a:noFill/>
         </p:spPr>
         <p:txBody>
-          <a:bodyPr wrap="square" lIns="0" tIns="0" rIns="0" bIns="0">
+          <a:bodyPr wrap="square" lIns="0" rIns="0" tIns="0" bIns="0">
             <a:spAutoFit/>
           </a:bodyPr>
           <a:lstStyle/>
@@ -4489,7 +4700,7 @@
           <a:noFill/>
         </p:spPr>
         <p:txBody>
-          <a:bodyPr wrap="square" lIns="0" tIns="0" rIns="0" bIns="0">
+          <a:bodyPr wrap="square" lIns="0" rIns="0" tIns="0" bIns="0">
             <a:spAutoFit/>
           </a:bodyPr>
           <a:lstStyle/>
@@ -4531,7 +4742,7 @@
           <a:noFill/>
         </p:spPr>
         <p:txBody>
-          <a:bodyPr wrap="square" lIns="0" tIns="0" rIns="0" bIns="0">
+          <a:bodyPr wrap="square" lIns="0" rIns="0" tIns="0" bIns="0">
             <a:spAutoFit/>
           </a:bodyPr>
           <a:lstStyle/>
@@ -4570,7 +4781,7 @@
           <a:noFill/>
         </p:spPr>
         <p:txBody>
-          <a:bodyPr wrap="square" lIns="0" tIns="0" rIns="0" bIns="0">
+          <a:bodyPr wrap="square" lIns="0" rIns="0" tIns="0" bIns="0">
             <a:spAutoFit/>
           </a:bodyPr>
           <a:lstStyle/>
@@ -4609,7 +4820,7 @@
           <a:noFill/>
         </p:spPr>
         <p:txBody>
-          <a:bodyPr wrap="square" lIns="0" tIns="0" rIns="0" bIns="0">
+          <a:bodyPr wrap="square" lIns="0" rIns="0" tIns="0" bIns="0">
             <a:spAutoFit/>
           </a:bodyPr>
           <a:lstStyle/>
@@ -4643,7 +4854,7 @@
 </file>
 
 <file path=ppt/slides/slide3.xml><?xml version="1.0" encoding="utf-8"?>
-<p:sld xmlns:a="http://schemas.openxmlformats.org/drawingml/2006/main" xmlns:r="http://schemas.openxmlformats.org/officeDocument/2006/relationships" xmlns:p="http://schemas.openxmlformats.org/presentationml/2006/main">
+<p:sld xmlns:a="http://schemas.openxmlformats.org/drawingml/2006/main" xmlns:p="http://schemas.openxmlformats.org/presentationml/2006/main" xmlns:r="http://schemas.openxmlformats.org/officeDocument/2006/relationships">
   <p:cSld>
     <p:bg>
       <p:bgPr>
@@ -4659,14 +4870,7 @@
         <p:cNvGrpSpPr/>
         <p:nvPr/>
       </p:nvGrpSpPr>
-      <p:grpSpPr>
-        <a:xfrm>
-          <a:off x="0" y="0"/>
-          <a:ext cx="0" cy="0"/>
-          <a:chOff x="0" y="0"/>
-          <a:chExt cx="0" cy="0"/>
-        </a:xfrm>
-      </p:grpSpPr>
+      <p:grpSpPr/>
       <p:sp>
         <p:nvSpPr>
           <p:cNvPr id="2" name="TextBox 1"/>
@@ -4684,7 +4888,7 @@
           <a:noFill/>
         </p:spPr>
         <p:txBody>
-          <a:bodyPr wrap="square" lIns="0" tIns="0" rIns="0" bIns="0">
+          <a:bodyPr wrap="square" lIns="0" rIns="0" tIns="0" bIns="0">
             <a:spAutoFit/>
           </a:bodyPr>
           <a:lstStyle/>
@@ -4747,7 +4951,7 @@
           </a:fontRef>
         </p:style>
         <p:txBody>
-          <a:bodyPr wrap="square" rtlCol="0" anchor="ctr"/>
+          <a:bodyPr rtlCol="0" anchor="ctr" wrap="square"/>
           <a:lstStyle/>
           <a:p>
             <a:pPr algn="ctr"/>
@@ -4805,7 +5009,6 @@
           <a:lstStyle/>
           <a:p>
             <a:pPr algn="ctr"/>
-            <a:endParaRPr/>
           </a:p>
         </p:txBody>
       </p:sp>
@@ -4850,7 +5053,7 @@
           </a:fontRef>
         </p:style>
         <p:txBody>
-          <a:bodyPr wrap="square" rtlCol="0" anchor="ctr"/>
+          <a:bodyPr rtlCol="0" anchor="ctr" wrap="square"/>
           <a:lstStyle/>
           <a:p>
             <a:pPr algn="ctr"/>
@@ -4907,7 +5110,6 @@
           <a:lstStyle/>
           <a:p>
             <a:pPr algn="ctr"/>
-            <a:endParaRPr/>
           </a:p>
         </p:txBody>
       </p:sp>
@@ -4952,7 +5154,7 @@
           </a:fontRef>
         </p:style>
         <p:txBody>
-          <a:bodyPr wrap="square" rtlCol="0" anchor="ctr"/>
+          <a:bodyPr rtlCol="0" anchor="ctr" wrap="square"/>
           <a:lstStyle/>
           <a:p>
             <a:pPr algn="ctr"/>
@@ -5009,7 +5211,6 @@
           <a:lstStyle/>
           <a:p>
             <a:pPr algn="ctr"/>
-            <a:endParaRPr/>
           </a:p>
         </p:txBody>
       </p:sp>
@@ -5054,7 +5255,7 @@
           </a:fontRef>
         </p:style>
         <p:txBody>
-          <a:bodyPr wrap="square" rtlCol="0" anchor="ctr"/>
+          <a:bodyPr rtlCol="0" anchor="ctr" wrap="square"/>
           <a:lstStyle/>
           <a:p>
             <a:pPr algn="ctr"/>
@@ -5111,7 +5312,6 @@
           <a:lstStyle/>
           <a:p>
             <a:pPr algn="ctr"/>
-            <a:endParaRPr/>
           </a:p>
         </p:txBody>
       </p:sp>
@@ -5156,7 +5356,7 @@
           </a:fontRef>
         </p:style>
         <p:txBody>
-          <a:bodyPr wrap="square" rtlCol="0" anchor="ctr"/>
+          <a:bodyPr rtlCol="0" anchor="ctr" wrap="square"/>
           <a:lstStyle/>
           <a:p>
             <a:pPr algn="ctr"/>
@@ -5190,7 +5390,7 @@
           <a:noFill/>
         </p:spPr>
         <p:txBody>
-          <a:bodyPr wrap="square" lIns="0" tIns="0" rIns="0" bIns="0">
+          <a:bodyPr wrap="square" lIns="0" rIns="0" tIns="0" bIns="0">
             <a:spAutoFit/>
           </a:bodyPr>
           <a:lstStyle/>
@@ -5229,7 +5429,7 @@
           <a:noFill/>
         </p:spPr>
         <p:txBody>
-          <a:bodyPr wrap="square" lIns="0" tIns="0" rIns="0" bIns="0">
+          <a:bodyPr wrap="square" lIns="0" rIns="0" tIns="0" bIns="0">
             <a:spAutoFit/>
           </a:bodyPr>
           <a:lstStyle/>
@@ -5268,7 +5468,7 @@
           <a:noFill/>
         </p:spPr>
         <p:txBody>
-          <a:bodyPr wrap="square" lIns="0" tIns="0" rIns="0" bIns="0">
+          <a:bodyPr wrap="square" lIns="0" rIns="0" tIns="0" bIns="0">
             <a:spAutoFit/>
           </a:bodyPr>
           <a:lstStyle/>
@@ -5329,7 +5529,7 @@
           <a:noFill/>
         </p:spPr>
         <p:txBody>
-          <a:bodyPr wrap="square" lIns="0" tIns="0" rIns="0" bIns="0">
+          <a:bodyPr wrap="square" lIns="0" rIns="0" tIns="0" bIns="0">
             <a:spAutoFit/>
           </a:bodyPr>
           <a:lstStyle/>
@@ -5368,7 +5568,7 @@
           <a:noFill/>
         </p:spPr>
         <p:txBody>
-          <a:bodyPr wrap="square" lIns="0" tIns="0" rIns="0" bIns="0">
+          <a:bodyPr wrap="square" lIns="0" rIns="0" tIns="0" bIns="0">
             <a:spAutoFit/>
           </a:bodyPr>
           <a:lstStyle/>
@@ -5410,7 +5610,7 @@
           <a:noFill/>
         </p:spPr>
         <p:txBody>
-          <a:bodyPr wrap="square" lIns="0" tIns="0" rIns="0" bIns="0">
+          <a:bodyPr wrap="square" lIns="0" rIns="0" tIns="0" bIns="0">
             <a:spAutoFit/>
           </a:bodyPr>
           <a:lstStyle/>
@@ -5449,7 +5649,7 @@
           <a:noFill/>
         </p:spPr>
         <p:txBody>
-          <a:bodyPr wrap="square" lIns="0" tIns="0" rIns="0" bIns="0">
+          <a:bodyPr wrap="square" lIns="0" rIns="0" tIns="0" bIns="0">
             <a:spAutoFit/>
           </a:bodyPr>
           <a:lstStyle/>
@@ -5483,7 +5683,7 @@
 </file>
 
 <file path=ppt/slides/slide4.xml><?xml version="1.0" encoding="utf-8"?>
-<p:sld xmlns:a="http://schemas.openxmlformats.org/drawingml/2006/main" xmlns:r="http://schemas.openxmlformats.org/officeDocument/2006/relationships" xmlns:p="http://schemas.openxmlformats.org/presentationml/2006/main">
+<p:sld xmlns:a="http://schemas.openxmlformats.org/drawingml/2006/main" xmlns:p="http://schemas.openxmlformats.org/presentationml/2006/main" xmlns:r="http://schemas.openxmlformats.org/officeDocument/2006/relationships">
   <p:cSld>
     <p:bg>
       <p:bgPr>
@@ -5499,14 +5699,7 @@
         <p:cNvGrpSpPr/>
         <p:nvPr/>
       </p:nvGrpSpPr>
-      <p:grpSpPr>
-        <a:xfrm>
-          <a:off x="0" y="0"/>
-          <a:ext cx="0" cy="0"/>
-          <a:chOff x="0" y="0"/>
-          <a:chExt cx="0" cy="0"/>
-        </a:xfrm>
-      </p:grpSpPr>
+      <p:grpSpPr/>
       <p:sp>
         <p:nvSpPr>
           <p:cNvPr id="2" name="TextBox 1"/>
@@ -5524,7 +5717,7 @@
           <a:noFill/>
         </p:spPr>
         <p:txBody>
-          <a:bodyPr wrap="square" lIns="0" tIns="0" rIns="0" bIns="0">
+          <a:bodyPr wrap="square" lIns="0" rIns="0" tIns="0" bIns="0">
             <a:spAutoFit/>
           </a:bodyPr>
           <a:lstStyle/>
@@ -5555,7 +5748,7 @@
           <p:nvPr/>
         </p:nvPicPr>
         <p:blipFill>
-          <a:blip r:embed="rId3"/>
+          <a:blip r:embed="rId2"/>
           <a:stretch>
             <a:fillRect/>
           </a:stretch>
@@ -5587,7 +5780,7 @@
           <a:noFill/>
         </p:spPr>
         <p:txBody>
-          <a:bodyPr wrap="square" lIns="0" tIns="0" rIns="0" bIns="0">
+          <a:bodyPr wrap="square" lIns="0" rIns="0" tIns="0" bIns="0">
             <a:spAutoFit/>
           </a:bodyPr>
           <a:lstStyle/>
@@ -5648,7 +5841,7 @@
           <a:noFill/>
         </p:spPr>
         <p:txBody>
-          <a:bodyPr wrap="square" lIns="0" tIns="0" rIns="0" bIns="0">
+          <a:bodyPr wrap="square" lIns="0" rIns="0" tIns="0" bIns="0">
             <a:spAutoFit/>
           </a:bodyPr>
           <a:lstStyle/>
@@ -5687,7 +5880,7 @@
           <a:noFill/>
         </p:spPr>
         <p:txBody>
-          <a:bodyPr wrap="square" lIns="0" tIns="0" rIns="0" bIns="0">
+          <a:bodyPr wrap="square" lIns="0" rIns="0" tIns="0" bIns="0">
             <a:spAutoFit/>
           </a:bodyPr>
           <a:lstStyle/>
@@ -5721,7 +5914,7 @@
 </file>
 
 <file path=ppt/slides/slide5.xml><?xml version="1.0" encoding="utf-8"?>
-<p:sld xmlns:a="http://schemas.openxmlformats.org/drawingml/2006/main" xmlns:r="http://schemas.openxmlformats.org/officeDocument/2006/relationships" xmlns:p="http://schemas.openxmlformats.org/presentationml/2006/main">
+<p:sld xmlns:a="http://schemas.openxmlformats.org/drawingml/2006/main" xmlns:p="http://schemas.openxmlformats.org/presentationml/2006/main" xmlns:r="http://schemas.openxmlformats.org/officeDocument/2006/relationships">
   <p:cSld>
     <p:bg>
       <p:bgPr>
@@ -5737,14 +5930,7 @@
         <p:cNvGrpSpPr/>
         <p:nvPr/>
       </p:nvGrpSpPr>
-      <p:grpSpPr>
-        <a:xfrm>
-          <a:off x="0" y="0"/>
-          <a:ext cx="0" cy="0"/>
-          <a:chOff x="0" y="0"/>
-          <a:chExt cx="0" cy="0"/>
-        </a:xfrm>
-      </p:grpSpPr>
+      <p:grpSpPr/>
       <p:sp>
         <p:nvSpPr>
           <p:cNvPr id="2" name="TextBox 1"/>
@@ -5762,7 +5948,7 @@
           <a:noFill/>
         </p:spPr>
         <p:txBody>
-          <a:bodyPr wrap="square" lIns="0" tIns="0" rIns="0" bIns="0">
+          <a:bodyPr wrap="square" lIns="0" rIns="0" tIns="0" bIns="0">
             <a:spAutoFit/>
           </a:bodyPr>
           <a:lstStyle/>
@@ -5779,7 +5965,7 @@
                 </a:solidFill>
                 <a:latin typeface="Cambria"/>
               </a:rPr>
-              <a:t>Under fading, the gain disappears</a:t>
+              <a:t>Under fading, the gain is small</a:t>
             </a:r>
           </a:p>
         </p:txBody>
@@ -5803,34 +5989,10 @@
                 <a:tableStyleId>{5C22544A-7EE6-4342-B048-85BDC9FD1C3A}</a:tableStyleId>
               </a:tblPr>
               <a:tblGrid>
-                <a:gridCol w="3383280">
-                  <a:extLst>
-                    <a:ext uri="{9D8B030D-6E8A-4147-A177-3AD203B41FA5}">
-                      <a16:colId xmlns:a16="http://schemas.microsoft.com/office/drawing/2014/main" val="20000"/>
-                    </a:ext>
-                  </a:extLst>
-                </a:gridCol>
-                <a:gridCol w="1188720">
-                  <a:extLst>
-                    <a:ext uri="{9D8B030D-6E8A-4147-A177-3AD203B41FA5}">
-                      <a16:colId xmlns:a16="http://schemas.microsoft.com/office/drawing/2014/main" val="20001"/>
-                    </a:ext>
-                  </a:extLst>
-                </a:gridCol>
-                <a:gridCol w="1188720">
-                  <a:extLst>
-                    <a:ext uri="{9D8B030D-6E8A-4147-A177-3AD203B41FA5}">
-                      <a16:colId xmlns:a16="http://schemas.microsoft.com/office/drawing/2014/main" val="20002"/>
-                    </a:ext>
-                  </a:extLst>
-                </a:gridCol>
-                <a:gridCol w="1188720">
-                  <a:extLst>
-                    <a:ext uri="{9D8B030D-6E8A-4147-A177-3AD203B41FA5}">
-                      <a16:colId xmlns:a16="http://schemas.microsoft.com/office/drawing/2014/main" val="20003"/>
-                    </a:ext>
-                  </a:extLst>
-                </a:gridCol>
+                <a:gridCol w="3383280"/>
+                <a:gridCol w="1188720"/>
+                <a:gridCol w="1188720"/>
+                <a:gridCol w="1188720"/>
               </a:tblGrid>
               <a:tr h="457200">
                 <a:tc>
@@ -5925,11 +6087,6 @@
                     </a:solidFill>
                   </a:tcPr>
                 </a:tc>
-                <a:extLst>
-                  <a:ext uri="{0D108BD9-81ED-4DB2-BD59-A6C34878D82A}">
-                    <a16:rowId xmlns:a16="http://schemas.microsoft.com/office/drawing/2014/main" val="10000"/>
-                  </a:ext>
-                </a:extLst>
               </a:tr>
               <a:tr h="457200">
                 <a:tc>
@@ -6024,11 +6181,6 @@
                     </a:solidFill>
                   </a:tcPr>
                 </a:tc>
-                <a:extLst>
-                  <a:ext uri="{0D108BD9-81ED-4DB2-BD59-A6C34878D82A}">
-                    <a16:rowId xmlns:a16="http://schemas.microsoft.com/office/drawing/2014/main" val="10001"/>
-                  </a:ext>
-                </a:extLst>
               </a:tr>
               <a:tr h="457200">
                 <a:tc>
@@ -6123,11 +6275,6 @@
                     </a:solidFill>
                   </a:tcPr>
                 </a:tc>
-                <a:extLst>
-                  <a:ext uri="{0D108BD9-81ED-4DB2-BD59-A6C34878D82A}">
-                    <a16:rowId xmlns:a16="http://schemas.microsoft.com/office/drawing/2014/main" val="10002"/>
-                  </a:ext>
-                </a:extLst>
               </a:tr>
               <a:tr h="457200">
                 <a:tc>
@@ -6222,11 +6369,6 @@
                     </a:solidFill>
                   </a:tcPr>
                 </a:tc>
-                <a:extLst>
-                  <a:ext uri="{0D108BD9-81ED-4DB2-BD59-A6C34878D82A}">
-                    <a16:rowId xmlns:a16="http://schemas.microsoft.com/office/drawing/2014/main" val="10003"/>
-                  </a:ext>
-                </a:extLst>
               </a:tr>
               <a:tr h="457200">
                 <a:tc>
@@ -6321,11 +6463,6 @@
                     </a:solidFill>
                   </a:tcPr>
                 </a:tc>
-                <a:extLst>
-                  <a:ext uri="{0D108BD9-81ED-4DB2-BD59-A6C34878D82A}">
-                    <a16:rowId xmlns:a16="http://schemas.microsoft.com/office/drawing/2014/main" val="10004"/>
-                  </a:ext>
-                </a:extLst>
               </a:tr>
               <a:tr h="457200">
                 <a:tc>
@@ -6420,11 +6557,6 @@
                     </a:solidFill>
                   </a:tcPr>
                 </a:tc>
-                <a:extLst>
-                  <a:ext uri="{0D108BD9-81ED-4DB2-BD59-A6C34878D82A}">
-                    <a16:rowId xmlns:a16="http://schemas.microsoft.com/office/drawing/2014/main" val="10005"/>
-                  </a:ext>
-                </a:extLst>
               </a:tr>
             </a:tbl>
           </a:graphicData>
@@ -6447,7 +6579,7 @@
           <a:noFill/>
         </p:spPr>
         <p:txBody>
-          <a:bodyPr wrap="square" lIns="0" tIns="0" rIns="0" bIns="0">
+          <a:bodyPr wrap="square" lIns="0" rIns="0" tIns="0" bIns="0">
             <a:spAutoFit/>
           </a:bodyPr>
           <a:lstStyle/>
@@ -6486,7 +6618,7 @@
           <a:noFill/>
         </p:spPr>
         <p:txBody>
-          <a:bodyPr wrap="square" lIns="0" tIns="0" rIns="0" bIns="0">
+          <a:bodyPr wrap="square" lIns="0" rIns="0" tIns="0" bIns="0">
             <a:spAutoFit/>
           </a:bodyPr>
           <a:lstStyle/>
@@ -6525,7 +6657,7 @@
           <a:noFill/>
         </p:spPr>
         <p:txBody>
-          <a:bodyPr wrap="square" lIns="0" tIns="0" rIns="0" bIns="0">
+          <a:bodyPr wrap="square" lIns="0" rIns="0" tIns="0" bIns="0">
             <a:spAutoFit/>
           </a:bodyPr>
           <a:lstStyle/>
@@ -6567,7 +6699,7 @@
           <a:noFill/>
         </p:spPr>
         <p:txBody>
-          <a:bodyPr wrap="square" lIns="0" tIns="0" rIns="0" bIns="0">
+          <a:bodyPr wrap="square" lIns="0" rIns="0" tIns="0" bIns="0">
             <a:spAutoFit/>
           </a:bodyPr>
           <a:lstStyle/>
@@ -6606,7 +6738,7 @@
           <a:noFill/>
         </p:spPr>
         <p:txBody>
-          <a:bodyPr wrap="square" lIns="0" tIns="0" rIns="0" bIns="0">
+          <a:bodyPr wrap="square" lIns="0" rIns="0" tIns="0" bIns="0">
             <a:spAutoFit/>
           </a:bodyPr>
           <a:lstStyle/>
@@ -6648,7 +6780,7 @@
           <a:noFill/>
         </p:spPr>
         <p:txBody>
-          <a:bodyPr wrap="square" lIns="0" tIns="0" rIns="0" bIns="0">
+          <a:bodyPr wrap="square" lIns="0" rIns="0" tIns="0" bIns="0">
             <a:spAutoFit/>
           </a:bodyPr>
           <a:lstStyle/>
@@ -6682,7 +6814,7 @@
 </file>
 
 <file path=ppt/slides/slide6.xml><?xml version="1.0" encoding="utf-8"?>
-<p:sld xmlns:a="http://schemas.openxmlformats.org/drawingml/2006/main" xmlns:r="http://schemas.openxmlformats.org/officeDocument/2006/relationships" xmlns:p="http://schemas.openxmlformats.org/presentationml/2006/main">
+<p:sld xmlns:a="http://schemas.openxmlformats.org/drawingml/2006/main" xmlns:p="http://schemas.openxmlformats.org/presentationml/2006/main" xmlns:r="http://schemas.openxmlformats.org/officeDocument/2006/relationships">
   <p:cSld>
     <p:bg>
       <p:bgPr>
@@ -6698,14 +6830,7 @@
         <p:cNvGrpSpPr/>
         <p:nvPr/>
       </p:nvGrpSpPr>
-      <p:grpSpPr>
-        <a:xfrm>
-          <a:off x="0" y="0"/>
-          <a:ext cx="0" cy="0"/>
-          <a:chOff x="0" y="0"/>
-          <a:chExt cx="0" cy="0"/>
-        </a:xfrm>
-      </p:grpSpPr>
+      <p:grpSpPr/>
       <p:sp>
         <p:nvSpPr>
           <p:cNvPr id="2" name="TextBox 1"/>
@@ -6723,7 +6848,7 @@
           <a:noFill/>
         </p:spPr>
         <p:txBody>
-          <a:bodyPr wrap="square" lIns="0" tIns="0" rIns="0" bIns="0">
+          <a:bodyPr wrap="square" lIns="0" rIns="0" tIns="0" bIns="0">
             <a:spAutoFit/>
           </a:bodyPr>
           <a:lstStyle/>
@@ -6754,7 +6879,7 @@
           <p:nvPr/>
         </p:nvPicPr>
         <p:blipFill>
-          <a:blip r:embed="rId3"/>
+          <a:blip r:embed="rId2"/>
           <a:stretch>
             <a:fillRect/>
           </a:stretch>
@@ -6786,7 +6911,7 @@
           <a:noFill/>
         </p:spPr>
         <p:txBody>
-          <a:bodyPr wrap="square" lIns="0" tIns="0" rIns="0" bIns="0">
+          <a:bodyPr wrap="square" lIns="0" rIns="0" tIns="0" bIns="0">
             <a:spAutoFit/>
           </a:bodyPr>
           <a:lstStyle/>
@@ -6847,7 +6972,7 @@
           <a:noFill/>
         </p:spPr>
         <p:txBody>
-          <a:bodyPr wrap="square" lIns="0" tIns="0" rIns="0" bIns="0">
+          <a:bodyPr wrap="square" lIns="0" rIns="0" tIns="0" bIns="0">
             <a:spAutoFit/>
           </a:bodyPr>
           <a:lstStyle/>
@@ -6886,7 +7011,7 @@
           <a:noFill/>
         </p:spPr>
         <p:txBody>
-          <a:bodyPr wrap="square" lIns="0" tIns="0" rIns="0" bIns="0">
+          <a:bodyPr wrap="square" lIns="0" rIns="0" tIns="0" bIns="0">
             <a:spAutoFit/>
           </a:bodyPr>
           <a:lstStyle/>
@@ -6928,7 +7053,7 @@
           <a:noFill/>
         </p:spPr>
         <p:txBody>
-          <a:bodyPr wrap="square" lIns="0" tIns="0" rIns="0" bIns="0">
+          <a:bodyPr wrap="square" lIns="0" rIns="0" tIns="0" bIns="0">
             <a:spAutoFit/>
           </a:bodyPr>
           <a:lstStyle/>
@@ -6967,7 +7092,7 @@
           <a:noFill/>
         </p:spPr>
         <p:txBody>
-          <a:bodyPr wrap="square" lIns="0" tIns="0" rIns="0" bIns="0">
+          <a:bodyPr wrap="square" lIns="0" rIns="0" tIns="0" bIns="0">
             <a:spAutoFit/>
           </a:bodyPr>
           <a:lstStyle/>
@@ -7001,7 +7126,7 @@
 </file>
 
 <file path=ppt/slides/slide7.xml><?xml version="1.0" encoding="utf-8"?>
-<p:sld xmlns:a="http://schemas.openxmlformats.org/drawingml/2006/main" xmlns:r="http://schemas.openxmlformats.org/officeDocument/2006/relationships" xmlns:p="http://schemas.openxmlformats.org/presentationml/2006/main">
+<p:sld xmlns:a="http://schemas.openxmlformats.org/drawingml/2006/main" xmlns:p="http://schemas.openxmlformats.org/presentationml/2006/main" xmlns:r="http://schemas.openxmlformats.org/officeDocument/2006/relationships">
   <p:cSld>
     <p:bg>
       <p:bgPr>
@@ -7017,14 +7142,7 @@
         <p:cNvGrpSpPr/>
         <p:nvPr/>
       </p:nvGrpSpPr>
-      <p:grpSpPr>
-        <a:xfrm>
-          <a:off x="0" y="0"/>
-          <a:ext cx="0" cy="0"/>
-          <a:chOff x="0" y="0"/>
-          <a:chExt cx="0" cy="0"/>
-        </a:xfrm>
-      </p:grpSpPr>
+      <p:grpSpPr/>
       <p:sp>
         <p:nvSpPr>
           <p:cNvPr id="2" name="TextBox 1"/>
@@ -7042,7 +7160,7 @@
           <a:noFill/>
         </p:spPr>
         <p:txBody>
-          <a:bodyPr wrap="square" lIns="0" tIns="0" rIns="0" bIns="0">
+          <a:bodyPr wrap="square" lIns="0" rIns="0" tIns="0" bIns="0">
             <a:spAutoFit/>
           </a:bodyPr>
           <a:lstStyle/>
@@ -7081,7 +7199,7 @@
           <a:noFill/>
         </p:spPr>
         <p:txBody>
-          <a:bodyPr wrap="square" lIns="0" tIns="0" rIns="0" bIns="0">
+          <a:bodyPr wrap="square" lIns="0" rIns="0" tIns="0" bIns="0">
             <a:spAutoFit/>
           </a:bodyPr>
           <a:lstStyle/>
@@ -7120,7 +7238,7 @@
           <a:noFill/>
         </p:spPr>
         <p:txBody>
-          <a:bodyPr wrap="square" lIns="0" tIns="0" rIns="0" bIns="0">
+          <a:bodyPr wrap="square" lIns="0" rIns="0" tIns="0" bIns="0">
             <a:spAutoFit/>
           </a:bodyPr>
           <a:lstStyle/>
@@ -7159,7 +7277,7 @@
           <a:noFill/>
         </p:spPr>
         <p:txBody>
-          <a:bodyPr wrap="square" lIns="0" tIns="0" rIns="0" bIns="0">
+          <a:bodyPr wrap="square" lIns="0" rIns="0" tIns="0" bIns="0">
             <a:spAutoFit/>
           </a:bodyPr>
           <a:lstStyle/>
@@ -7198,7 +7316,7 @@
           <a:noFill/>
         </p:spPr>
         <p:txBody>
-          <a:bodyPr wrap="square" lIns="0" tIns="0" rIns="0" bIns="0">
+          <a:bodyPr wrap="square" lIns="0" rIns="0" tIns="0" bIns="0">
             <a:spAutoFit/>
           </a:bodyPr>
           <a:lstStyle/>
@@ -7240,7 +7358,7 @@
           <a:noFill/>
         </p:spPr>
         <p:txBody>
-          <a:bodyPr wrap="square" lIns="0" tIns="0" rIns="0" bIns="0">
+          <a:bodyPr wrap="square" lIns="0" rIns="0" tIns="0" bIns="0">
             <a:spAutoFit/>
           </a:bodyPr>
           <a:lstStyle/>
@@ -7279,7 +7397,7 @@
           <a:noFill/>
         </p:spPr>
         <p:txBody>
-          <a:bodyPr wrap="square" lIns="0" tIns="0" rIns="0" bIns="0">
+          <a:bodyPr wrap="square" lIns="0" rIns="0" tIns="0" bIns="0">
             <a:spAutoFit/>
           </a:bodyPr>
           <a:lstStyle/>
@@ -7318,7 +7436,7 @@
           <a:noFill/>
         </p:spPr>
         <p:txBody>
-          <a:bodyPr wrap="square" lIns="0" tIns="0" rIns="0" bIns="0">
+          <a:bodyPr wrap="square" lIns="0" rIns="0" tIns="0" bIns="0">
             <a:spAutoFit/>
           </a:bodyPr>
           <a:lstStyle/>
@@ -7386,7 +7504,6 @@
           <a:lstStyle/>
           <a:p>
             <a:pPr algn="ctr"/>
-            <a:endParaRPr/>
           </a:p>
         </p:txBody>
       </p:sp>
@@ -7407,7 +7524,7 @@
           <a:noFill/>
         </p:spPr>
         <p:txBody>
-          <a:bodyPr wrap="square" lIns="0" tIns="0" rIns="0" bIns="0">
+          <a:bodyPr wrap="square" lIns="0" rIns="0" tIns="0" bIns="0">
             <a:spAutoFit/>
           </a:bodyPr>
           <a:lstStyle/>
@@ -7446,7 +7563,7 @@
           <a:noFill/>
         </p:spPr>
         <p:txBody>
-          <a:bodyPr wrap="square" lIns="0" tIns="0" rIns="0" bIns="0">
+          <a:bodyPr wrap="square" lIns="0" rIns="0" tIns="0" bIns="0">
             <a:spAutoFit/>
           </a:bodyPr>
           <a:lstStyle/>
@@ -7518,7 +7635,7 @@
 </file>
 
 <file path=ppt/slides/slide8.xml><?xml version="1.0" encoding="utf-8"?>
-<p:sld xmlns:a="http://schemas.openxmlformats.org/drawingml/2006/main" xmlns:r="http://schemas.openxmlformats.org/officeDocument/2006/relationships" xmlns:p="http://schemas.openxmlformats.org/presentationml/2006/main">
+<p:sld xmlns:a="http://schemas.openxmlformats.org/drawingml/2006/main" xmlns:p="http://schemas.openxmlformats.org/presentationml/2006/main" xmlns:r="http://schemas.openxmlformats.org/officeDocument/2006/relationships">
   <p:cSld>
     <p:bg>
       <p:bgPr>
@@ -7534,14 +7651,7 @@
         <p:cNvGrpSpPr/>
         <p:nvPr/>
       </p:nvGrpSpPr>
-      <p:grpSpPr>
-        <a:xfrm>
-          <a:off x="0" y="0"/>
-          <a:ext cx="0" cy="0"/>
-          <a:chOff x="0" y="0"/>
-          <a:chExt cx="0" cy="0"/>
-        </a:xfrm>
-      </p:grpSpPr>
+      <p:grpSpPr/>
       <p:sp>
         <p:nvSpPr>
           <p:cNvPr id="2" name="TextBox 1"/>
@@ -7559,7 +7669,7 @@
           <a:noFill/>
         </p:spPr>
         <p:txBody>
-          <a:bodyPr wrap="square" lIns="0" tIns="0" rIns="0" bIns="0">
+          <a:bodyPr wrap="square" lIns="0" rIns="0" tIns="0" bIns="0">
             <a:spAutoFit/>
           </a:bodyPr>
           <a:lstStyle/>
@@ -7598,7 +7708,7 @@
           <a:noFill/>
         </p:spPr>
         <p:txBody>
-          <a:bodyPr wrap="square" lIns="0" tIns="0" rIns="0" bIns="0">
+          <a:bodyPr wrap="square" lIns="0" rIns="0" tIns="0" bIns="0">
             <a:spAutoFit/>
           </a:bodyPr>
           <a:lstStyle/>
@@ -7637,7 +7747,7 @@
           <a:noFill/>
         </p:spPr>
         <p:txBody>
-          <a:bodyPr wrap="square" lIns="0" tIns="0" rIns="0" bIns="0">
+          <a:bodyPr wrap="square" lIns="0" rIns="0" tIns="0" bIns="0">
             <a:spAutoFit/>
           </a:bodyPr>
           <a:lstStyle/>
@@ -7676,7 +7786,7 @@
           <a:noFill/>
         </p:spPr>
         <p:txBody>
-          <a:bodyPr wrap="square" lIns="0" tIns="0" rIns="0" bIns="0">
+          <a:bodyPr wrap="square" lIns="0" rIns="0" tIns="0" bIns="0">
             <a:spAutoFit/>
           </a:bodyPr>
           <a:lstStyle/>
@@ -7715,7 +7825,7 @@
           <a:noFill/>
         </p:spPr>
         <p:txBody>
-          <a:bodyPr wrap="square" lIns="0" tIns="0" rIns="0" bIns="0">
+          <a:bodyPr wrap="square" lIns="0" rIns="0" tIns="0" bIns="0">
             <a:spAutoFit/>
           </a:bodyPr>
           <a:lstStyle/>
@@ -7757,7 +7867,7 @@
           <a:noFill/>
         </p:spPr>
         <p:txBody>
-          <a:bodyPr wrap="square" lIns="0" tIns="0" rIns="0" bIns="0">
+          <a:bodyPr wrap="square" lIns="0" rIns="0" tIns="0" bIns="0">
             <a:spAutoFit/>
           </a:bodyPr>
           <a:lstStyle/>
@@ -7796,7 +7906,7 @@
           <a:noFill/>
         </p:spPr>
         <p:txBody>
-          <a:bodyPr wrap="square" lIns="0" tIns="0" rIns="0" bIns="0">
+          <a:bodyPr wrap="square" lIns="0" rIns="0" tIns="0" bIns="0">
             <a:spAutoFit/>
           </a:bodyPr>
           <a:lstStyle/>
@@ -7835,7 +7945,7 @@
           <a:noFill/>
         </p:spPr>
         <p:txBody>
-          <a:bodyPr wrap="square" lIns="0" tIns="0" rIns="0" bIns="0">
+          <a:bodyPr wrap="square" lIns="0" rIns="0" tIns="0" bIns="0">
             <a:spAutoFit/>
           </a:bodyPr>
           <a:lstStyle/>
@@ -7903,7 +8013,6 @@
           <a:lstStyle/>
           <a:p>
             <a:pPr algn="ctr"/>
-            <a:endParaRPr/>
           </a:p>
         </p:txBody>
       </p:sp>
@@ -7924,7 +8033,7 @@
           <a:noFill/>
         </p:spPr>
         <p:txBody>
-          <a:bodyPr wrap="square" lIns="0" tIns="0" rIns="0" bIns="0">
+          <a:bodyPr wrap="square" lIns="0" rIns="0" tIns="0" bIns="0">
             <a:spAutoFit/>
           </a:bodyPr>
           <a:lstStyle/>
@@ -7963,7 +8072,7 @@
           <a:noFill/>
         </p:spPr>
         <p:txBody>
-          <a:bodyPr wrap="square" lIns="0" tIns="0" rIns="0" bIns="0">
+          <a:bodyPr wrap="square" lIns="0" rIns="0" tIns="0" bIns="0">
             <a:spAutoFit/>
           </a:bodyPr>
           <a:lstStyle/>
@@ -8035,7 +8144,7 @@
 </file>
 
 <file path=ppt/slides/slide9.xml><?xml version="1.0" encoding="utf-8"?>
-<p:sld xmlns:a="http://schemas.openxmlformats.org/drawingml/2006/main" xmlns:r="http://schemas.openxmlformats.org/officeDocument/2006/relationships" xmlns:p="http://schemas.openxmlformats.org/presentationml/2006/main">
+<p:sld xmlns:a="http://schemas.openxmlformats.org/drawingml/2006/main" xmlns:p="http://schemas.openxmlformats.org/presentationml/2006/main" xmlns:r="http://schemas.openxmlformats.org/officeDocument/2006/relationships">
   <p:cSld>
     <p:bg>
       <p:bgPr>
@@ -8051,14 +8160,7 @@
         <p:cNvGrpSpPr/>
         <p:nvPr/>
       </p:nvGrpSpPr>
-      <p:grpSpPr>
-        <a:xfrm>
-          <a:off x="0" y="0"/>
-          <a:ext cx="0" cy="0"/>
-          <a:chOff x="0" y="0"/>
-          <a:chExt cx="0" cy="0"/>
-        </a:xfrm>
-      </p:grpSpPr>
+      <p:grpSpPr/>
       <p:sp>
         <p:nvSpPr>
           <p:cNvPr id="2" name="TextBox 1"/>
@@ -8076,7 +8178,7 @@
           <a:noFill/>
         </p:spPr>
         <p:txBody>
-          <a:bodyPr wrap="square" lIns="0" tIns="0" rIns="0" bIns="0">
+          <a:bodyPr wrap="square" lIns="0" rIns="0" tIns="0" bIns="0">
             <a:spAutoFit/>
           </a:bodyPr>
           <a:lstStyle/>
@@ -8115,7 +8217,7 @@
           <a:noFill/>
         </p:spPr>
         <p:txBody>
-          <a:bodyPr wrap="square" lIns="0" tIns="0" rIns="0" bIns="0">
+          <a:bodyPr wrap="square" lIns="0" rIns="0" tIns="0" bIns="0">
             <a:spAutoFit/>
           </a:bodyPr>
           <a:lstStyle/>
@@ -8202,7 +8304,6 @@
           <a:lstStyle/>
           <a:p>
             <a:pPr algn="ctr"/>
-            <a:endParaRPr/>
           </a:p>
         </p:txBody>
       </p:sp>
@@ -8223,7 +8324,7 @@
           <a:noFill/>
         </p:spPr>
         <p:txBody>
-          <a:bodyPr wrap="square" lIns="0" tIns="0" rIns="0" bIns="0">
+          <a:bodyPr wrap="square" lIns="0" rIns="0" tIns="0" bIns="0">
             <a:spAutoFit/>
           </a:bodyPr>
           <a:lstStyle/>
@@ -8284,7 +8385,7 @@
           <a:noFill/>
         </p:spPr>
         <p:txBody>
-          <a:bodyPr wrap="square" lIns="0" tIns="0" rIns="0" bIns="0">
+          <a:bodyPr wrap="square" lIns="0" rIns="0" tIns="0" bIns="0">
             <a:spAutoFit/>
           </a:bodyPr>
           <a:lstStyle/>
@@ -8645,44 +8746,44 @@
         <a:sysClr val="window" lastClr="FFFFFF"/>
       </a:lt1>
       <a:dk2>
-        <a:srgbClr val="0E2841"/>
+        <a:srgbClr val="1F497D"/>
       </a:dk2>
       <a:lt2>
-        <a:srgbClr val="E8E8E8"/>
+        <a:srgbClr val="EEECE1"/>
       </a:lt2>
       <a:accent1>
-        <a:srgbClr val="156082"/>
+        <a:srgbClr val="4F81BD"/>
       </a:accent1>
       <a:accent2>
-        <a:srgbClr val="E97132"/>
+        <a:srgbClr val="C0504D"/>
       </a:accent2>
       <a:accent3>
-        <a:srgbClr val="196B24"/>
+        <a:srgbClr val="9BBB59"/>
       </a:accent3>
       <a:accent4>
-        <a:srgbClr val="0F9ED5"/>
+        <a:srgbClr val="8064A2"/>
       </a:accent4>
       <a:accent5>
-        <a:srgbClr val="A02B93"/>
+        <a:srgbClr val="4BACC6"/>
       </a:accent5>
       <a:accent6>
-        <a:srgbClr val="4EA72E"/>
+        <a:srgbClr val="F79646"/>
       </a:accent6>
       <a:hlink>
-        <a:srgbClr val="467886"/>
+        <a:srgbClr val="0000FF"/>
       </a:hlink>
       <a:folHlink>
-        <a:srgbClr val="96607D"/>
+        <a:srgbClr val="800080"/>
       </a:folHlink>
     </a:clrScheme>
     <a:fontScheme name="Office">
       <a:majorFont>
-        <a:latin typeface="Aptos Display" panose="02110004020202020204"/>
+        <a:latin typeface="Calibri"/>
         <a:ea typeface=""/>
         <a:cs typeface=""/>
-        <a:font script="Jpan" typeface="游ゴシック Light"/>
+        <a:font script="Jpan" typeface="ＭＳ Ｐゴシック"/>
         <a:font script="Hang" typeface="맑은 고딕"/>
-        <a:font script="Hans" typeface="等线 Light"/>
+        <a:font script="Hans" typeface="宋体"/>
         <a:font script="Hant" typeface="新細明體"/>
         <a:font script="Arab" typeface="Times New Roman"/>
         <a:font script="Hebr" typeface="Times New Roman"/>
@@ -8710,31 +8811,14 @@
         <a:font script="Viet" typeface="Times New Roman"/>
         <a:font script="Uigh" typeface="Microsoft Uighur"/>
         <a:font script="Geor" typeface="Sylfaen"/>
-        <a:font script="Armn" typeface="Arial"/>
-        <a:font script="Bugi" typeface="Leelawadee UI"/>
-        <a:font script="Bopo" typeface="Microsoft JhengHei"/>
-        <a:font script="Java" typeface="Javanese Text"/>
-        <a:font script="Lisu" typeface="Segoe UI"/>
-        <a:font script="Mymr" typeface="Myanmar Text"/>
-        <a:font script="Nkoo" typeface="Ebrima"/>
-        <a:font script="Olck" typeface="Nirmala UI"/>
-        <a:font script="Osma" typeface="Ebrima"/>
-        <a:font script="Phag" typeface="Phagspa"/>
-        <a:font script="Syrn" typeface="Estrangelo Edessa"/>
-        <a:font script="Syrj" typeface="Estrangelo Edessa"/>
-        <a:font script="Syre" typeface="Estrangelo Edessa"/>
-        <a:font script="Sora" typeface="Nirmala UI"/>
-        <a:font script="Tale" typeface="Microsoft Tai Le"/>
-        <a:font script="Talu" typeface="Microsoft New Tai Lue"/>
-        <a:font script="Tfng" typeface="Ebrima"/>
       </a:majorFont>
       <a:minorFont>
-        <a:latin typeface="Aptos" panose="02110004020202020204"/>
+        <a:latin typeface="Calibri"/>
         <a:ea typeface=""/>
         <a:cs typeface=""/>
-        <a:font script="Jpan" typeface="游ゴシック"/>
+        <a:font script="Jpan" typeface="ＭＳ Ｐゴシック"/>
         <a:font script="Hang" typeface="맑은 고딕"/>
-        <a:font script="Hans" typeface="等线"/>
+        <a:font script="Hans" typeface="宋体"/>
         <a:font script="Hant" typeface="新細明體"/>
         <a:font script="Arab" typeface="Arial"/>
         <a:font script="Hebr" typeface="Arial"/>
@@ -8762,23 +8846,6 @@
         <a:font script="Viet" typeface="Arial"/>
         <a:font script="Uigh" typeface="Microsoft Uighur"/>
         <a:font script="Geor" typeface="Sylfaen"/>
-        <a:font script="Armn" typeface="Arial"/>
-        <a:font script="Bugi" typeface="Leelawadee UI"/>
-        <a:font script="Bopo" typeface="Microsoft JhengHei"/>
-        <a:font script="Java" typeface="Javanese Text"/>
-        <a:font script="Lisu" typeface="Segoe UI"/>
-        <a:font script="Mymr" typeface="Myanmar Text"/>
-        <a:font script="Nkoo" typeface="Ebrima"/>
-        <a:font script="Olck" typeface="Nirmala UI"/>
-        <a:font script="Osma" typeface="Ebrima"/>
-        <a:font script="Phag" typeface="Phagspa"/>
-        <a:font script="Syrn" typeface="Estrangelo Edessa"/>
-        <a:font script="Syrj" typeface="Estrangelo Edessa"/>
-        <a:font script="Syre" typeface="Estrangelo Edessa"/>
-        <a:font script="Sora" typeface="Nirmala UI"/>
-        <a:font script="Tale" typeface="Microsoft Tai Le"/>
-        <a:font script="Talu" typeface="Microsoft New Tai Lue"/>
-        <a:font script="Tfng" typeface="Ebrima"/>
       </a:minorFont>
     </a:fontScheme>
     <a:fmtScheme name="Office">
@@ -8790,136 +8857,180 @@
           <a:gsLst>
             <a:gs pos="0">
               <a:schemeClr val="phClr">
-                <a:lumMod val="110000"/>
-                <a:satMod val="105000"/>
-                <a:tint val="67000"/>
+                <a:tint val="50000"/>
+                <a:satMod val="300000"/>
               </a:schemeClr>
             </a:gs>
-            <a:gs pos="50000">
+            <a:gs pos="35000">
               <a:schemeClr val="phClr">
-                <a:lumMod val="105000"/>
-                <a:satMod val="103000"/>
-                <a:tint val="73000"/>
+                <a:tint val="37000"/>
+                <a:satMod val="300000"/>
               </a:schemeClr>
             </a:gs>
             <a:gs pos="100000">
               <a:schemeClr val="phClr">
-                <a:lumMod val="105000"/>
-                <a:satMod val="109000"/>
-                <a:tint val="81000"/>
+                <a:tint val="15000"/>
+                <a:satMod val="350000"/>
               </a:schemeClr>
             </a:gs>
           </a:gsLst>
-          <a:lin ang="5400000" scaled="0"/>
+          <a:lin ang="16200000" scaled="1"/>
         </a:gradFill>
         <a:gradFill rotWithShape="1">
           <a:gsLst>
             <a:gs pos="0">
               <a:schemeClr val="phClr">
-                <a:satMod val="103000"/>
-                <a:lumMod val="102000"/>
-                <a:tint val="94000"/>
-              </a:schemeClr>
-            </a:gs>
-            <a:gs pos="50000">
-              <a:schemeClr val="phClr">
-                <a:satMod val="110000"/>
-                <a:lumMod val="100000"/>
+                <a:tint val="100000"/>
                 <a:shade val="100000"/>
+                <a:satMod val="130000"/>
               </a:schemeClr>
             </a:gs>
             <a:gs pos="100000">
               <a:schemeClr val="phClr">
-                <a:lumMod val="99000"/>
-                <a:satMod val="120000"/>
-                <a:shade val="78000"/>
+                <a:tint val="50000"/>
+                <a:shade val="100000"/>
+                <a:satMod val="350000"/>
               </a:schemeClr>
             </a:gs>
           </a:gsLst>
-          <a:lin ang="5400000" scaled="0"/>
+          <a:lin ang="16200000" scaled="0"/>
         </a:gradFill>
       </a:fillStyleLst>
       <a:lnStyleLst>
-        <a:ln w="12700" cap="flat" cmpd="sng" algn="ctr">
+        <a:ln w="9525" cap="flat" cmpd="sng" algn="ctr">
           <a:solidFill>
-            <a:schemeClr val="phClr"/>
+            <a:schemeClr val="phClr">
+              <a:shade val="95000"/>
+              <a:satMod val="105000"/>
+            </a:schemeClr>
           </a:solidFill>
           <a:prstDash val="solid"/>
-          <a:miter lim="800000"/>
-        </a:ln>
-        <a:ln w="19050" cap="flat" cmpd="sng" algn="ctr">
-          <a:solidFill>
-            <a:schemeClr val="phClr"/>
-          </a:solidFill>
-          <a:prstDash val="solid"/>
-          <a:miter lim="800000"/>
         </a:ln>
         <a:ln w="25400" cap="flat" cmpd="sng" algn="ctr">
           <a:solidFill>
             <a:schemeClr val="phClr"/>
           </a:solidFill>
           <a:prstDash val="solid"/>
-          <a:miter lim="800000"/>
+        </a:ln>
+        <a:ln w="38100" cap="flat" cmpd="sng" algn="ctr">
+          <a:solidFill>
+            <a:schemeClr val="phClr"/>
+          </a:solidFill>
+          <a:prstDash val="solid"/>
         </a:ln>
       </a:lnStyleLst>
       <a:effectStyleLst>
         <a:effectStyle>
-          <a:effectLst/>
-        </a:effectStyle>
-        <a:effectStyle>
-          <a:effectLst/>
+          <a:effectLst>
+            <a:outerShdw blurRad="40000" dist="20000" dir="5400000" rotWithShape="0">
+              <a:srgbClr val="000000">
+                <a:alpha val="38000"/>
+              </a:srgbClr>
+            </a:outerShdw>
+          </a:effectLst>
         </a:effectStyle>
         <a:effectStyle>
           <a:effectLst>
-            <a:outerShdw blurRad="57150" dist="19050" dir="5400000" algn="ctr" rotWithShape="0">
+            <a:outerShdw blurRad="40000" dist="23000" dir="5400000" rotWithShape="0">
               <a:srgbClr val="000000">
-                <a:alpha val="63000"/>
+                <a:alpha val="35000"/>
               </a:srgbClr>
             </a:outerShdw>
           </a:effectLst>
+        </a:effectStyle>
+        <a:effectStyle>
+          <a:effectLst>
+            <a:outerShdw blurRad="40000" dist="23000" dir="5400000" rotWithShape="0">
+              <a:srgbClr val="000000">
+                <a:alpha val="35000"/>
+              </a:srgbClr>
+            </a:outerShdw>
+          </a:effectLst>
+          <a:scene3d>
+            <a:camera prst="orthographicFront">
+              <a:rot lat="0" lon="0" rev="0"/>
+            </a:camera>
+            <a:lightRig rig="threePt" dir="t">
+              <a:rot lat="0" lon="0" rev="1200000"/>
+            </a:lightRig>
+          </a:scene3d>
+          <a:sp3d>
+            <a:bevelT w="63500" h="25400"/>
+          </a:sp3d>
         </a:effectStyle>
       </a:effectStyleLst>
       <a:bgFillStyleLst>
         <a:solidFill>
           <a:schemeClr val="phClr"/>
         </a:solidFill>
-        <a:solidFill>
-          <a:schemeClr val="phClr">
-            <a:tint val="95000"/>
-            <a:satMod val="170000"/>
-          </a:schemeClr>
-        </a:solidFill>
         <a:gradFill rotWithShape="1">
           <a:gsLst>
             <a:gs pos="0">
               <a:schemeClr val="phClr">
-                <a:tint val="93000"/>
-                <a:satMod val="150000"/>
-                <a:shade val="98000"/>
-                <a:lumMod val="102000"/>
+                <a:tint val="40000"/>
+                <a:satMod val="350000"/>
               </a:schemeClr>
             </a:gs>
-            <a:gs pos="50000">
+            <a:gs pos="40000">
               <a:schemeClr val="phClr">
-                <a:tint val="98000"/>
-                <a:satMod val="130000"/>
-                <a:shade val="90000"/>
-                <a:lumMod val="103000"/>
+                <a:tint val="45000"/>
+                <a:shade val="99000"/>
+                <a:satMod val="350000"/>
               </a:schemeClr>
             </a:gs>
             <a:gs pos="100000">
               <a:schemeClr val="phClr">
-                <a:shade val="63000"/>
-                <a:satMod val="120000"/>
+                <a:shade val="20000"/>
+                <a:satMod val="255000"/>
               </a:schemeClr>
             </a:gs>
           </a:gsLst>
-          <a:lin ang="5400000" scaled="0"/>
+          <a:path path="circle">
+            <a:fillToRect l="50000" t="-80000" r="50000" b="180000"/>
+          </a:path>
+        </a:gradFill>
+        <a:gradFill rotWithShape="1">
+          <a:gsLst>
+            <a:gs pos="0">
+              <a:schemeClr val="phClr">
+                <a:tint val="80000"/>
+                <a:satMod val="300000"/>
+              </a:schemeClr>
+            </a:gs>
+            <a:gs pos="100000">
+              <a:schemeClr val="phClr">
+                <a:shade val="30000"/>
+                <a:satMod val="200000"/>
+              </a:schemeClr>
+            </a:gs>
+          </a:gsLst>
+          <a:path path="circle">
+            <a:fillToRect l="50000" t="50000" r="50000" b="50000"/>
+          </a:path>
         </a:gradFill>
       </a:bgFillStyleLst>
     </a:fmtScheme>
   </a:themeElements>
   <a:objectDefaults>
+    <a:spDef>
+      <a:spPr/>
+      <a:bodyPr/>
+      <a:lstStyle/>
+      <a:style>
+        <a:lnRef idx="1">
+          <a:schemeClr val="accent1"/>
+        </a:lnRef>
+        <a:fillRef idx="3">
+          <a:schemeClr val="accent1"/>
+        </a:fillRef>
+        <a:effectRef idx="2">
+          <a:schemeClr val="accent1"/>
+        </a:effectRef>
+        <a:fontRef idx="minor">
+          <a:schemeClr val="lt1"/>
+        </a:fontRef>
+      </a:style>
+    </a:spDef>
     <a:lnDef>
       <a:spPr/>
       <a:bodyPr/>
@@ -8941,10 +9052,5 @@
     </a:lnDef>
   </a:objectDefaults>
   <a:extraClrSchemeLst/>
-  <a:extLst>
-    <a:ext uri="{05A4C25C-085E-4340-85A3-A5531E510DB2}">
-      <thm15:themeFamily xmlns:thm15="http://schemas.microsoft.com/office/thememl/2012/main" name="Office Theme" id="{2E142A2C-CD16-42D6-873A-C26D2A0506FA}" vid="{1BDDFF52-6CD6-40A5-AB3C-68EB2F1E4D0A}"/>
-    </a:ext>
-  </a:extLst>
 </a:theme>
 </file>